--- a/Kaccha Mango_PS02.pptx
+++ b/Kaccha Mango_PS02.pptx
@@ -3245,45 +3245,6 @@
       </p:pic>
       <p:sp>
         <p:nvSpPr>
-          <p:cNvPr id="29" name="Text 23"/>
-          <p:cNvSpPr txBox="1"/>
-          <p:nvPr/>
-        </p:nvSpPr>
-        <p:spPr>
-          <a:xfrm>
-            <a:off x="780898" y="4120286"/>
-            <a:ext cx="5574182" cy="200254"/>
-          </a:xfrm>
-          <a:prstGeom prst="rect">
-            <a:avLst/>
-          </a:prstGeom>
-          <a:noFill/>
-          <a:ln/>
-        </p:spPr>
-        <p:txBody>
-          <a:bodyPr wrap="square" lIns="0" tIns="0" rIns="0" bIns="0" rtlCol="0" anchor="ctr"/>
-          <a:lstStyle/>
-          <a:p>
-            <a:pPr marL="0" indent="0" algn="l">
-              <a:buNone/>
-            </a:pPr>
-            <a:r>
-              <a:rPr lang="en-US" sz="1000" b="1" i="1" dirty="0">
-                <a:solidFill>
-                  <a:srgbClr val="AAAAAA"/>
-                </a:solidFill>
-                <a:latin typeface="Poppins" pitchFamily="34" charset="0"/>
-                <a:ea typeface="Poppins" pitchFamily="34" charset="-122"/>
-                <a:cs typeface="Poppins" pitchFamily="34" charset="-120"/>
-              </a:rPr>
-              <a:t>A team can have up to 4 members including the team leader. Add rows if necessary.</a:t>
-            </a:r>
-            <a:endParaRPr lang="en-US" sz="1000" b="1" dirty="0"/>
-          </a:p>
-        </p:txBody>
-      </p:sp>
-      <p:sp>
-        <p:nvSpPr>
           <p:cNvPr id="30" name="Shape 24"/>
           <p:cNvSpPr/>
           <p:nvPr/>
@@ -4258,7 +4219,7 @@
         <p:spPr>
           <a:xfrm>
             <a:off x="8492033" y="2270455"/>
-            <a:ext cx="975665" cy="200254"/>
+            <a:ext cx="975665" cy="201168"/>
           </a:xfrm>
           <a:prstGeom prst="rect">
             <a:avLst/>
@@ -4358,7 +4319,7 @@
         <p:spPr>
           <a:xfrm>
             <a:off x="8492033" y="2725826"/>
-            <a:ext cx="975665" cy="200254"/>
+            <a:ext cx="975665" cy="201168"/>
           </a:xfrm>
           <a:prstGeom prst="rect">
             <a:avLst/>
@@ -4444,7 +4405,7 @@
         <p:spPr>
           <a:xfrm>
             <a:off x="8492033" y="3181198"/>
-            <a:ext cx="975665" cy="200254"/>
+            <a:ext cx="975665" cy="201168"/>
           </a:xfrm>
           <a:prstGeom prst="rect">
             <a:avLst/>
@@ -4519,7 +4480,7 @@
         <p:spPr>
           <a:xfrm>
             <a:off x="8492033" y="3636569"/>
-            <a:ext cx="975665" cy="200254"/>
+            <a:ext cx="975665" cy="201168"/>
           </a:xfrm>
           <a:prstGeom prst="rect">
             <a:avLst/>
@@ -5229,7 +5190,7 @@
         </p:nvSpPr>
         <p:spPr>
           <a:xfrm>
-            <a:off x="1200607" y="4283050"/>
+            <a:off x="1200607" y="3931463"/>
             <a:ext cx="8968435" cy="1920240"/>
           </a:xfrm>
           <a:prstGeom prst="rect">
@@ -5252,7 +5213,7 @@
               <a:buNone/>
             </a:pPr>
             <a:r>
-              <a:rPr sz="1200">
+              <a:rPr sz="1200" dirty="0">
                 <a:solidFill>
                   <a:srgbClr val="FFFFFF"/>
                 </a:solidFill>
@@ -5272,13 +5233,31 @@
               </a:spcAft>
             </a:pPr>
             <a:r>
-              <a:rPr sz="1200">
+              <a:rPr sz="1200" dirty="0">
                 <a:solidFill>
                   <a:srgbClr val="FFFFFF"/>
                 </a:solidFill>
                 <a:latin typeface="Poppins"/>
               </a:rPr>
-              <a:t>Real DRAM structure is highly repetitive: a wrong periodic repeat can score almost identically to the true site. DriftSense recovers the target center (x, y) automatically, with a confidence/ambiguity score alongside it.</a:t>
+              <a:t>Real DRAM structure is highly repetitive: a wrong periodic repeat can score almost identically to the true site. </a:t>
+            </a:r>
+            <a:r>
+              <a:rPr sz="1200" dirty="0" err="1">
+                <a:solidFill>
+                  <a:srgbClr val="FFFFFF"/>
+                </a:solidFill>
+                <a:latin typeface="Poppins"/>
+              </a:rPr>
+              <a:t>DriftSense</a:t>
+            </a:r>
+            <a:r>
+              <a:rPr sz="1200" dirty="0">
+                <a:solidFill>
+                  <a:srgbClr val="FFFFFF"/>
+                </a:solidFill>
+                <a:latin typeface="Poppins"/>
+              </a:rPr>
+              <a:t> recovers the target center (x, y) automatically, with a confidence/ambiguity score alongside it.</a:t>
             </a:r>
           </a:p>
         </p:txBody>
@@ -5611,37 +5590,7 @@
                 <a:ea typeface="Poppins" pitchFamily="34" charset="-122"/>
                 <a:cs typeface="Poppins" pitchFamily="34" charset="-120"/>
               </a:rPr>
-              <a:t>Idea Description - </a:t>
-            </a:r>
-            <a:r>
-              <a:rPr lang="en-US" sz="2400" b="1" dirty="0">
-                <a:solidFill>
-                  <a:schemeClr val="tx2"/>
-                </a:solidFill>
-                <a:latin typeface="Poppins" panose="00000500000000000000" pitchFamily="2" charset="0"/>
-                <a:cs typeface="Poppins" panose="00000500000000000000" pitchFamily="2" charset="0"/>
-              </a:rPr>
-              <a:t>Describe your Idea/Solution</a:t>
-            </a:r>
-            <a:r>
-              <a:rPr lang="en-US" sz="2400" b="1" u="sng" dirty="0">
-                <a:solidFill>
-                  <a:schemeClr val="tx2"/>
-                </a:solidFill>
-                <a:latin typeface="Poppins" panose="00000500000000000000" pitchFamily="2" charset="0"/>
-                <a:cs typeface="Poppins" panose="00000500000000000000" pitchFamily="2" charset="0"/>
-              </a:rPr>
-              <a:t>/</a:t>
-            </a:r>
-            <a:r>
-              <a:rPr lang="en-US" sz="2400" b="1" dirty="0">
-                <a:solidFill>
-                  <a:schemeClr val="tx2"/>
-                </a:solidFill>
-                <a:latin typeface="Poppins" panose="00000500000000000000" pitchFamily="2" charset="0"/>
-                <a:cs typeface="Poppins" panose="00000500000000000000" pitchFamily="2" charset="0"/>
-              </a:rPr>
-              <a:t>Prototype</a:t>
+              <a:t>Idea Description</a:t>
             </a:r>
             <a:endParaRPr lang="en-US" sz="2600" dirty="0">
               <a:latin typeface="Poppins" panose="00000500000000000000" pitchFamily="2" charset="0"/>
@@ -5902,7 +5851,7 @@
                 <a:ea typeface="Poppins" pitchFamily="34" charset="-122"/>
                 <a:cs typeface="Poppins" pitchFamily="34" charset="-120"/>
               </a:rPr>
-              <a:t>Provide a brief summary of your idea, including the key concept and approach. Provide a brief overview of your solution and how it addresses the problem statement.</a:t>
+              <a:t>A classical, fully-reproducible localizer: search the scale x rotation space explicitly, score by normalised cross-correlation, and say so when the answer is not decisive.</a:t>
             </a:r>
             <a:endParaRPr lang="en-US" sz="1600" dirty="0"/>
           </a:p>
@@ -6472,37 +6421,7 @@
                 <a:ea typeface="Poppins" pitchFamily="34" charset="-122"/>
                 <a:cs typeface="Poppins" pitchFamily="34" charset="-120"/>
               </a:rPr>
-              <a:t>Proposed Solution -</a:t>
-            </a:r>
-            <a:r>
-              <a:rPr lang="en-US" sz="2400" b="1" dirty="0">
-                <a:solidFill>
-                  <a:schemeClr val="tx2"/>
-                </a:solidFill>
-                <a:latin typeface="Poppins" panose="00000500000000000000" pitchFamily="2" charset="0"/>
-                <a:cs typeface="Poppins" panose="00000500000000000000" pitchFamily="2" charset="0"/>
-              </a:rPr>
-              <a:t> Describe your Idea/Solution</a:t>
-            </a:r>
-            <a:r>
-              <a:rPr lang="en-US" sz="2400" b="1" u="sng" dirty="0">
-                <a:solidFill>
-                  <a:schemeClr val="tx2"/>
-                </a:solidFill>
-                <a:latin typeface="Poppins" panose="00000500000000000000" pitchFamily="2" charset="0"/>
-                <a:cs typeface="Poppins" panose="00000500000000000000" pitchFamily="2" charset="0"/>
-              </a:rPr>
-              <a:t>/</a:t>
-            </a:r>
-            <a:r>
-              <a:rPr lang="en-US" sz="2400" b="1" dirty="0">
-                <a:solidFill>
-                  <a:schemeClr val="tx2"/>
-                </a:solidFill>
-                <a:latin typeface="Poppins" panose="00000500000000000000" pitchFamily="2" charset="0"/>
-                <a:cs typeface="Poppins" panose="00000500000000000000" pitchFamily="2" charset="0"/>
-              </a:rPr>
-              <a:t>Prototype</a:t>
+              <a:t>Proposed Solution</a:t>
             </a:r>
             <a:endParaRPr lang="en-US" sz="2600" dirty="0"/>
           </a:p>
@@ -6760,7 +6679,7 @@
                 <a:ea typeface="Poppins" pitchFamily="34" charset="-122"/>
                 <a:cs typeface="Poppins" pitchFamily="34" charset="-120"/>
               </a:rPr>
-              <a:t>Describe your idea in detail. Include the methodology, technologies involved, and how it addresses the chosen problem statement.</a:t>
+              <a:t>Two connected parts, both runnable from the repository root: a physically-grounded synthetic DRAM generator, and a deterministic classical localization pipeline.</a:t>
             </a:r>
             <a:endParaRPr lang="en-US" sz="1800" dirty="0"/>
           </a:p>
@@ -6849,7 +6768,7 @@
         </p:nvSpPr>
         <p:spPr>
           <a:xfrm>
-            <a:off x="1200607" y="4648810"/>
+            <a:off x="1200607" y="4528286"/>
             <a:ext cx="8996782" cy="1691640"/>
           </a:xfrm>
           <a:prstGeom prst="rect">
@@ -6872,13 +6791,31 @@
               <a:buNone/>
             </a:pPr>
             <a:r>
-              <a:rPr sz="1050">
+              <a:rPr sz="1050" dirty="0">
                 <a:solidFill>
                   <a:srgbClr val="FFFFFF"/>
                 </a:solidFill>
                 <a:latin typeface="Poppins"/>
               </a:rPr>
-              <a:t>Pipeline: Reference → candidate generation (ZNCC over a 9x9 grid of scale x rotation hypotheses, ±8% scale / ±5°) → dedup → ranking (highest-score match) → sub-pixel refinement → (x, y) + confidence/ambiguity score.</a:t>
+              <a:t>Pipeline: Reference → candidate generation (ZNCC over 99 scale × rotation hypotheses — 11 scales spanning the literal 9:1–11:1 range × 9 rotations across ±5°, built with both a sharp and a PSF-matched template) → </a:t>
+            </a:r>
+            <a:r>
+              <a:rPr sz="1050" dirty="0" err="1">
+                <a:solidFill>
+                  <a:srgbClr val="FFFFFF"/>
+                </a:solidFill>
+                <a:latin typeface="Poppins"/>
+              </a:rPr>
+              <a:t>dedup</a:t>
+            </a:r>
+            <a:r>
+              <a:rPr sz="1050" dirty="0">
+                <a:solidFill>
+                  <a:srgbClr val="FFFFFF"/>
+                </a:solidFill>
+                <a:latin typeface="Poppins"/>
+              </a:rPr>
+              <a:t> → ranking → sub-pixel refinement → (x, y) with a confidence and ambiguity score.</a:t>
             </a:r>
             <a:endParaRPr lang="en-US" sz="1300" dirty="0"/>
           </a:p>
@@ -6892,7 +6829,7 @@
               </a:spcAft>
             </a:pPr>
             <a:r>
-              <a:rPr sz="1050">
+              <a:rPr sz="1050" dirty="0">
                 <a:solidFill>
                   <a:srgbClr val="FFFFFF"/>
                 </a:solidFill>
@@ -6911,13 +6848,13 @@
               </a:spcAft>
             </a:pPr>
             <a:r>
-              <a:rPr sz="1050">
+              <a:rPr sz="1050" dirty="0">
                 <a:solidFill>
                   <a:srgbClr val="FFFFFF"/>
                 </a:solidFill>
                 <a:latin typeface="Poppins"/>
               </a:rPr>
-              <a:t>The hypothesis grid was widened from 5x5 to 9x9 (same span, finer step) after validation showed this recovers rotation/scale-drift failures without affecting unrelated cases.</a:t>
+              <a:t>The grid was densified (5→9 steps) and then widened to the literal 9:1–11:1 span; a PSF-matched dual-arm template and a recalibrated ambiguity threshold followed. Each shipped as a documented gate exception, logged with the criteria it did not clear.</a:t>
             </a:r>
           </a:p>
         </p:txBody>
@@ -7511,7 +7448,7 @@
                 <a:ea typeface="Poppins" pitchFamily="34" charset="-122"/>
                 <a:cs typeface="Poppins" pitchFamily="34" charset="-120"/>
               </a:rPr>
-              <a:t>Highlight what makes your idea unique or innovative compared to existing solutions.</a:t>
+              <a:t>What is unusual here is not the matcher - it is the evidence standard every change had to clear before it was allowed into production.</a:t>
             </a:r>
             <a:endParaRPr lang="en-US" sz="1800" dirty="0"/>
           </a:p>
@@ -7600,8 +7537,8 @@
         </p:nvSpPr>
         <p:spPr>
           <a:xfrm>
-            <a:off x="1200607" y="4349801"/>
-            <a:ext cx="4429354" cy="1188720"/>
+            <a:off x="1200607" y="4389120"/>
+            <a:ext cx="4429354" cy="1417320"/>
           </a:xfrm>
           <a:prstGeom prst="rect">
             <a:avLst/>
@@ -7610,7 +7547,7 @@
           <a:ln/>
         </p:spPr>
         <p:txBody>
-          <a:bodyPr wrap="square" lIns="0" tIns="0" rIns="0" bIns="0" rtlCol="0" anchor="ctr"/>
+          <a:bodyPr wrap="square" lIns="0" tIns="0" rIns="0" bIns="0" rtlCol="0" anchor="t"/>
           <a:lstStyle/>
           <a:p>
             <a:pPr marL="0" indent="0" algn="l">
@@ -7623,7 +7560,7 @@
               <a:buNone/>
             </a:pPr>
             <a:r>
-              <a:rPr sz="1100">
+              <a:rPr sz="1100" dirty="0">
                 <a:solidFill>
                   <a:srgbClr val="FFFFFF"/>
                 </a:solidFill>
@@ -7718,8 +7655,8 @@
         </p:nvSpPr>
         <p:spPr>
           <a:xfrm>
-            <a:off x="6448349" y="4349801"/>
-            <a:ext cx="4239158" cy="1188720"/>
+            <a:off x="6448349" y="4352544"/>
+            <a:ext cx="4239158" cy="1417320"/>
           </a:xfrm>
           <a:prstGeom prst="rect">
             <a:avLst/>
@@ -7728,7 +7665,7 @@
           <a:ln/>
         </p:spPr>
         <p:txBody>
-          <a:bodyPr wrap="square" lIns="0" tIns="0" rIns="0" bIns="0" rtlCol="0" anchor="ctr"/>
+          <a:bodyPr wrap="square" lIns="0" tIns="0" rIns="0" bIns="0" rtlCol="0" anchor="t"/>
           <a:lstStyle/>
           <a:p>
             <a:pPr marL="0" indent="0" algn="l">
@@ -7741,13 +7678,13 @@
               <a:buNone/>
             </a:pPr>
             <a:r>
-              <a:rPr sz="1100">
+              <a:rPr sz="1100" dirty="0">
                 <a:solidFill>
                   <a:srgbClr val="FFFFFF"/>
                 </a:solidFill>
                 <a:latin typeface="Poppins"/>
               </a:rPr>
-              <a:t>Every candidate improvement (finer hypothesis grid, learned re-ranker, periodicity scoring, wider candidate pool) is tested against a mandatory integration gate on held-out and external data before being trusted — most were honestly rejected; one validated change shipped.</a:t>
+              <a:t>Every candidate change — 42 isolated experiments including a learned re-ranker, periodicity-aware re-ranking and alternative correlation scores — must clear a mandatory 7-criterion integration gate on held-out and external data. Most were rejected and kept with their evidence; four shipped as documented exceptions.</a:t>
             </a:r>
             <a:endParaRPr lang="en-US" sz="1200" dirty="0"/>
           </a:p>
@@ -8342,33 +8279,7 @@
                 <a:ea typeface="Poppins" pitchFamily="34" charset="-122"/>
                 <a:cs typeface="Poppins" pitchFamily="34" charset="-120"/>
               </a:rPr>
-              <a:t>Explain how your solution will make an impact, such as improving </a:t>
-            </a:r>
-            <a:r>
-              <a:rPr lang="en-US" dirty="0">
-                <a:solidFill>
-                  <a:srgbClr val="AEFF82">
-                    <a:alpha val="80000"/>
-                  </a:srgbClr>
-                </a:solidFill>
-                <a:latin typeface="Poppins" pitchFamily="34" charset="0"/>
-                <a:ea typeface="Poppins" pitchFamily="34" charset="-122"/>
-                <a:cs typeface="Poppins" pitchFamily="34" charset="-120"/>
-              </a:rPr>
-              <a:t>performance</a:t>
-            </a:r>
-            <a:r>
-              <a:rPr lang="en-US" sz="1800" dirty="0">
-                <a:solidFill>
-                  <a:srgbClr val="AEFF82">
-                    <a:alpha val="80000"/>
-                  </a:srgbClr>
-                </a:solidFill>
-                <a:latin typeface="Poppins" pitchFamily="34" charset="0"/>
-                <a:ea typeface="Poppins" pitchFamily="34" charset="-122"/>
-                <a:cs typeface="Poppins" pitchFamily="34" charset="-120"/>
-              </a:rPr>
-              <a:t>, reducing costs, increasing efficiency, or solving other challenges.</a:t>
+              <a:t>Accurate to a third of a pixel on most pairs, honest about the rest, and fast enough to sit in an inspection loop on CPU alone.</a:t>
             </a:r>
             <a:endParaRPr lang="en-US" sz="1800" dirty="0"/>
           </a:p>
@@ -8480,7 +8391,7 @@
         </p:nvSpPr>
         <p:spPr>
           <a:xfrm>
-            <a:off x="1200607" y="4791456"/>
+            <a:off x="1200607" y="4658868"/>
             <a:ext cx="4148633" cy="1371600"/>
           </a:xfrm>
           <a:prstGeom prst="rect">
@@ -8503,13 +8414,13 @@
               <a:buNone/>
             </a:pPr>
             <a:r>
-              <a:rPr sz="1050">
+              <a:rPr sz="1050" dirty="0">
                 <a:solidFill>
                   <a:srgbClr val="D1D5DB"/>
                 </a:solidFill>
                 <a:latin typeface="Poppins"/>
               </a:rPr>
-              <a:t>The classical pipeline localizes to sub-pixel accuracy on most pairs (median error 0.33px). A validated 9x9 hypothesis-grid search recovers many rotation/scale-drift failures a coarser 5x5 grid misses, without regressing any unaffected case.</a:t>
+              <a:t>Median error is 0.32px — sub-pixel on most pairs. The system also knows when not to answer: it compares the winning match against its best rival more than 10px away, returns 64.7% of pairs at 95.0% accuracy, and defers the rest — catching 85.7% of all failures before they reach the tool.</a:t>
             </a:r>
             <a:endParaRPr lang="en-US" sz="1000" dirty="0"/>
           </a:p>
@@ -8621,7 +8532,7 @@
         </p:nvSpPr>
         <p:spPr>
           <a:xfrm>
-            <a:off x="6448349" y="4791456"/>
+            <a:off x="6448349" y="4738878"/>
             <a:ext cx="3986784" cy="1371600"/>
           </a:xfrm>
           <a:prstGeom prst="rect">
@@ -8644,13 +8555,13 @@
               <a:buNone/>
             </a:pPr>
             <a:r>
-              <a:rPr sz="1050">
+              <a:rPr sz="1050" dirty="0">
                 <a:solidFill>
                   <a:srgbClr val="D1D5DB"/>
                 </a:solidFill>
                 <a:latin typeface="Poppins"/>
               </a:rPr>
-              <a:t>71.2%@5px pooled (n=156). Mean error 65.3px → 53.6px. Candidate recall@5px 82.6% → 87.1%. Catastrophic (&gt;50px) rate 18.6% → 16.7%. ~1.6s/pair on CPU. Periodic-pattern catastrophic failures remain a known, disclosed limitation.</a:t>
+              <a:t>77.6%@5px pooled (n=156), up from 71.2% (+6.4pp). Identical at 4px and 2px; 72.4%@1px; 66.7% inside half a pixel. Median error 0.32px, mean 47.7px. Catastrophic (&gt;50px) 14.1%, down from 18.6%. 3.72s/pair on a single CPU core. Crops with no distinguishing macro structure remain the disclosed limitation.</a:t>
             </a:r>
             <a:endParaRPr lang="en-US" sz="1000" dirty="0"/>
           </a:p>
@@ -9334,8 +9245,8 @@
         </p:nvSpPr>
         <p:spPr>
           <a:xfrm>
-            <a:off x="1873494" y="3357677"/>
-            <a:ext cx="8748979" cy="1691640"/>
+            <a:off x="1873494" y="3445917"/>
+            <a:ext cx="8748979" cy="1700784"/>
           </a:xfrm>
           <a:prstGeom prst="rect">
             <a:avLst/>
@@ -9344,7 +9255,7 @@
           <a:ln/>
         </p:spPr>
         <p:txBody>
-          <a:bodyPr wrap="square" lIns="0" tIns="0" rIns="0" bIns="0" rtlCol="0" anchor="ctr"/>
+          <a:bodyPr wrap="square" lIns="0" tIns="0" rIns="0" bIns="0" rtlCol="0" anchor="t"/>
           <a:lstStyle/>
           <a:p>
             <a:pPr marL="0" indent="0" algn="l">
@@ -9363,7 +9274,7 @@
                 </a:solidFill>
                 <a:latin typeface="Poppins"/>
               </a:rPr>
-              <a:t>Feasibility: pure Python/OpenCV/NumPy classical pipeline, CPU-only in production (~1.6s/pair); </a:t>
+              <a:t>Feasibility: pure Python/OpenCV/NumPy classical pipeline, CPU-only in production (3.72s/pair, single core); </a:t>
             </a:r>
             <a:r>
               <a:rPr sz="1000" dirty="0" err="1">
@@ -9543,7 +9454,7 @@
                 </a:solidFill>
                 <a:latin typeface="Poppins"/>
               </a:rPr>
-              <a:t> (2008) Poisson-Gaussian noise modeling; Orji et al. (2018) Nature Electronics metrology; Applied Materials/Hugging Face SEM reference generator (official starter resource).</a:t>
+              <a:t> (2008) Poissonian-Gaussian noise; Orji et al. (2018) Nature Electronics metrology; Keeth et al. (2007) DRAM Circuit Design; Reimer (1998) SEM image formation. Full bibliography with DOIs: references/.</a:t>
             </a:r>
           </a:p>
           <a:p>
@@ -9562,7 +9473,7 @@
                 </a:solidFill>
                 <a:latin typeface="Poppins"/>
               </a:rPr>
-              <a:t>Future work: periodicity-aware re-ranking with more data, richer spatial context, robustness to unseen acquisition conditions.</a:t>
+              <a:t>Future work: residual failures are one-dimensional — error along a lattice axis, ~1.5px cross-axis. Open direction: escalating hypothesis density on flagged pairs (5 seeds, +2.8pp mean; not integrated — runtime and cross-seed stability fail the gate).</a:t>
             </a:r>
           </a:p>
         </p:txBody>
@@ -10813,7 +10724,7 @@
         <p:spPr>
           <a:xfrm>
             <a:off x="2848356" y="5239511"/>
-            <a:ext cx="7776362" cy="322783"/>
+            <a:ext cx="8321040" cy="322783"/>
           </a:xfrm>
           <a:prstGeom prst="rect">
             <a:avLst/>
@@ -10834,7 +10745,7 @@
               </a:spcAft>
             </a:pPr>
             <a:r>
-              <a:rPr lang="en-US" sz="1400" dirty="0">
+              <a:rPr lang="en-US" sz="1200" dirty="0">
                 <a:solidFill>
                   <a:srgbClr val="FFFFFF"/>
                 </a:solidFill>
@@ -11454,7 +11365,7 @@
         <p:spPr>
           <a:xfrm>
             <a:off x="1628546" y="2516429"/>
-            <a:ext cx="5701284" cy="191110"/>
+            <a:ext cx="9235440" cy="191110"/>
           </a:xfrm>
           <a:prstGeom prst="rect">
             <a:avLst/>
@@ -11478,7 +11389,7 @@
                 <a:ea typeface="Poppins" pitchFamily="34" charset="-122"/>
                 <a:cs typeface="Poppins" pitchFamily="34" charset="-120"/>
               </a:rPr>
-              <a:t>Briefly describe the research foundation or scientific principles supporting your idea.</a:t>
+              <a:t>Structures, imaging physics, noise and the matching method are each grounded in published sources, mapped to the code that implements them.</a:t>
             </a:r>
             <a:endParaRPr lang="en-US" sz="1000" dirty="0"/>
           </a:p>
@@ -11528,8 +11439,8 @@
         </p:nvSpPr>
         <p:spPr>
           <a:xfrm>
-            <a:off x="1790395" y="2945282"/>
-            <a:ext cx="5544007" cy="219456"/>
+            <a:off x="1790395" y="2884030"/>
+            <a:ext cx="9235440" cy="914400"/>
           </a:xfrm>
           <a:prstGeom prst="rect">
             <a:avLst/>
@@ -11545,7 +11456,7 @@
               <a:buNone/>
             </a:pPr>
             <a:r>
-              <a:rPr lang="en-US" sz="1200" i="1" dirty="0">
+              <a:rPr lang="en-US" sz="1050" i="1" dirty="0">
                 <a:solidFill>
                   <a:srgbClr val="FFFFFF">
                     <a:alpha val="70000"/>
@@ -11555,7 +11466,7 @@
                 <a:ea typeface="Poppins" pitchFamily="34" charset="-122"/>
                 <a:cs typeface="Poppins" pitchFamily="34" charset="-120"/>
               </a:rPr>
-              <a:t>{Detail your research findings, theoretical basis, or methodology here...}</a:t>
+              <a:t>Structures follow published DRAM array organisation: independently-rendered sub-array mats tiled with sense-amplifier and wordline-driver strips, so a wide field reads as blocks separated by peripheral bands rather than one continuous lattice. Acquisition is modelled as a chain — beam PSF and astigmatism, Poisson shot noise at a set dose, Gaussian read noise, charging, raster shear and jitter, radial scan nonlinearity — then exact 10× area-average decimation. Localization is normalised cross-correlation over 99 scale × rotation hypotheses.</a:t>
             </a:r>
             <a:endParaRPr lang="en-US" sz="1200" dirty="0"/>
           </a:p>
@@ -11666,7 +11577,7 @@
         <p:spPr>
           <a:xfrm>
             <a:off x="1628546" y="4497934"/>
-            <a:ext cx="2767889" cy="191110"/>
+            <a:ext cx="9235440" cy="191110"/>
           </a:xfrm>
           <a:prstGeom prst="rect">
             <a:avLst/>
@@ -11690,7 +11601,7 @@
                 <a:ea typeface="Poppins" pitchFamily="34" charset="-122"/>
                 <a:cs typeface="Poppins" pitchFamily="34" charset="-120"/>
               </a:rPr>
-              <a:t>List key papers, articles, or data sources.</a:t>
+              <a:t>Three load-bearing sources below; the full verified bibliography lives in references/.</a:t>
             </a:r>
             <a:endParaRPr lang="en-US" sz="1000" dirty="0"/>
           </a:p>
@@ -11770,7 +11681,7 @@
         <p:spPr>
           <a:xfrm>
             <a:off x="1790395" y="4926787"/>
-            <a:ext cx="3219602" cy="228600"/>
+            <a:ext cx="9235440" cy="274320"/>
           </a:xfrm>
           <a:prstGeom prst="rect">
             <a:avLst/>
@@ -11786,7 +11697,7 @@
               <a:buNone/>
             </a:pPr>
             <a:r>
-              <a:rPr lang="en-US" sz="1200" dirty="0">
+              <a:rPr lang="en-US" sz="1000" dirty="0">
                 <a:solidFill>
                   <a:srgbClr val="FFFFFF">
                     <a:alpha val="80000"/>
@@ -11796,7 +11707,7 @@
                 <a:ea typeface="Poppins" pitchFamily="34" charset="-122"/>
                 <a:cs typeface="Poppins" pitchFamily="34" charset="-120"/>
               </a:rPr>
-              <a:t>{Ref 1: Title of Paper/Article - Source/URL}</a:t>
+              <a:t>Keeth, Baker, Johnson &amp; Lin (2007). DRAM Circuit Design, 2nd ed. Wiley-IEEE Press. ISBN 978-0-470-18475-2 — mat / peripheral-strip array organisation.</a:t>
             </a:r>
             <a:endParaRPr lang="en-US" sz="1200" dirty="0"/>
           </a:p>
@@ -11840,7 +11751,7 @@
         <p:spPr>
           <a:xfrm>
             <a:off x="1790395" y="5355641"/>
-            <a:ext cx="3258007" cy="228600"/>
+            <a:ext cx="9235440" cy="274320"/>
           </a:xfrm>
           <a:prstGeom prst="rect">
             <a:avLst/>
@@ -11856,7 +11767,7 @@
               <a:buNone/>
             </a:pPr>
             <a:r>
-              <a:rPr lang="en-US" sz="1200" dirty="0">
+              <a:rPr lang="en-US" sz="1000" dirty="0">
                 <a:solidFill>
                   <a:srgbClr val="FFFFFF">
                     <a:alpha val="80000"/>
@@ -11866,7 +11777,7 @@
                 <a:ea typeface="Poppins" pitchFamily="34" charset="-122"/>
                 <a:cs typeface="Poppins" pitchFamily="34" charset="-120"/>
               </a:rPr>
-              <a:t>{Ref 2: Title of Paper/Article - Source/URL}</a:t>
+              <a:t>Reimer (1998). Scanning Electron Microscopy: Physics of Image Formation, 2nd ed. Springer. doi:10.1007/978-3-540-38967-5 — beam PSF, astigmatism.</a:t>
             </a:r>
             <a:endParaRPr lang="en-US" sz="1200" dirty="0"/>
           </a:p>
@@ -11881,7 +11792,7 @@
         <p:spPr>
           <a:xfrm>
             <a:off x="1790395" y="5783580"/>
-            <a:ext cx="3258007" cy="228600"/>
+            <a:ext cx="9235440" cy="274320"/>
           </a:xfrm>
           <a:prstGeom prst="rect">
             <a:avLst/>
@@ -11897,7 +11808,7 @@
               <a:buNone/>
             </a:pPr>
             <a:r>
-              <a:rPr lang="en-US" sz="1200" dirty="0">
+              <a:rPr lang="en-US" sz="1000" dirty="0">
                 <a:solidFill>
                   <a:srgbClr val="FFFFFF">
                     <a:alpha val="80000"/>
@@ -11907,7 +11818,7 @@
                 <a:ea typeface="Poppins" pitchFamily="34" charset="-122"/>
                 <a:cs typeface="Poppins" pitchFamily="34" charset="-120"/>
               </a:rPr>
-              <a:t>{Ref 3: Title of Paper/Article - Source/URL}</a:t>
+              <a:t>Foi, Trimeche, Katkovnik &amp; Egiazarian (2008). IEEE Trans. Image Processing 17(10). doi:10.1109/TIP.2008.2001399 — Poissonian-Gaussian shot + read noise.</a:t>
             </a:r>
             <a:endParaRPr lang="en-US" sz="1200" dirty="0"/>
           </a:p>

--- a/Kaccha Mango_PS02.pptx
+++ b/Kaccha Mango_PS02.pptx
@@ -5,18 +5,24 @@
     <p:sldMasterId id="2147483648" r:id="rId1"/>
   </p:sldMasterIdLst>
   <p:notesMasterIdLst>
-    <p:notesMasterId r:id="rId11"/>
+    <p:notesMasterId r:id="rId17"/>
   </p:notesMasterIdLst>
   <p:sldIdLst>
     <p:sldId id="257" r:id="rId2"/>
     <p:sldId id="258" r:id="rId3"/>
     <p:sldId id="259" r:id="rId4"/>
     <p:sldId id="260" r:id="rId5"/>
-    <p:sldId id="261" r:id="rId6"/>
-    <p:sldId id="262" r:id="rId7"/>
-    <p:sldId id="263" r:id="rId8"/>
-    <p:sldId id="268" r:id="rId9"/>
-    <p:sldId id="267" r:id="rId10"/>
+    <p:sldId id="269" r:id="rId6"/>
+    <p:sldId id="270" r:id="rId7"/>
+    <p:sldId id="271" r:id="rId8"/>
+    <p:sldId id="272" r:id="rId9"/>
+    <p:sldId id="273" r:id="rId10"/>
+    <p:sldId id="274" r:id="rId11"/>
+    <p:sldId id="261" r:id="rId12"/>
+    <p:sldId id="262" r:id="rId13"/>
+    <p:sldId id="263" r:id="rId14"/>
+    <p:sldId id="268" r:id="rId15"/>
+    <p:sldId id="267" r:id="rId16"/>
   </p:sldIdLst>
   <p:sldSz cx="12192000" cy="6858000"/>
   <p:notesSz cx="6858000" cy="12192000"/>
@@ -1695,7 +1701,7 @@
           <a:p>
             <a:fld id="{F7021451-1387-4CA6-816F-3879F97B5CBC}" type="slidenum">
               <a:rPr lang="en-US"/>
-              <a:t>5</a:t>
+              <a:t>11</a:t>
             </a:fld>
             <a:endParaRPr lang="en-US"/>
           </a:p>
@@ -1779,7 +1785,7 @@
           <a:p>
             <a:fld id="{F7021451-1387-4CA6-816F-3879F97B5CBC}" type="slidenum">
               <a:rPr lang="en-US"/>
-              <a:t>6</a:t>
+              <a:t>12</a:t>
             </a:fld>
             <a:endParaRPr lang="en-US"/>
           </a:p>
@@ -1863,7 +1869,7 @@
           <a:p>
             <a:fld id="{F7021451-1387-4CA6-816F-3879F97B5CBC}" type="slidenum">
               <a:rPr lang="en-US"/>
-              <a:t>7</a:t>
+              <a:t>13</a:t>
             </a:fld>
             <a:endParaRPr lang="en-US"/>
           </a:p>
@@ -1947,7 +1953,7 @@
           <a:p>
             <a:fld id="{F7021451-1387-4CA6-816F-3879F97B5CBC}" type="slidenum">
               <a:rPr lang="en-US"/>
-              <a:t>8</a:t>
+              <a:t>14</a:t>
             </a:fld>
             <a:endParaRPr lang="en-US"/>
           </a:p>
@@ -2031,7 +2037,7 @@
           <a:p>
             <a:fld id="{F7021451-1387-4CA6-816F-3879F97B5CBC}" type="slidenum">
               <a:rPr lang="en-US"/>
-              <a:t>9</a:t>
+              <a:t>15</a:t>
             </a:fld>
             <a:endParaRPr lang="en-US"/>
           </a:p>
@@ -3220,29 +3226,6 @@
           </a:p>
         </p:txBody>
       </p:sp>
-      <p:pic>
-        <p:nvPicPr>
-          <p:cNvPr id="28" name="Image 3" descr="preencoded.png"/>
-          <p:cNvPicPr>
-            <a:picLocks noChangeAspect="1"/>
-          </p:cNvPicPr>
-          <p:nvPr/>
-        </p:nvPicPr>
-        <p:blipFill>
-          <a:blip r:embed="rId4"/>
-          <a:srcRect/>
-          <a:stretch/>
-        </p:blipFill>
-        <p:spPr>
-          <a:xfrm>
-            <a:off x="571500" y="4151376"/>
-            <a:ext cx="133502" cy="133502"/>
-          </a:xfrm>
-          <a:prstGeom prst="rect">
-            <a:avLst/>
-          </a:prstGeom>
-        </p:spPr>
-      </p:pic>
       <p:sp>
         <p:nvSpPr>
           <p:cNvPr id="30" name="Shape 24"/>
@@ -3948,7 +3931,7 @@
           <p:nvPr/>
         </p:nvPicPr>
         <p:blipFill>
-          <a:blip r:embed="rId5"/>
+          <a:blip r:embed="rId4"/>
           <a:srcRect l="-2994" r="-2994"/>
           <a:stretch/>
         </p:blipFill>
@@ -4010,7 +3993,7 @@
           <p:nvPr/>
         </p:nvPicPr>
         <p:blipFill>
-          <a:blip r:embed="rId6"/>
+          <a:blip r:embed="rId5"/>
           <a:srcRect l="-2994" r="-2994"/>
           <a:stretch/>
         </p:blipFill>
@@ -4072,7 +4055,7 @@
           <p:nvPr/>
         </p:nvPicPr>
         <p:blipFill>
-          <a:blip r:embed="rId7"/>
+          <a:blip r:embed="rId6"/>
           <a:srcRect l="-2994" r="-2994"/>
           <a:stretch/>
         </p:blipFill>
@@ -4691,7 +4674,7 @@
           <p:nvPr/>
         </p:nvPicPr>
         <p:blipFill>
-          <a:blip r:embed="rId8">
+          <a:blip r:embed="rId7">
             <a:extLst>
               <a:ext uri="{28A0092B-C50C-407E-A947-70E740481C1C}">
                 <a14:useLocalDpi xmlns:a14="http://schemas.microsoft.com/office/drawing/2010/main" val="0"/>
@@ -4720,9 +4703,9 @@
 </p:sld>
 </file>
 
-<file path=ppt/slides/slide2.xml><?xml version="1.0" encoding="utf-8"?>
+<file path=ppt/slides/slide10.xml><?xml version="1.0" encoding="utf-8"?>
 <p:sld xmlns:a="http://schemas.openxmlformats.org/drawingml/2006/main" xmlns:r="http://schemas.openxmlformats.org/officeDocument/2006/relationships" xmlns:p="http://schemas.openxmlformats.org/presentationml/2006/main">
-  <p:cSld name="Slide 3">
+  <p:cSld name="Slide 7">
     <p:spTree>
       <p:nvGrpSpPr>
         <p:cNvPr id="1" name=""/>
@@ -4773,7 +4756,7 @@
           <p:nvPr/>
         </p:nvPicPr>
         <p:blipFill>
-          <a:blip r:embed="rId3">
+          <a:blip r:embed="rId2">
             <a:alphaModFix amt="10000"/>
           </a:blip>
           <a:srcRect l="12327" r="12327"/>
@@ -4791,6 +4774,44 @@
       </p:pic>
       <p:sp>
         <p:nvSpPr>
+          <p:cNvPr id="4" name="Shape 1"/>
+          <p:cNvSpPr/>
+          <p:nvPr/>
+        </p:nvSpPr>
+        <p:spPr>
+          <a:xfrm>
+            <a:off x="571500" y="286207"/>
+            <a:ext cx="11048695" cy="666598"/>
+          </a:xfrm>
+          <a:prstGeom prst="roundRect">
+            <a:avLst>
+              <a:gd name="adj" fmla="val 15677"/>
+            </a:avLst>
+          </a:prstGeom>
+          <a:solidFill>
+            <a:srgbClr val="FFFFFF">
+              <a:alpha val="95000"/>
+            </a:srgbClr>
+          </a:solidFill>
+          <a:ln/>
+          <a:effectLst>
+            <a:outerShdw blurRad="63500" dist="38100" dir="5400000" algn="bl" rotWithShape="0">
+              <a:srgbClr val="000000">
+                <a:alpha val="10000"/>
+              </a:srgbClr>
+            </a:outerShdw>
+          </a:effectLst>
+        </p:spPr>
+        <p:txBody>
+          <a:bodyPr/>
+          <a:lstStyle/>
+          <a:p>
+            <a:endParaRPr lang="en-IN"/>
+          </a:p>
+        </p:txBody>
+      </p:sp>
+      <p:sp>
+        <p:nvSpPr>
           <p:cNvPr id="7" name="Shape 2"/>
           <p:cNvSpPr/>
           <p:nvPr/>
@@ -4825,7 +4846,7 @@
         <p:spPr>
           <a:xfrm>
             <a:off x="838505" y="1295705"/>
-            <a:ext cx="5547665" cy="467258"/>
+            <a:ext cx="9692640" cy="467258"/>
           </a:xfrm>
           <a:prstGeom prst="rect">
             <a:avLst/>
@@ -4849,7 +4870,7 @@
                 <a:ea typeface="Poppins" pitchFamily="34" charset="-122"/>
                 <a:cs typeface="Poppins" pitchFamily="34" charset="-120"/>
               </a:rPr>
-              <a:t>Problem Statement Addressed</a:t>
+              <a:t>Failure Case, Limitations and Learnings</a:t>
             </a:r>
             <a:endParaRPr lang="en-US" sz="2600" dirty="0"/>
           </a:p>
@@ -5058,7 +5079,7 @@
           <p:nvPr/>
         </p:nvPicPr>
         <p:blipFill>
-          <a:blip r:embed="rId4"/>
+          <a:blip r:embed="rId3"/>
           <a:srcRect/>
           <a:stretch/>
         </p:blipFill>
@@ -5080,1580 +5101,8 @@
         </p:nvSpPr>
         <p:spPr>
           <a:xfrm>
-            <a:off x="961948" y="3193085"/>
-            <a:ext cx="8607167" cy="314554"/>
-          </a:xfrm>
-          <a:prstGeom prst="rect">
-            <a:avLst/>
-          </a:prstGeom>
-          <a:noFill/>
-          <a:ln/>
-        </p:spPr>
-        <p:txBody>
-          <a:bodyPr wrap="square" lIns="0" tIns="0" rIns="0" bIns="0" rtlCol="0" anchor="ctr"/>
-          <a:lstStyle/>
-          <a:p>
-            <a:r>
-              <a:rPr lang="en-US" cap="all" dirty="0">
-                <a:solidFill>
-                  <a:schemeClr val="accent6">
-                    <a:lumMod val="60000"/>
-                    <a:lumOff val="40000"/>
-                  </a:schemeClr>
-                </a:solidFill>
-              </a:rPr>
-              <a:t>Drift-Sense: AI-Powered Navigation-Error Recovery for Wafer Inspection Tools</a:t>
-            </a:r>
-          </a:p>
-        </p:txBody>
-      </p:sp>
-      <p:sp>
-        <p:nvSpPr>
-          <p:cNvPr id="17" name="Shape 11"/>
-          <p:cNvSpPr/>
-          <p:nvPr/>
-        </p:nvSpPr>
-        <p:spPr>
-          <a:xfrm>
-            <a:off x="961949" y="3768242"/>
-            <a:ext cx="10267798" cy="2331720"/>
-          </a:xfrm>
-          <a:prstGeom prst="roundRect">
-            <a:avLst>
-              <a:gd name="adj" fmla="val 4277"/>
-            </a:avLst>
-          </a:prstGeom>
-          <a:solidFill>
-            <a:srgbClr val="1E3A8A">
-              <a:alpha val="40000"/>
-            </a:srgbClr>
-          </a:solidFill>
-          <a:ln w="12700">
-            <a:solidFill>
-              <a:srgbClr val="1D4ED8"/>
-            </a:solidFill>
-            <a:prstDash val="solid"/>
-          </a:ln>
-        </p:spPr>
-        <p:txBody>
-          <a:bodyPr/>
-          <a:lstStyle/>
-          <a:p>
-            <a:endParaRPr lang="en-IN"/>
-          </a:p>
-        </p:txBody>
-      </p:sp>
-      <p:sp>
-        <p:nvSpPr>
-          <p:cNvPr id="18" name="Text 12"/>
-          <p:cNvSpPr txBox="1"/>
-          <p:nvPr/>
-        </p:nvSpPr>
-        <p:spPr>
-          <a:xfrm>
-            <a:off x="1200607" y="4006901"/>
-            <a:ext cx="1690726" cy="191110"/>
-          </a:xfrm>
-          <a:prstGeom prst="rect">
-            <a:avLst/>
-          </a:prstGeom>
-          <a:noFill/>
-          <a:ln/>
-        </p:spPr>
-        <p:txBody>
-          <a:bodyPr wrap="square" lIns="0" tIns="0" rIns="0" bIns="0" rtlCol="0" anchor="ctr"/>
-          <a:lstStyle/>
-          <a:p>
-            <a:pPr marL="0" indent="0" algn="l">
-              <a:buNone/>
-            </a:pPr>
-            <a:r>
-              <a:rPr lang="en-US" sz="1000" b="1" dirty="0">
-                <a:solidFill>
-                  <a:srgbClr val="9CA3AF"/>
-                </a:solidFill>
-                <a:latin typeface="Poppins" pitchFamily="34" charset="0"/>
-                <a:ea typeface="Poppins" pitchFamily="34" charset="-122"/>
-                <a:cs typeface="Poppins" pitchFamily="34" charset="-120"/>
-              </a:rPr>
-              <a:t>DESCRIPTION / DETAILS</a:t>
-            </a:r>
-            <a:endParaRPr lang="en-US" sz="1000" dirty="0"/>
-          </a:p>
-        </p:txBody>
-      </p:sp>
-      <p:sp>
-        <p:nvSpPr>
-          <p:cNvPr id="19" name="Text 13"/>
-          <p:cNvSpPr txBox="1"/>
-          <p:nvPr/>
-        </p:nvSpPr>
-        <p:spPr>
-          <a:xfrm>
-            <a:off x="1200607" y="3931463"/>
-            <a:ext cx="8968435" cy="1920240"/>
-          </a:xfrm>
-          <a:prstGeom prst="rect">
-            <a:avLst/>
-          </a:prstGeom>
-          <a:noFill/>
-          <a:ln/>
-        </p:spPr>
-        <p:txBody>
-          <a:bodyPr wrap="square" lIns="0" tIns="0" rIns="0" bIns="0" rtlCol="0" anchor="ctr"/>
-          <a:lstStyle/>
-          <a:p>
-            <a:pPr marL="0" indent="0" algn="l">
-              <a:lnSpc>
-                <a:spcPct val="115000"/>
-              </a:lnSpc>
-              <a:spcAft>
-                <a:spcPts val="400"/>
-              </a:spcAft>
-              <a:buNone/>
-            </a:pPr>
-            <a:r>
-              <a:rPr sz="1200" dirty="0">
-                <a:solidFill>
-                  <a:srgbClr val="FFFFFF"/>
-                </a:solidFill>
-                <a:latin typeface="Poppins"/>
-              </a:rPr>
-              <a:t>Inspection tools must relocate a previously captured 100x Reference to the same site in a wider, noisier 10x Search image — across a ~10:1 (9:1-11:1) scale gap, 1-2° rotation drift, and realistic SEM degradation.</a:t>
-            </a:r>
-            <a:endParaRPr lang="en-US" sz="1300" dirty="0"/>
-          </a:p>
-          <a:p>
-            <a:pPr>
-              <a:lnSpc>
-                <a:spcPct val="115000"/>
-              </a:lnSpc>
-              <a:spcAft>
-                <a:spcPts val="0"/>
-              </a:spcAft>
-            </a:pPr>
-            <a:r>
-              <a:rPr sz="1200" dirty="0">
-                <a:solidFill>
-                  <a:srgbClr val="FFFFFF"/>
-                </a:solidFill>
-                <a:latin typeface="Poppins"/>
-              </a:rPr>
-              <a:t>Real DRAM structure is highly repetitive: a wrong periodic repeat can score almost identically to the true site. </a:t>
-            </a:r>
-            <a:r>
-              <a:rPr sz="1200" dirty="0" err="1">
-                <a:solidFill>
-                  <a:srgbClr val="FFFFFF"/>
-                </a:solidFill>
-                <a:latin typeface="Poppins"/>
-              </a:rPr>
-              <a:t>DriftSense</a:t>
-            </a:r>
-            <a:r>
-              <a:rPr sz="1200" dirty="0">
-                <a:solidFill>
-                  <a:srgbClr val="FFFFFF"/>
-                </a:solidFill>
-                <a:latin typeface="Poppins"/>
-              </a:rPr>
-              <a:t> recovers the target center (x, y) automatically, with a confidence/ambiguity score alongside it.</a:t>
-            </a:r>
-          </a:p>
-        </p:txBody>
-      </p:sp>
-      <p:pic>
-        <p:nvPicPr>
-          <p:cNvPr id="20" name="Picture 19">
-            <a:extLst>
-              <a:ext uri="{FF2B5EF4-FFF2-40B4-BE49-F238E27FC236}">
-                <a16:creationId xmlns:a16="http://schemas.microsoft.com/office/drawing/2014/main" id="{E9F13985-00B4-3FE2-69FB-BA5F88420137}"/>
-              </a:ext>
-            </a:extLst>
-          </p:cNvPr>
-          <p:cNvPicPr>
-            <a:picLocks noChangeAspect="1"/>
-          </p:cNvPicPr>
-          <p:nvPr/>
-        </p:nvPicPr>
-        <p:blipFill>
-          <a:blip r:embed="rId5"/>
-          <a:stretch>
-            <a:fillRect/>
-          </a:stretch>
-        </p:blipFill>
-        <p:spPr>
-          <a:xfrm>
-            <a:off x="5292164" y="228650"/>
-            <a:ext cx="1607366" cy="783591"/>
-          </a:xfrm>
-          <a:prstGeom prst="rect">
-            <a:avLst/>
-          </a:prstGeom>
-        </p:spPr>
-      </p:pic>
-      <p:sp>
-        <p:nvSpPr>
-          <p:cNvPr id="22" name="Shape 1">
-            <a:extLst>
-              <a:ext uri="{FF2B5EF4-FFF2-40B4-BE49-F238E27FC236}">
-                <a16:creationId xmlns:a16="http://schemas.microsoft.com/office/drawing/2014/main" id="{8B3789FB-4EC6-29BB-8AB4-B514BCE88A9C}"/>
-              </a:ext>
-            </a:extLst>
-          </p:cNvPr>
-          <p:cNvSpPr/>
-          <p:nvPr/>
-        </p:nvSpPr>
-        <p:spPr>
-          <a:xfrm>
-            <a:off x="571500" y="266294"/>
-            <a:ext cx="11048695" cy="857707"/>
-          </a:xfrm>
-          <a:prstGeom prst="roundRect">
-            <a:avLst>
-              <a:gd name="adj" fmla="val 9476"/>
-            </a:avLst>
-          </a:prstGeom>
-          <a:solidFill>
-            <a:srgbClr val="FFFFFF">
-              <a:alpha val="95000"/>
-            </a:srgbClr>
-          </a:solidFill>
-          <a:ln/>
-          <a:effectLst>
-            <a:outerShdw blurRad="63500" dist="38100" dir="5400000" algn="bl" rotWithShape="0">
-              <a:srgbClr val="000000">
-                <a:alpha val="10000"/>
-              </a:srgbClr>
-            </a:outerShdw>
-          </a:effectLst>
-        </p:spPr>
-        <p:txBody>
-          <a:bodyPr/>
-          <a:lstStyle/>
-          <a:p>
-            <a:endParaRPr lang="en-IN"/>
-          </a:p>
-        </p:txBody>
-      </p:sp>
-      <p:pic>
-        <p:nvPicPr>
-          <p:cNvPr id="5" name="Picture 4">
-            <a:extLst>
-              <a:ext uri="{FF2B5EF4-FFF2-40B4-BE49-F238E27FC236}">
-                <a16:creationId xmlns:a16="http://schemas.microsoft.com/office/drawing/2014/main" id="{AFA5626A-1768-0BB6-2B3B-C29607998D96}"/>
-              </a:ext>
-            </a:extLst>
-          </p:cNvPr>
-          <p:cNvPicPr>
-            <a:picLocks noChangeAspect="1"/>
-          </p:cNvPicPr>
-          <p:nvPr/>
-        </p:nvPicPr>
-        <p:blipFill>
-          <a:blip r:embed="rId6">
-            <a:extLst>
-              <a:ext uri="{28A0092B-C50C-407E-A947-70E740481C1C}">
-                <a14:useLocalDpi xmlns:a14="http://schemas.microsoft.com/office/drawing/2010/main" val="0"/>
-              </a:ext>
-            </a:extLst>
-          </a:blip>
-          <a:stretch>
-            <a:fillRect/>
-          </a:stretch>
-        </p:blipFill>
-        <p:spPr>
-          <a:xfrm>
-            <a:off x="1533449" y="416814"/>
-            <a:ext cx="9163491" cy="586435"/>
-          </a:xfrm>
-          <a:prstGeom prst="rect">
-            <a:avLst/>
-          </a:prstGeom>
-        </p:spPr>
-      </p:pic>
-    </p:spTree>
-  </p:cSld>
-  <p:clrMapOvr>
-    <a:masterClrMapping/>
-  </p:clrMapOvr>
-</p:sld>
-</file>
-
-<file path=ppt/slides/slide3.xml><?xml version="1.0" encoding="utf-8"?>
-<p:sld xmlns:a="http://schemas.openxmlformats.org/drawingml/2006/main" xmlns:r="http://schemas.openxmlformats.org/officeDocument/2006/relationships" xmlns:p="http://schemas.openxmlformats.org/presentationml/2006/main">
-  <p:cSld name="Slide 4">
-    <p:spTree>
-      <p:nvGrpSpPr>
-        <p:cNvPr id="1" name=""/>
-        <p:cNvGrpSpPr/>
-        <p:nvPr/>
-      </p:nvGrpSpPr>
-      <p:grpSpPr>
-        <a:xfrm>
-          <a:off x="0" y="0"/>
-          <a:ext cx="0" cy="0"/>
-          <a:chOff x="0" y="0"/>
-          <a:chExt cx="0" cy="0"/>
-        </a:xfrm>
-      </p:grpSpPr>
-      <p:sp>
-        <p:nvSpPr>
-          <p:cNvPr id="2" name="Shape 0"/>
-          <p:cNvSpPr/>
-          <p:nvPr/>
-        </p:nvSpPr>
-        <p:spPr>
-          <a:xfrm>
-            <a:off x="0" y="0"/>
-            <a:ext cx="12191695" cy="6858000"/>
-          </a:xfrm>
-          <a:prstGeom prst="rect">
-            <a:avLst/>
-          </a:prstGeom>
-          <a:solidFill>
-            <a:srgbClr val="000036"/>
-          </a:solidFill>
-          <a:ln/>
-        </p:spPr>
-        <p:txBody>
-          <a:bodyPr/>
-          <a:lstStyle/>
-          <a:p>
-            <a:endParaRPr lang="en-IN"/>
-          </a:p>
-        </p:txBody>
-      </p:sp>
-      <p:pic>
-        <p:nvPicPr>
-          <p:cNvPr id="3" name="Image 0" descr="preencoded.png"/>
-          <p:cNvPicPr>
-            <a:picLocks noChangeAspect="1"/>
-          </p:cNvPicPr>
-          <p:nvPr/>
-        </p:nvPicPr>
-        <p:blipFill>
-          <a:blip r:embed="rId3">
-            <a:alphaModFix amt="10000"/>
-          </a:blip>
-          <a:srcRect l="12327" r="12327"/>
-          <a:stretch/>
-        </p:blipFill>
-        <p:spPr>
-          <a:xfrm>
-            <a:off x="0" y="0"/>
-            <a:ext cx="12191695" cy="6858000"/>
-          </a:xfrm>
-          <a:prstGeom prst="rect">
-            <a:avLst/>
-          </a:prstGeom>
-        </p:spPr>
-      </p:pic>
-      <p:sp>
-        <p:nvSpPr>
-          <p:cNvPr id="4" name="Shape 1"/>
-          <p:cNvSpPr/>
-          <p:nvPr/>
-        </p:nvSpPr>
-        <p:spPr>
-          <a:xfrm>
-            <a:off x="571500" y="286207"/>
-            <a:ext cx="11048695" cy="666598"/>
-          </a:xfrm>
-          <a:prstGeom prst="roundRect">
-            <a:avLst>
-              <a:gd name="adj" fmla="val 15677"/>
-            </a:avLst>
-          </a:prstGeom>
-          <a:solidFill>
-            <a:srgbClr val="FFFFFF">
-              <a:alpha val="95000"/>
-            </a:srgbClr>
-          </a:solidFill>
-          <a:ln/>
-          <a:effectLst>
-            <a:outerShdw blurRad="63500" dist="38100" dir="5400000" algn="bl" rotWithShape="0">
-              <a:srgbClr val="000000">
-                <a:alpha val="10000"/>
-              </a:srgbClr>
-            </a:outerShdw>
-          </a:effectLst>
-        </p:spPr>
-        <p:txBody>
-          <a:bodyPr/>
-          <a:lstStyle/>
-          <a:p>
-            <a:endParaRPr lang="en-IN"/>
-          </a:p>
-        </p:txBody>
-      </p:sp>
-      <p:pic>
-        <p:nvPicPr>
-          <p:cNvPr id="5" name="Image 1" descr="preencoded.png"/>
-          <p:cNvPicPr>
-            <a:picLocks noChangeAspect="1"/>
-          </p:cNvPicPr>
-          <p:nvPr/>
-        </p:nvPicPr>
-        <p:blipFill>
-          <a:blip r:embed="rId4"/>
-          <a:srcRect t="10" b="10"/>
-          <a:stretch/>
-        </p:blipFill>
-        <p:spPr>
-          <a:xfrm>
-            <a:off x="857707" y="381305"/>
-            <a:ext cx="1266444" cy="476402"/>
-          </a:xfrm>
-          <a:prstGeom prst="rect">
-            <a:avLst/>
-          </a:prstGeom>
-        </p:spPr>
-      </p:pic>
-      <p:pic>
-        <p:nvPicPr>
-          <p:cNvPr id="6" name="Image 2" descr="preencoded.png"/>
-          <p:cNvPicPr>
-            <a:picLocks noChangeAspect="1"/>
-          </p:cNvPicPr>
-          <p:nvPr/>
-        </p:nvPicPr>
-        <p:blipFill>
-          <a:blip r:embed="rId5"/>
-          <a:srcRect/>
-          <a:stretch/>
-        </p:blipFill>
-        <p:spPr>
-          <a:xfrm>
-            <a:off x="10858500" y="381305"/>
-            <a:ext cx="476402" cy="476402"/>
-          </a:xfrm>
-          <a:prstGeom prst="rect">
-            <a:avLst/>
-          </a:prstGeom>
-        </p:spPr>
-      </p:pic>
-      <p:sp>
-        <p:nvSpPr>
-          <p:cNvPr id="7" name="Shape 2"/>
-          <p:cNvSpPr/>
-          <p:nvPr/>
-        </p:nvSpPr>
-        <p:spPr>
-          <a:xfrm>
-            <a:off x="571500" y="1333195"/>
-            <a:ext cx="75895" cy="409651"/>
-          </a:xfrm>
-          <a:prstGeom prst="rect">
-            <a:avLst/>
-          </a:prstGeom>
-          <a:solidFill>
-            <a:srgbClr val="88E555"/>
-          </a:solidFill>
-          <a:ln/>
-        </p:spPr>
-        <p:txBody>
-          <a:bodyPr/>
-          <a:lstStyle/>
-          <a:p>
-            <a:endParaRPr lang="en-IN"/>
-          </a:p>
-        </p:txBody>
-      </p:sp>
-      <p:sp>
-        <p:nvSpPr>
-          <p:cNvPr id="8" name="Text 3"/>
-          <p:cNvSpPr txBox="1"/>
-          <p:nvPr/>
-        </p:nvSpPr>
-        <p:spPr>
-          <a:xfrm>
-            <a:off x="838504" y="1295705"/>
-            <a:ext cx="10682936" cy="467258"/>
-          </a:xfrm>
-          <a:prstGeom prst="rect">
-            <a:avLst/>
-          </a:prstGeom>
-          <a:noFill/>
-          <a:ln/>
-        </p:spPr>
-        <p:txBody>
-          <a:bodyPr wrap="square" lIns="0" tIns="0" rIns="0" bIns="0" rtlCol="0" anchor="ctr"/>
-          <a:lstStyle/>
-          <a:p>
-            <a:r>
-              <a:rPr lang="en-US" sz="2600" b="1" dirty="0">
-                <a:solidFill>
-                  <a:srgbClr val="FFFFFF"/>
-                </a:solidFill>
-                <a:latin typeface="Poppins" pitchFamily="34" charset="0"/>
-                <a:ea typeface="Poppins" pitchFamily="34" charset="-122"/>
-                <a:cs typeface="Poppins" pitchFamily="34" charset="-120"/>
-              </a:rPr>
-              <a:t>Idea Description</a:t>
-            </a:r>
-            <a:endParaRPr lang="en-US" sz="2600" dirty="0">
-              <a:latin typeface="Poppins" panose="00000500000000000000" pitchFamily="2" charset="0"/>
-              <a:cs typeface="Poppins" panose="00000500000000000000" pitchFamily="2" charset="0"/>
-            </a:endParaRPr>
-          </a:p>
-        </p:txBody>
-      </p:sp>
-      <p:sp>
-        <p:nvSpPr>
-          <p:cNvPr id="9" name="Shape 4"/>
-          <p:cNvSpPr/>
-          <p:nvPr/>
-        </p:nvSpPr>
-        <p:spPr>
-          <a:xfrm>
-            <a:off x="571500" y="2021738"/>
-            <a:ext cx="11048695" cy="4552798"/>
-          </a:xfrm>
-          <a:prstGeom prst="roundRect">
-            <a:avLst>
-              <a:gd name="adj" fmla="val 672"/>
-            </a:avLst>
-          </a:prstGeom>
-          <a:solidFill>
-            <a:srgbClr val="FFFFFF">
-              <a:alpha val="5000"/>
-            </a:srgbClr>
-          </a:solidFill>
-          <a:ln w="12700">
-            <a:solidFill>
-              <a:srgbClr val="88E555">
-                <a:alpha val="30000"/>
-              </a:srgbClr>
-            </a:solidFill>
-            <a:prstDash val="solid"/>
-          </a:ln>
-        </p:spPr>
-        <p:txBody>
-          <a:bodyPr/>
-          <a:lstStyle/>
-          <a:p>
-            <a:endParaRPr lang="en-IN"/>
-          </a:p>
-        </p:txBody>
-      </p:sp>
-      <p:sp>
-        <p:nvSpPr>
-          <p:cNvPr id="10" name="Shape 5"/>
-          <p:cNvSpPr/>
-          <p:nvPr/>
-        </p:nvSpPr>
-        <p:spPr>
-          <a:xfrm>
-            <a:off x="571500" y="2021738"/>
-            <a:ext cx="190195" cy="190195"/>
-          </a:xfrm>
-          <a:prstGeom prst="roundRect">
-            <a:avLst>
-              <a:gd name="adj" fmla="val 192308"/>
-            </a:avLst>
-          </a:prstGeom>
-          <a:noFill/>
-          <a:ln w="38100">
-            <a:solidFill>
-              <a:srgbClr val="88E555"/>
-            </a:solidFill>
-            <a:prstDash val="solid"/>
-          </a:ln>
-        </p:spPr>
-        <p:txBody>
-          <a:bodyPr/>
-          <a:lstStyle/>
-          <a:p>
-            <a:endParaRPr lang="en-IN"/>
-          </a:p>
-        </p:txBody>
-      </p:sp>
-      <p:sp>
-        <p:nvSpPr>
-          <p:cNvPr id="11" name="Shape 6"/>
-          <p:cNvSpPr/>
-          <p:nvPr/>
-        </p:nvSpPr>
-        <p:spPr>
-          <a:xfrm>
-            <a:off x="11430000" y="2021738"/>
-            <a:ext cx="190195" cy="190195"/>
-          </a:xfrm>
-          <a:prstGeom prst="rect">
-            <a:avLst/>
-          </a:prstGeom>
-          <a:noFill/>
-          <a:ln w="38100">
-            <a:solidFill>
-              <a:srgbClr val="88E555"/>
-            </a:solidFill>
-            <a:prstDash val="solid"/>
-          </a:ln>
-        </p:spPr>
-        <p:txBody>
-          <a:bodyPr/>
-          <a:lstStyle/>
-          <a:p>
-            <a:endParaRPr lang="en-IN"/>
-          </a:p>
-        </p:txBody>
-      </p:sp>
-      <p:sp>
-        <p:nvSpPr>
-          <p:cNvPr id="12" name="Shape 7"/>
-          <p:cNvSpPr/>
-          <p:nvPr/>
-        </p:nvSpPr>
-        <p:spPr>
-          <a:xfrm>
-            <a:off x="571500" y="6381598"/>
-            <a:ext cx="190195" cy="190195"/>
-          </a:xfrm>
-          <a:prstGeom prst="rect">
-            <a:avLst/>
-          </a:prstGeom>
-          <a:noFill/>
-          <a:ln w="38100">
-            <a:solidFill>
-              <a:srgbClr val="88E555"/>
-            </a:solidFill>
-            <a:prstDash val="solid"/>
-          </a:ln>
-        </p:spPr>
-        <p:txBody>
-          <a:bodyPr/>
-          <a:lstStyle/>
-          <a:p>
-            <a:endParaRPr lang="en-IN"/>
-          </a:p>
-        </p:txBody>
-      </p:sp>
-      <p:sp>
-        <p:nvSpPr>
-          <p:cNvPr id="13" name="Shape 8"/>
-          <p:cNvSpPr/>
-          <p:nvPr/>
-        </p:nvSpPr>
-        <p:spPr>
-          <a:xfrm>
-            <a:off x="11430000" y="6381598"/>
-            <a:ext cx="190195" cy="190195"/>
-          </a:xfrm>
-          <a:prstGeom prst="rect">
-            <a:avLst/>
-          </a:prstGeom>
-          <a:noFill/>
-          <a:ln w="38100">
-            <a:solidFill>
-              <a:srgbClr val="88E555"/>
-            </a:solidFill>
-            <a:prstDash val="solid"/>
-          </a:ln>
-        </p:spPr>
-        <p:txBody>
-          <a:bodyPr/>
-          <a:lstStyle/>
-          <a:p>
-            <a:endParaRPr lang="en-IN"/>
-          </a:p>
-        </p:txBody>
-      </p:sp>
-      <p:sp>
-        <p:nvSpPr>
-          <p:cNvPr id="14" name="Shape 9"/>
-          <p:cNvSpPr/>
-          <p:nvPr/>
-        </p:nvSpPr>
-        <p:spPr>
-          <a:xfrm>
-            <a:off x="961949" y="2412187"/>
-            <a:ext cx="571500" cy="571500"/>
-          </a:xfrm>
-          <a:prstGeom prst="ellipse">
-            <a:avLst/>
-          </a:prstGeom>
-          <a:solidFill>
-            <a:srgbClr val="273383">
-              <a:alpha val="50000"/>
-            </a:srgbClr>
-          </a:solidFill>
-          <a:ln w="25400">
-            <a:solidFill>
-              <a:srgbClr val="AEFF82"/>
-            </a:solidFill>
-            <a:prstDash val="solid"/>
-          </a:ln>
-        </p:spPr>
-        <p:txBody>
-          <a:bodyPr/>
-          <a:lstStyle/>
-          <a:p>
-            <a:endParaRPr lang="en-IN"/>
-          </a:p>
-        </p:txBody>
-      </p:sp>
-      <p:pic>
-        <p:nvPicPr>
-          <p:cNvPr id="15" name="Image 3" descr="preencoded.png"/>
-          <p:cNvPicPr>
-            <a:picLocks noChangeAspect="1"/>
-          </p:cNvPicPr>
-          <p:nvPr/>
-        </p:nvPicPr>
-        <p:blipFill>
-          <a:blip r:embed="rId6"/>
-          <a:srcRect l="-133" r="-133"/>
-          <a:stretch/>
-        </p:blipFill>
-        <p:spPr>
-          <a:xfrm>
-            <a:off x="1162202" y="2583180"/>
-            <a:ext cx="171907" cy="228600"/>
-          </a:xfrm>
-          <a:prstGeom prst="rect">
-            <a:avLst/>
-          </a:prstGeom>
-        </p:spPr>
-      </p:pic>
-      <p:sp>
-        <p:nvSpPr>
-          <p:cNvPr id="16" name="Text 10"/>
-          <p:cNvSpPr txBox="1"/>
-          <p:nvPr/>
-        </p:nvSpPr>
-        <p:spPr>
-          <a:xfrm>
-            <a:off x="961949" y="3183941"/>
-            <a:ext cx="9813341" cy="629107"/>
-          </a:xfrm>
-          <a:prstGeom prst="rect">
-            <a:avLst/>
-          </a:prstGeom>
-          <a:noFill/>
-          <a:ln/>
-        </p:spPr>
-        <p:txBody>
-          <a:bodyPr wrap="square" lIns="0" tIns="0" rIns="0" bIns="0" rtlCol="0" anchor="ctr"/>
-          <a:lstStyle/>
-          <a:p>
-            <a:pPr marL="0" indent="0" algn="l">
-              <a:buNone/>
-            </a:pPr>
-            <a:r>
-              <a:rPr lang="en-US" sz="1600" dirty="0">
-                <a:solidFill>
-                  <a:srgbClr val="AEFF82">
-                    <a:alpha val="90000"/>
-                  </a:srgbClr>
-                </a:solidFill>
-                <a:latin typeface="Poppins" pitchFamily="34" charset="0"/>
-                <a:ea typeface="Poppins" pitchFamily="34" charset="-122"/>
-                <a:cs typeface="Poppins" pitchFamily="34" charset="-120"/>
-              </a:rPr>
-              <a:t>A classical, fully-reproducible localizer: search the scale x rotation space explicitly, score by normalised cross-correlation, and say so when the answer is not decisive.</a:t>
-            </a:r>
-            <a:endParaRPr lang="en-US" sz="1600" dirty="0"/>
-          </a:p>
-        </p:txBody>
-      </p:sp>
-      <p:sp>
-        <p:nvSpPr>
-          <p:cNvPr id="17" name="Shape 11"/>
-          <p:cNvSpPr/>
-          <p:nvPr/>
-        </p:nvSpPr>
-        <p:spPr>
-          <a:xfrm>
-            <a:off x="961949" y="4060850"/>
-            <a:ext cx="10267798" cy="1051560"/>
-          </a:xfrm>
-          <a:prstGeom prst="roundRect">
-            <a:avLst>
-              <a:gd name="adj" fmla="val 8693"/>
-            </a:avLst>
-          </a:prstGeom>
-          <a:solidFill>
-            <a:srgbClr val="1E3A8A">
-              <a:alpha val="40000"/>
-            </a:srgbClr>
-          </a:solidFill>
-          <a:ln w="12700">
-            <a:solidFill>
-              <a:srgbClr val="1D4ED8"/>
-            </a:solidFill>
-            <a:prstDash val="solid"/>
-          </a:ln>
-        </p:spPr>
-        <p:txBody>
-          <a:bodyPr/>
-          <a:lstStyle/>
-          <a:p>
-            <a:endParaRPr lang="en-IN"/>
-          </a:p>
-        </p:txBody>
-      </p:sp>
-      <p:sp>
-        <p:nvSpPr>
-          <p:cNvPr id="18" name="Text 12"/>
-          <p:cNvSpPr txBox="1"/>
-          <p:nvPr/>
-        </p:nvSpPr>
-        <p:spPr>
-          <a:xfrm>
-            <a:off x="1162202" y="4261104"/>
-            <a:ext cx="1996135" cy="191110"/>
-          </a:xfrm>
-          <a:prstGeom prst="rect">
-            <a:avLst/>
-          </a:prstGeom>
-          <a:noFill/>
-          <a:ln/>
-        </p:spPr>
-        <p:txBody>
-          <a:bodyPr wrap="square" lIns="0" tIns="0" rIns="0" bIns="0" rtlCol="0" anchor="ctr"/>
-          <a:lstStyle/>
-          <a:p>
-            <a:pPr marL="0" indent="0" algn="l">
-              <a:buNone/>
-            </a:pPr>
-            <a:r>
-              <a:rPr lang="en-US" sz="1000" b="1" dirty="0">
-                <a:solidFill>
-                  <a:srgbClr val="9CA3AF"/>
-                </a:solidFill>
-                <a:latin typeface="Poppins" pitchFamily="34" charset="0"/>
-                <a:ea typeface="Poppins" pitchFamily="34" charset="-122"/>
-                <a:cs typeface="Poppins" pitchFamily="34" charset="-120"/>
-              </a:rPr>
-              <a:t>KEY CONCEPT &amp; APPROACH</a:t>
-            </a:r>
-            <a:endParaRPr lang="en-US" sz="1000" dirty="0"/>
-          </a:p>
-        </p:txBody>
-      </p:sp>
-      <p:sp>
-        <p:nvSpPr>
-          <p:cNvPr id="19" name="Text 13"/>
-          <p:cNvSpPr txBox="1"/>
-          <p:nvPr/>
-        </p:nvSpPr>
-        <p:spPr>
-          <a:xfrm>
-            <a:off x="1162202" y="4528109"/>
-            <a:ext cx="7677302" cy="411480"/>
-          </a:xfrm>
-          <a:prstGeom prst="rect">
-            <a:avLst/>
-          </a:prstGeom>
-          <a:noFill/>
-          <a:ln/>
-        </p:spPr>
-        <p:txBody>
-          <a:bodyPr wrap="square" lIns="0" tIns="0" rIns="0" bIns="0" rtlCol="0" anchor="ctr"/>
-          <a:lstStyle/>
-          <a:p>
-            <a:pPr marL="0" indent="0" algn="l">
-              <a:lnSpc>
-                <a:spcPct val="115000"/>
-              </a:lnSpc>
-              <a:spcAft>
-                <a:spcPts val="0"/>
-              </a:spcAft>
-              <a:buNone/>
-            </a:pPr>
-            <a:r>
-              <a:rPr sz="1150">
-                <a:solidFill>
-                  <a:srgbClr val="FFFFFF"/>
-                </a:solidFill>
-                <a:latin typeface="Poppins"/>
-              </a:rPr>
-              <a:t>Classical multi-scale, multi-rotation template matching: search scale x rotation hypotheses, rank candidates by normalized cross-correlation, then refine to sub-pixel precision.</a:t>
-            </a:r>
-            <a:endParaRPr lang="en-US" sz="1200" dirty="0"/>
-          </a:p>
-        </p:txBody>
-      </p:sp>
-      <p:sp>
-        <p:nvSpPr>
-          <p:cNvPr id="20" name="Shape 14"/>
-          <p:cNvSpPr/>
-          <p:nvPr/>
-        </p:nvSpPr>
-        <p:spPr>
-          <a:xfrm>
-            <a:off x="961949" y="5257800"/>
-            <a:ext cx="10267798" cy="1188720"/>
-          </a:xfrm>
-          <a:prstGeom prst="roundRect">
-            <a:avLst>
-              <a:gd name="adj" fmla="val 8693"/>
-            </a:avLst>
-          </a:prstGeom>
-          <a:solidFill>
-            <a:srgbClr val="1E3A8A">
-              <a:alpha val="40000"/>
-            </a:srgbClr>
-          </a:solidFill>
-          <a:ln w="12700">
-            <a:solidFill>
-              <a:srgbClr val="1D4ED8"/>
-            </a:solidFill>
-            <a:prstDash val="solid"/>
-          </a:ln>
-        </p:spPr>
-        <p:txBody>
-          <a:bodyPr/>
-          <a:lstStyle/>
-          <a:p>
-            <a:endParaRPr lang="en-IN"/>
-          </a:p>
-        </p:txBody>
-      </p:sp>
-      <p:sp>
-        <p:nvSpPr>
-          <p:cNvPr id="21" name="Text 15"/>
-          <p:cNvSpPr txBox="1"/>
-          <p:nvPr/>
-        </p:nvSpPr>
-        <p:spPr>
-          <a:xfrm>
-            <a:off x="1162202" y="5458968"/>
-            <a:ext cx="1548079" cy="191110"/>
-          </a:xfrm>
-          <a:prstGeom prst="rect">
-            <a:avLst/>
-          </a:prstGeom>
-          <a:noFill/>
-          <a:ln/>
-        </p:spPr>
-        <p:txBody>
-          <a:bodyPr wrap="square" lIns="0" tIns="0" rIns="0" bIns="0" rtlCol="0" anchor="ctr"/>
-          <a:lstStyle/>
-          <a:p>
-            <a:pPr marL="0" indent="0" algn="l">
-              <a:buNone/>
-            </a:pPr>
-            <a:r>
-              <a:rPr lang="en-US" sz="1000" b="1" dirty="0">
-                <a:solidFill>
-                  <a:srgbClr val="9CA3AF"/>
-                </a:solidFill>
-                <a:latin typeface="Poppins" pitchFamily="34" charset="0"/>
-                <a:ea typeface="Poppins" pitchFamily="34" charset="-122"/>
-                <a:cs typeface="Poppins" pitchFamily="34" charset="-120"/>
-              </a:rPr>
-              <a:t>SOLUTION OVERVIEW</a:t>
-            </a:r>
-            <a:endParaRPr lang="en-US" sz="1000" dirty="0"/>
-          </a:p>
-        </p:txBody>
-      </p:sp>
-      <p:sp>
-        <p:nvSpPr>
-          <p:cNvPr id="22" name="Text 16"/>
-          <p:cNvSpPr txBox="1"/>
-          <p:nvPr/>
-        </p:nvSpPr>
-        <p:spPr>
-          <a:xfrm>
-            <a:off x="1162202" y="5724144"/>
-            <a:ext cx="8458200" cy="502920"/>
-          </a:xfrm>
-          <a:prstGeom prst="rect">
-            <a:avLst/>
-          </a:prstGeom>
-          <a:noFill/>
-          <a:ln/>
-        </p:spPr>
-        <p:txBody>
-          <a:bodyPr wrap="square" lIns="0" tIns="0" rIns="0" bIns="0" rtlCol="0" anchor="ctr"/>
-          <a:lstStyle/>
-          <a:p>
-            <a:pPr marL="0" indent="0" algn="l">
-              <a:lnSpc>
-                <a:spcPct val="115000"/>
-              </a:lnSpc>
-              <a:spcAft>
-                <a:spcPts val="0"/>
-              </a:spcAft>
-              <a:buNone/>
-            </a:pPr>
-            <a:r>
-              <a:rPr sz="1150">
-                <a:solidFill>
-                  <a:srgbClr val="FFFFFF"/>
-                </a:solidFill>
-                <a:latin typeface="Poppins"/>
-              </a:rPr>
-              <a:t>Paired with DriftSense's own synthetic DRAM mat/strip generator (realistic macro-structure + SEM degradations), so the pipeline is built and evaluated against data that mirrors real repetitive-pattern ambiguity.</a:t>
-            </a:r>
-            <a:endParaRPr lang="en-US" sz="1200" dirty="0"/>
-          </a:p>
-        </p:txBody>
-      </p:sp>
-      <p:pic>
-        <p:nvPicPr>
-          <p:cNvPr id="23" name="Picture 22">
-            <a:extLst>
-              <a:ext uri="{FF2B5EF4-FFF2-40B4-BE49-F238E27FC236}">
-                <a16:creationId xmlns:a16="http://schemas.microsoft.com/office/drawing/2014/main" id="{C033FF08-6369-1C95-EB39-A51D568DF008}"/>
-              </a:ext>
-            </a:extLst>
-          </p:cNvPr>
-          <p:cNvPicPr>
-            <a:picLocks noChangeAspect="1"/>
-          </p:cNvPicPr>
-          <p:nvPr/>
-        </p:nvPicPr>
-        <p:blipFill>
-          <a:blip r:embed="rId7"/>
-          <a:stretch>
-            <a:fillRect/>
-          </a:stretch>
-        </p:blipFill>
-        <p:spPr>
-          <a:xfrm>
-            <a:off x="5292164" y="228650"/>
-            <a:ext cx="1607366" cy="783591"/>
-          </a:xfrm>
-          <a:prstGeom prst="rect">
-            <a:avLst/>
-          </a:prstGeom>
-        </p:spPr>
-      </p:pic>
-      <p:sp>
-        <p:nvSpPr>
-          <p:cNvPr id="25" name="Shape 1">
-            <a:extLst>
-              <a:ext uri="{FF2B5EF4-FFF2-40B4-BE49-F238E27FC236}">
-                <a16:creationId xmlns:a16="http://schemas.microsoft.com/office/drawing/2014/main" id="{82B7216B-04F1-E2CC-935F-9AA2CE5B9E43}"/>
-              </a:ext>
-            </a:extLst>
-          </p:cNvPr>
-          <p:cNvSpPr/>
-          <p:nvPr/>
-        </p:nvSpPr>
-        <p:spPr>
-          <a:xfrm>
-            <a:off x="571500" y="209602"/>
-            <a:ext cx="11048695" cy="857707"/>
-          </a:xfrm>
-          <a:prstGeom prst="roundRect">
-            <a:avLst>
-              <a:gd name="adj" fmla="val 9476"/>
-            </a:avLst>
-          </a:prstGeom>
-          <a:solidFill>
-            <a:srgbClr val="FFFFFF">
-              <a:alpha val="95000"/>
-            </a:srgbClr>
-          </a:solidFill>
-          <a:ln/>
-          <a:effectLst>
-            <a:outerShdw blurRad="63500" dist="38100" dir="5400000" algn="bl" rotWithShape="0">
-              <a:srgbClr val="000000">
-                <a:alpha val="10000"/>
-              </a:srgbClr>
-            </a:outerShdw>
-          </a:effectLst>
-        </p:spPr>
-        <p:txBody>
-          <a:bodyPr/>
-          <a:lstStyle/>
-          <a:p>
-            <a:endParaRPr lang="en-IN"/>
-          </a:p>
-        </p:txBody>
-      </p:sp>
-      <p:pic>
-        <p:nvPicPr>
-          <p:cNvPr id="26" name="Picture 25">
-            <a:extLst>
-              <a:ext uri="{FF2B5EF4-FFF2-40B4-BE49-F238E27FC236}">
-                <a16:creationId xmlns:a16="http://schemas.microsoft.com/office/drawing/2014/main" id="{7743FE56-9400-E309-F93C-96E3C8B4AF82}"/>
-              </a:ext>
-            </a:extLst>
-          </p:cNvPr>
-          <p:cNvPicPr>
-            <a:picLocks noChangeAspect="1"/>
-          </p:cNvPicPr>
-          <p:nvPr/>
-        </p:nvPicPr>
-        <p:blipFill>
-          <a:blip r:embed="rId8">
-            <a:extLst>
-              <a:ext uri="{28A0092B-C50C-407E-A947-70E740481C1C}">
-                <a14:useLocalDpi xmlns:a14="http://schemas.microsoft.com/office/drawing/2010/main" val="0"/>
-              </a:ext>
-            </a:extLst>
-          </a:blip>
-          <a:stretch>
-            <a:fillRect/>
-          </a:stretch>
-        </p:blipFill>
-        <p:spPr>
-          <a:xfrm>
-            <a:off x="1501375" y="329389"/>
-            <a:ext cx="9163491" cy="586435"/>
-          </a:xfrm>
-          <a:prstGeom prst="rect">
-            <a:avLst/>
-          </a:prstGeom>
-        </p:spPr>
-      </p:pic>
-    </p:spTree>
-  </p:cSld>
-  <p:clrMapOvr>
-    <a:masterClrMapping/>
-  </p:clrMapOvr>
-</p:sld>
-</file>
-
-<file path=ppt/slides/slide4.xml><?xml version="1.0" encoding="utf-8"?>
-<p:sld xmlns:a="http://schemas.openxmlformats.org/drawingml/2006/main" xmlns:r="http://schemas.openxmlformats.org/officeDocument/2006/relationships" xmlns:p="http://schemas.openxmlformats.org/presentationml/2006/main">
-  <p:cSld name="Slide 5">
-    <p:spTree>
-      <p:nvGrpSpPr>
-        <p:cNvPr id="1" name=""/>
-        <p:cNvGrpSpPr/>
-        <p:nvPr/>
-      </p:nvGrpSpPr>
-      <p:grpSpPr>
-        <a:xfrm>
-          <a:off x="0" y="0"/>
-          <a:ext cx="0" cy="0"/>
-          <a:chOff x="0" y="0"/>
-          <a:chExt cx="0" cy="0"/>
-        </a:xfrm>
-      </p:grpSpPr>
-      <p:sp>
-        <p:nvSpPr>
-          <p:cNvPr id="2" name="Shape 0"/>
-          <p:cNvSpPr/>
-          <p:nvPr/>
-        </p:nvSpPr>
-        <p:spPr>
-          <a:xfrm>
-            <a:off x="0" y="0"/>
-            <a:ext cx="12191695" cy="6858000"/>
-          </a:xfrm>
-          <a:prstGeom prst="rect">
-            <a:avLst/>
-          </a:prstGeom>
-          <a:solidFill>
-            <a:srgbClr val="000036"/>
-          </a:solidFill>
-          <a:ln/>
-        </p:spPr>
-        <p:txBody>
-          <a:bodyPr/>
-          <a:lstStyle/>
-          <a:p>
-            <a:endParaRPr lang="en-IN"/>
-          </a:p>
-        </p:txBody>
-      </p:sp>
-      <p:pic>
-        <p:nvPicPr>
-          <p:cNvPr id="3" name="Image 0" descr="preencoded.png"/>
-          <p:cNvPicPr>
-            <a:picLocks noChangeAspect="1"/>
-          </p:cNvPicPr>
-          <p:nvPr/>
-        </p:nvPicPr>
-        <p:blipFill>
-          <a:blip r:embed="rId3">
-            <a:alphaModFix amt="10000"/>
-          </a:blip>
-          <a:srcRect l="12327" r="12327"/>
-          <a:stretch/>
-        </p:blipFill>
-        <p:spPr>
-          <a:xfrm>
-            <a:off x="0" y="0"/>
-            <a:ext cx="12191695" cy="6858000"/>
-          </a:xfrm>
-          <a:prstGeom prst="rect">
-            <a:avLst/>
-          </a:prstGeom>
-        </p:spPr>
-      </p:pic>
-      <p:sp>
-        <p:nvSpPr>
-          <p:cNvPr id="4" name="Shape 1"/>
-          <p:cNvSpPr/>
-          <p:nvPr/>
-        </p:nvSpPr>
-        <p:spPr>
-          <a:xfrm>
-            <a:off x="571500" y="286207"/>
-            <a:ext cx="11048695" cy="666598"/>
-          </a:xfrm>
-          <a:prstGeom prst="roundRect">
-            <a:avLst>
-              <a:gd name="adj" fmla="val 15677"/>
-            </a:avLst>
-          </a:prstGeom>
-          <a:solidFill>
-            <a:srgbClr val="FFFFFF">
-              <a:alpha val="95000"/>
-            </a:srgbClr>
-          </a:solidFill>
-          <a:ln/>
-          <a:effectLst>
-            <a:outerShdw blurRad="63500" dist="38100" dir="5400000" algn="bl" rotWithShape="0">
-              <a:srgbClr val="000000">
-                <a:alpha val="10000"/>
-              </a:srgbClr>
-            </a:outerShdw>
-          </a:effectLst>
-        </p:spPr>
-        <p:txBody>
-          <a:bodyPr/>
-          <a:lstStyle/>
-          <a:p>
-            <a:endParaRPr lang="en-IN"/>
-          </a:p>
-        </p:txBody>
-      </p:sp>
-      <p:pic>
-        <p:nvPicPr>
-          <p:cNvPr id="5" name="Image 1" descr="preencoded.png"/>
-          <p:cNvPicPr>
-            <a:picLocks noChangeAspect="1"/>
-          </p:cNvPicPr>
-          <p:nvPr/>
-        </p:nvPicPr>
-        <p:blipFill>
-          <a:blip r:embed="rId4"/>
-          <a:srcRect t="10" b="10"/>
-          <a:stretch/>
-        </p:blipFill>
-        <p:spPr>
-          <a:xfrm>
-            <a:off x="857707" y="381305"/>
-            <a:ext cx="1266444" cy="476402"/>
-          </a:xfrm>
-          <a:prstGeom prst="rect">
-            <a:avLst/>
-          </a:prstGeom>
-        </p:spPr>
-      </p:pic>
-      <p:pic>
-        <p:nvPicPr>
-          <p:cNvPr id="6" name="Image 2" descr="preencoded.png"/>
-          <p:cNvPicPr>
-            <a:picLocks noChangeAspect="1"/>
-          </p:cNvPicPr>
-          <p:nvPr/>
-        </p:nvPicPr>
-        <p:blipFill>
-          <a:blip r:embed="rId5"/>
-          <a:srcRect/>
-          <a:stretch/>
-        </p:blipFill>
-        <p:spPr>
-          <a:xfrm>
-            <a:off x="10858500" y="381305"/>
-            <a:ext cx="476402" cy="476402"/>
-          </a:xfrm>
-          <a:prstGeom prst="rect">
-            <a:avLst/>
-          </a:prstGeom>
-        </p:spPr>
-      </p:pic>
-      <p:sp>
-        <p:nvSpPr>
-          <p:cNvPr id="7" name="Shape 2"/>
-          <p:cNvSpPr/>
-          <p:nvPr/>
-        </p:nvSpPr>
-        <p:spPr>
-          <a:xfrm>
-            <a:off x="571500" y="1333195"/>
-            <a:ext cx="75895" cy="409651"/>
-          </a:xfrm>
-          <a:prstGeom prst="rect">
-            <a:avLst/>
-          </a:prstGeom>
-          <a:solidFill>
-            <a:srgbClr val="88E555"/>
-          </a:solidFill>
-          <a:ln/>
-        </p:spPr>
-        <p:txBody>
-          <a:bodyPr/>
-          <a:lstStyle/>
-          <a:p>
-            <a:endParaRPr lang="en-IN"/>
-          </a:p>
-        </p:txBody>
-      </p:sp>
-      <p:sp>
-        <p:nvSpPr>
-          <p:cNvPr id="8" name="Text 3"/>
-          <p:cNvSpPr txBox="1"/>
-          <p:nvPr/>
-        </p:nvSpPr>
-        <p:spPr>
-          <a:xfrm>
-            <a:off x="838505" y="1295705"/>
-            <a:ext cx="10296144" cy="467258"/>
-          </a:xfrm>
-          <a:prstGeom prst="rect">
-            <a:avLst/>
-          </a:prstGeom>
-          <a:noFill/>
-          <a:ln/>
-        </p:spPr>
-        <p:txBody>
-          <a:bodyPr wrap="square" lIns="0" tIns="0" rIns="0" bIns="0" rtlCol="0" anchor="ctr"/>
-          <a:lstStyle/>
-          <a:p>
-            <a:r>
-              <a:rPr lang="en-US" sz="2600" b="1" dirty="0">
-                <a:solidFill>
-                  <a:srgbClr val="FFFFFF"/>
-                </a:solidFill>
-                <a:latin typeface="Poppins" pitchFamily="34" charset="0"/>
-                <a:ea typeface="Poppins" pitchFamily="34" charset="-122"/>
-                <a:cs typeface="Poppins" pitchFamily="34" charset="-120"/>
-              </a:rPr>
-              <a:t>Proposed Solution</a:t>
-            </a:r>
-            <a:endParaRPr lang="en-US" sz="2600" dirty="0"/>
-          </a:p>
-        </p:txBody>
-      </p:sp>
-      <p:sp>
-        <p:nvSpPr>
-          <p:cNvPr id="9" name="Shape 4"/>
-          <p:cNvSpPr/>
-          <p:nvPr/>
-        </p:nvSpPr>
-        <p:spPr>
-          <a:xfrm>
-            <a:off x="571500" y="2021738"/>
-            <a:ext cx="11048695" cy="4552798"/>
-          </a:xfrm>
-          <a:prstGeom prst="roundRect">
-            <a:avLst>
-              <a:gd name="adj" fmla="val 672"/>
-            </a:avLst>
-          </a:prstGeom>
-          <a:solidFill>
-            <a:srgbClr val="FFFFFF">
-              <a:alpha val="5000"/>
-            </a:srgbClr>
-          </a:solidFill>
-          <a:ln w="12700">
-            <a:solidFill>
-              <a:srgbClr val="88E555">
-                <a:alpha val="30000"/>
-              </a:srgbClr>
-            </a:solidFill>
-            <a:prstDash val="solid"/>
-          </a:ln>
-        </p:spPr>
-        <p:txBody>
-          <a:bodyPr/>
-          <a:lstStyle/>
-          <a:p>
-            <a:endParaRPr lang="en-IN"/>
-          </a:p>
-        </p:txBody>
-      </p:sp>
-      <p:sp>
-        <p:nvSpPr>
-          <p:cNvPr id="10" name="Shape 5"/>
-          <p:cNvSpPr/>
-          <p:nvPr/>
-        </p:nvSpPr>
-        <p:spPr>
-          <a:xfrm>
-            <a:off x="571500" y="2021738"/>
-            <a:ext cx="190195" cy="190195"/>
-          </a:xfrm>
-          <a:prstGeom prst="roundRect">
-            <a:avLst>
-              <a:gd name="adj" fmla="val 192308"/>
-            </a:avLst>
-          </a:prstGeom>
-          <a:noFill/>
-          <a:ln w="38100">
-            <a:solidFill>
-              <a:srgbClr val="88E555"/>
-            </a:solidFill>
-            <a:prstDash val="solid"/>
-          </a:ln>
-        </p:spPr>
-        <p:txBody>
-          <a:bodyPr/>
-          <a:lstStyle/>
-          <a:p>
-            <a:endParaRPr lang="en-IN"/>
-          </a:p>
-        </p:txBody>
-      </p:sp>
-      <p:sp>
-        <p:nvSpPr>
-          <p:cNvPr id="11" name="Shape 6"/>
-          <p:cNvSpPr/>
-          <p:nvPr/>
-        </p:nvSpPr>
-        <p:spPr>
-          <a:xfrm>
-            <a:off x="11430000" y="2021738"/>
-            <a:ext cx="190195" cy="190195"/>
-          </a:xfrm>
-          <a:prstGeom prst="rect">
-            <a:avLst/>
-          </a:prstGeom>
-          <a:noFill/>
-          <a:ln w="38100">
-            <a:solidFill>
-              <a:srgbClr val="88E555"/>
-            </a:solidFill>
-            <a:prstDash val="solid"/>
-          </a:ln>
-        </p:spPr>
-        <p:txBody>
-          <a:bodyPr/>
-          <a:lstStyle/>
-          <a:p>
-            <a:endParaRPr lang="en-IN"/>
-          </a:p>
-        </p:txBody>
-      </p:sp>
-      <p:sp>
-        <p:nvSpPr>
-          <p:cNvPr id="12" name="Shape 7"/>
-          <p:cNvSpPr/>
-          <p:nvPr/>
-        </p:nvSpPr>
-        <p:spPr>
-          <a:xfrm>
-            <a:off x="571500" y="6381598"/>
-            <a:ext cx="190195" cy="190195"/>
-          </a:xfrm>
-          <a:prstGeom prst="rect">
-            <a:avLst/>
-          </a:prstGeom>
-          <a:noFill/>
-          <a:ln w="38100">
-            <a:solidFill>
-              <a:srgbClr val="88E555"/>
-            </a:solidFill>
-            <a:prstDash val="solid"/>
-          </a:ln>
-        </p:spPr>
-        <p:txBody>
-          <a:bodyPr/>
-          <a:lstStyle/>
-          <a:p>
-            <a:endParaRPr lang="en-IN"/>
-          </a:p>
-        </p:txBody>
-      </p:sp>
-      <p:sp>
-        <p:nvSpPr>
-          <p:cNvPr id="13" name="Shape 8"/>
-          <p:cNvSpPr/>
-          <p:nvPr/>
-        </p:nvSpPr>
-        <p:spPr>
-          <a:xfrm>
-            <a:off x="11430000" y="6381598"/>
-            <a:ext cx="190195" cy="190195"/>
-          </a:xfrm>
-          <a:prstGeom prst="rect">
-            <a:avLst/>
-          </a:prstGeom>
-          <a:noFill/>
-          <a:ln w="38100">
-            <a:solidFill>
-              <a:srgbClr val="88E555"/>
-            </a:solidFill>
-            <a:prstDash val="solid"/>
-          </a:ln>
-        </p:spPr>
-        <p:txBody>
-          <a:bodyPr/>
-          <a:lstStyle/>
-          <a:p>
-            <a:endParaRPr lang="en-IN"/>
-          </a:p>
-        </p:txBody>
-      </p:sp>
-      <p:sp>
-        <p:nvSpPr>
-          <p:cNvPr id="14" name="Shape 9"/>
-          <p:cNvSpPr/>
-          <p:nvPr/>
-        </p:nvSpPr>
-        <p:spPr>
-          <a:xfrm>
-            <a:off x="961949" y="2412187"/>
-            <a:ext cx="571500" cy="571500"/>
-          </a:xfrm>
-          <a:prstGeom prst="ellipse">
-            <a:avLst/>
-          </a:prstGeom>
-          <a:solidFill>
-            <a:srgbClr val="273383">
-              <a:alpha val="50000"/>
-            </a:srgbClr>
-          </a:solidFill>
-          <a:ln w="25400">
-            <a:solidFill>
-              <a:srgbClr val="AEFF82"/>
-            </a:solidFill>
-            <a:prstDash val="solid"/>
-          </a:ln>
-        </p:spPr>
-        <p:txBody>
-          <a:bodyPr/>
-          <a:lstStyle/>
-          <a:p>
-            <a:endParaRPr lang="en-IN"/>
-          </a:p>
-        </p:txBody>
-      </p:sp>
-      <p:pic>
-        <p:nvPicPr>
-          <p:cNvPr id="15" name="Image 3" descr="preencoded.png"/>
-          <p:cNvPicPr>
-            <a:picLocks noChangeAspect="1"/>
-          </p:cNvPicPr>
-          <p:nvPr/>
-        </p:nvPicPr>
-        <p:blipFill>
-          <a:blip r:embed="rId6"/>
-          <a:srcRect l="-80" r="-80"/>
-          <a:stretch/>
-        </p:blipFill>
-        <p:spPr>
-          <a:xfrm>
-            <a:off x="1104595" y="2583180"/>
-            <a:ext cx="286207" cy="228600"/>
-          </a:xfrm>
-          <a:prstGeom prst="rect">
-            <a:avLst/>
-          </a:prstGeom>
-        </p:spPr>
-      </p:pic>
-      <p:sp>
-        <p:nvSpPr>
-          <p:cNvPr id="16" name="Text 10"/>
-          <p:cNvSpPr txBox="1"/>
-          <p:nvPr/>
-        </p:nvSpPr>
-        <p:spPr>
-          <a:xfrm>
             <a:off x="961949" y="3193085"/>
-            <a:ext cx="10172700" cy="685800"/>
+            <a:ext cx="10239451" cy="685800"/>
           </a:xfrm>
           <a:prstGeom prst="rect">
             <a:avLst/>
@@ -6679,7 +5128,7 @@
                 <a:ea typeface="Poppins" pitchFamily="34" charset="-122"/>
                 <a:cs typeface="Poppins" pitchFamily="34" charset="-120"/>
               </a:rPr>
-              <a:t>Two connected parts, both runnable from the repository root: a physically-grounded synthetic DRAM generator, and a deterministic classical localization pipeline.</a:t>
+              <a:t>The worst case in the benchmark, why it fails, and what 42 experiments taught us about why it is hard to fix.</a:t>
             </a:r>
             <a:endParaRPr lang="en-US" sz="1800" dirty="0"/>
           </a:p>
@@ -6693,12 +5142,12 @@
         </p:nvSpPr>
         <p:spPr>
           <a:xfrm>
-            <a:off x="961949" y="4134002"/>
-            <a:ext cx="10267798" cy="2148840"/>
+            <a:off x="961949" y="4210812"/>
+            <a:ext cx="5020056" cy="2021546"/>
           </a:xfrm>
           <a:prstGeom prst="roundRect">
             <a:avLst>
-              <a:gd name="adj" fmla="val 4277"/>
+              <a:gd name="adj" fmla="val 4836"/>
             </a:avLst>
           </a:prstGeom>
           <a:solidFill>
@@ -6721,16 +5170,39 @@
           </a:p>
         </p:txBody>
       </p:sp>
-      <p:sp>
-        <p:nvSpPr>
-          <p:cNvPr id="18" name="Text 12"/>
+      <p:pic>
+        <p:nvPicPr>
+          <p:cNvPr id="18" name="Image 4" descr="preencoded.png"/>
+          <p:cNvPicPr>
+            <a:picLocks noChangeAspect="1"/>
+          </p:cNvPicPr>
+          <p:nvPr/>
+        </p:nvPicPr>
+        <p:blipFill>
+          <a:blip r:embed="rId4"/>
+          <a:srcRect/>
+          <a:stretch/>
+        </p:blipFill>
+        <p:spPr>
+          <a:xfrm>
+            <a:off x="1200607" y="4486961"/>
+            <a:ext cx="152705" cy="152705"/>
+          </a:xfrm>
+          <a:prstGeom prst="rect">
+            <a:avLst/>
+          </a:prstGeom>
+        </p:spPr>
+      </p:pic>
+      <p:sp>
+        <p:nvSpPr>
+          <p:cNvPr id="19" name="Text 12"/>
           <p:cNvSpPr txBox="1"/>
           <p:nvPr/>
         </p:nvSpPr>
         <p:spPr>
           <a:xfrm>
-            <a:off x="1200607" y="4372661"/>
-            <a:ext cx="1367028" cy="191110"/>
+            <a:off x="1466698" y="4448556"/>
+            <a:ext cx="4151376" cy="219456"/>
           </a:xfrm>
           <a:prstGeom prst="rect">
             <a:avLst/>
@@ -6746,30 +5218,30 @@
               <a:buNone/>
             </a:pPr>
             <a:r>
-              <a:rPr lang="en-US" sz="1000" b="1" dirty="0">
+              <a:rPr lang="en-US" sz="1200" b="1" dirty="0">
                 <a:solidFill>
-                  <a:srgbClr val="9CA3AF"/>
+                  <a:srgbClr val="FFFFFF"/>
                 </a:solidFill>
                 <a:latin typeface="Poppins" pitchFamily="34" charset="0"/>
                 <a:ea typeface="Poppins" pitchFamily="34" charset="-122"/>
                 <a:cs typeface="Poppins" pitchFamily="34" charset="-120"/>
               </a:rPr>
-              <a:t>SOLUTION DETAILS</a:t>
+              <a:t>Worst case — ho_rotation_drift_007</a:t>
             </a:r>
-            <a:endParaRPr lang="en-US" sz="1000" dirty="0"/>
-          </a:p>
-        </p:txBody>
-      </p:sp>
-      <p:sp>
-        <p:nvSpPr>
-          <p:cNvPr id="19" name="Text 13"/>
+            <a:endParaRPr lang="en-US" sz="1200" dirty="0"/>
+          </a:p>
+        </p:txBody>
+      </p:sp>
+      <p:sp>
+        <p:nvSpPr>
+          <p:cNvPr id="20" name="Text 13"/>
           <p:cNvSpPr txBox="1"/>
           <p:nvPr/>
         </p:nvSpPr>
         <p:spPr>
           <a:xfrm>
-            <a:off x="1200607" y="4528286"/>
-            <a:ext cx="8996782" cy="1691640"/>
+            <a:off x="1200607" y="4791456"/>
+            <a:ext cx="4148633" cy="1335024"/>
           </a:xfrm>
           <a:prstGeom prst="rect">
             <a:avLst/>
@@ -6778,93 +5250,178 @@
           <a:ln/>
         </p:spPr>
         <p:txBody>
-          <a:bodyPr wrap="square" lIns="0" tIns="0" rIns="0" bIns="0" rtlCol="0" anchor="ctr"/>
+          <a:bodyPr wrap="square" lIns="0" tIns="0" rIns="0" bIns="0" rtlCol="0" anchor="t"/>
           <a:lstStyle/>
           <a:p>
             <a:pPr marL="0" indent="0" algn="l">
-              <a:lnSpc>
-                <a:spcPct val="115000"/>
-              </a:lnSpc>
-              <a:spcAft>
-                <a:spcPts val="400"/>
-              </a:spcAft>
-              <a:buNone/>
-            </a:pPr>
-            <a:r>
-              <a:rPr sz="1050" dirty="0">
-                <a:solidFill>
-                  <a:srgbClr val="FFFFFF"/>
-                </a:solidFill>
-                <a:latin typeface="Poppins"/>
-              </a:rPr>
-              <a:t>Pipeline: Reference → candidate generation (ZNCC over 99 scale × rotation hypotheses — 11 scales spanning the literal 9:1–11:1 range × 9 rotations across ±5°, built with both a sharp and a PSF-matched template) → </a:t>
-            </a:r>
-            <a:r>
-              <a:rPr sz="1050" dirty="0" err="1">
-                <a:solidFill>
-                  <a:srgbClr val="FFFFFF"/>
-                </a:solidFill>
-                <a:latin typeface="Poppins"/>
-              </a:rPr>
-              <a:t>dedup</a:t>
-            </a:r>
-            <a:r>
-              <a:rPr sz="1050" dirty="0">
-                <a:solidFill>
-                  <a:srgbClr val="FFFFFF"/>
-                </a:solidFill>
-                <a:latin typeface="Poppins"/>
-              </a:rPr>
-              <a:t> → ranking → sub-pixel refinement → (x, y) with a confidence and ambiguity score.</a:t>
-            </a:r>
-            <a:endParaRPr lang="en-US" sz="1300" dirty="0"/>
-          </a:p>
-          <a:p>
-            <a:pPr>
-              <a:lnSpc>
-                <a:spcPct val="115000"/>
-              </a:lnSpc>
-              <a:spcAft>
-                <a:spcPts val="400"/>
-              </a:spcAft>
-            </a:pPr>
-            <a:r>
-              <a:rPr sz="1050" dirty="0">
-                <a:solidFill>
-                  <a:srgbClr val="FFFFFF"/>
-                </a:solidFill>
-                <a:latin typeface="Poppins"/>
-              </a:rPr>
-              <a:t>Data generator: DRAM mats rendered independently, tiled with strip/routing regions on a shared canvas — real structural boundaries, not an injected marker, disambiguate repeats; SEM degradations layered on after.</a:t>
-            </a:r>
-          </a:p>
-          <a:p>
-            <a:pPr>
               <a:lnSpc>
                 <a:spcPct val="115000"/>
               </a:lnSpc>
               <a:spcAft>
                 <a:spcPts val="0"/>
               </a:spcAft>
+              <a:buNone/>
             </a:pPr>
             <a:r>
-              <a:rPr sz="1050" dirty="0">
+              <a:rPr sz="1050">
+                <a:solidFill>
+                  <a:srgbClr val="D1D5DB"/>
+                </a:solidFill>
+                <a:latin typeface="Poppins"/>
+              </a:rPr>
+              <a:t>A crop deep inside a single mat — no strip, no mat boundary, nothing aperiodic. Under residual rotation drift the correct lattice cell and a neighbour score within 0.05 ZNCC, and the wrong one wins. Root cause is structural, not noise: crops crossing a boundary score 92.0% (81/88), crops crossing neither 50.0% (24/48).</a:t>
+            </a:r>
+            <a:endParaRPr lang="en-US" sz="1000" dirty="0"/>
+          </a:p>
+        </p:txBody>
+      </p:sp>
+      <p:sp>
+        <p:nvSpPr>
+          <p:cNvPr id="21" name="Shape 14"/>
+          <p:cNvSpPr/>
+          <p:nvPr/>
+        </p:nvSpPr>
+        <p:spPr>
+          <a:xfrm>
+            <a:off x="6210605" y="4210812"/>
+            <a:ext cx="5020056" cy="2021546"/>
+          </a:xfrm>
+          <a:prstGeom prst="roundRect">
+            <a:avLst>
+              <a:gd name="adj" fmla="val 4836"/>
+            </a:avLst>
+          </a:prstGeom>
+          <a:solidFill>
+            <a:srgbClr val="1E3A8A">
+              <a:alpha val="40000"/>
+            </a:srgbClr>
+          </a:solidFill>
+          <a:ln w="12700">
+            <a:solidFill>
+              <a:srgbClr val="1D4ED8"/>
+            </a:solidFill>
+            <a:prstDash val="solid"/>
+          </a:ln>
+        </p:spPr>
+        <p:txBody>
+          <a:bodyPr/>
+          <a:lstStyle/>
+          <a:p>
+            <a:endParaRPr lang="en-IN"/>
+          </a:p>
+        </p:txBody>
+      </p:sp>
+      <p:pic>
+        <p:nvPicPr>
+          <p:cNvPr id="22" name="Image 5" descr="preencoded.png"/>
+          <p:cNvPicPr>
+            <a:picLocks noChangeAspect="1"/>
+          </p:cNvPicPr>
+          <p:nvPr/>
+        </p:nvPicPr>
+        <p:blipFill>
+          <a:blip r:embed="rId5"/>
+          <a:srcRect l="-33" r="-33"/>
+          <a:stretch/>
+        </p:blipFill>
+        <p:spPr>
+          <a:xfrm>
+            <a:off x="6448349" y="4486961"/>
+            <a:ext cx="171907" cy="152705"/>
+          </a:xfrm>
+          <a:prstGeom prst="rect">
+            <a:avLst/>
+          </a:prstGeom>
+        </p:spPr>
+      </p:pic>
+      <p:sp>
+        <p:nvSpPr>
+          <p:cNvPr id="23" name="Text 15"/>
+          <p:cNvSpPr txBox="1"/>
+          <p:nvPr/>
+        </p:nvSpPr>
+        <p:spPr>
+          <a:xfrm>
+            <a:off x="6734556" y="4448556"/>
+            <a:ext cx="3986784" cy="219456"/>
+          </a:xfrm>
+          <a:prstGeom prst="rect">
+            <a:avLst/>
+          </a:prstGeom>
+          <a:noFill/>
+          <a:ln/>
+        </p:spPr>
+        <p:txBody>
+          <a:bodyPr wrap="square" lIns="0" tIns="0" rIns="0" bIns="0" rtlCol="0" anchor="ctr"/>
+          <a:lstStyle/>
+          <a:p>
+            <a:pPr marL="0" indent="0" algn="l">
+              <a:buNone/>
+            </a:pPr>
+            <a:r>
+              <a:rPr lang="en-US" sz="1200" b="1" dirty="0">
                 <a:solidFill>
                   <a:srgbClr val="FFFFFF"/>
                 </a:solidFill>
+                <a:latin typeface="Poppins" pitchFamily="34" charset="0"/>
+                <a:ea typeface="Poppins" pitchFamily="34" charset="-122"/>
+                <a:cs typeface="Poppins" pitchFamily="34" charset="-120"/>
+              </a:rPr>
+              <a:t>Limitations and learnings</a:t>
+            </a:r>
+            <a:endParaRPr lang="en-US" sz="1200" dirty="0"/>
+          </a:p>
+        </p:txBody>
+      </p:sp>
+      <p:sp>
+        <p:nvSpPr>
+          <p:cNvPr id="24" name="Text 16"/>
+          <p:cNvSpPr txBox="1"/>
+          <p:nvPr/>
+        </p:nvSpPr>
+        <p:spPr>
+          <a:xfrm>
+            <a:off x="6448349" y="4791456"/>
+            <a:ext cx="3986784" cy="1335024"/>
+          </a:xfrm>
+          <a:prstGeom prst="rect">
+            <a:avLst/>
+          </a:prstGeom>
+          <a:noFill/>
+          <a:ln/>
+        </p:spPr>
+        <p:txBody>
+          <a:bodyPr wrap="square" lIns="0" tIns="0" rIns="0" bIns="0" rtlCol="0" anchor="t"/>
+          <a:lstStyle/>
+          <a:p>
+            <a:pPr marL="0" indent="0" algn="l">
+              <a:lnSpc>
+                <a:spcPct val="115000"/>
+              </a:lnSpc>
+              <a:spcAft>
+                <a:spcPts val="0"/>
+              </a:spcAft>
+              <a:buNone/>
+            </a:pPr>
+            <a:r>
+              <a:rPr sz="1050">
+                <a:solidFill>
+                  <a:srgbClr val="D1D5DB"/>
+                </a:solidFill>
                 <a:latin typeface="Poppins"/>
               </a:rPr>
-              <a:t>The grid was densified (5→9 steps) and then widened to the literal 9:1–11:1 span; a PSF-matched dual-arm template and a recalibrated ambiguity threshold followed. Each shipped as a documented gate exception, logged with the criteria it did not clear.</a:t>
+              <a:t>All 35 remaining failures are near-ties, and the error is one-dimensional — along a lattice axis, cross-axis residual only ~1.5px. 37% are discovery failures, 63% selection. All 22 attempts at that selection problem were rejected; the best, gated escalation, is real in expectation (29 rescued / 10 broken over 5 seeds, p = 0.0017) yet clears the gate on zero of five seeds.</a:t>
             </a:r>
+            <a:endParaRPr lang="en-US" sz="1000" dirty="0"/>
           </a:p>
         </p:txBody>
       </p:sp>
       <p:pic>
         <p:nvPicPr>
-          <p:cNvPr id="20" name="Picture 19">
+          <p:cNvPr id="25" name="Picture 24">
             <a:extLst>
               <a:ext uri="{FF2B5EF4-FFF2-40B4-BE49-F238E27FC236}">
-                <a16:creationId xmlns:a16="http://schemas.microsoft.com/office/drawing/2014/main" id="{667D8EB9-0510-8E20-AE50-3B9EC8704685}"/>
+                <a16:creationId xmlns:a16="http://schemas.microsoft.com/office/drawing/2014/main" id="{C2A87E08-9934-FBF2-2F29-11A8271B362B}"/>
               </a:ext>
             </a:extLst>
           </p:cNvPr>
@@ -6874,14 +5431,14 @@
           <p:nvPr/>
         </p:nvPicPr>
         <p:blipFill>
-          <a:blip r:embed="rId7"/>
+          <a:blip r:embed="rId6"/>
           <a:stretch>
             <a:fillRect/>
           </a:stretch>
         </p:blipFill>
         <p:spPr>
           <a:xfrm>
-            <a:off x="5292164" y="227710"/>
+            <a:off x="5406922" y="227710"/>
             <a:ext cx="1607366" cy="783591"/>
           </a:xfrm>
           <a:prstGeom prst="rect">
@@ -6891,10 +5448,10 @@
       </p:pic>
       <p:sp>
         <p:nvSpPr>
-          <p:cNvPr id="22" name="Shape 1">
+          <p:cNvPr id="27" name="Shape 1">
             <a:extLst>
               <a:ext uri="{FF2B5EF4-FFF2-40B4-BE49-F238E27FC236}">
-                <a16:creationId xmlns:a16="http://schemas.microsoft.com/office/drawing/2014/main" id="{50164B49-38DE-6195-0A8B-DC6EC6DA2457}"/>
+                <a16:creationId xmlns:a16="http://schemas.microsoft.com/office/drawing/2014/main" id="{850BA2BE-D607-619F-6960-A71277019D3B}"/>
               </a:ext>
             </a:extLst>
           </p:cNvPr>
@@ -6903,7 +5460,7 @@
         </p:nvSpPr>
         <p:spPr>
           <a:xfrm>
-            <a:off x="571500" y="142799"/>
+            <a:off x="571500" y="209602"/>
             <a:ext cx="11048695" cy="857707"/>
           </a:xfrm>
           <a:prstGeom prst="roundRect">
@@ -6935,10 +5492,10 @@
       </p:sp>
       <p:pic>
         <p:nvPicPr>
-          <p:cNvPr id="23" name="Picture 22">
+          <p:cNvPr id="28" name="Picture 27">
             <a:extLst>
               <a:ext uri="{FF2B5EF4-FFF2-40B4-BE49-F238E27FC236}">
-                <a16:creationId xmlns:a16="http://schemas.microsoft.com/office/drawing/2014/main" id="{18A68BD0-3127-AC0B-80B4-CA2643B37A26}"/>
+                <a16:creationId xmlns:a16="http://schemas.microsoft.com/office/drawing/2014/main" id="{C5D3E59C-FE74-F0BE-9B10-98C8003398BC}"/>
               </a:ext>
             </a:extLst>
           </p:cNvPr>
@@ -6948,7 +5505,7 @@
           <p:nvPr/>
         </p:nvPicPr>
         <p:blipFill>
-          <a:blip r:embed="rId8">
+          <a:blip r:embed="rId7">
             <a:extLst>
               <a:ext uri="{28A0092B-C50C-407E-A947-70E740481C1C}">
                 <a14:useLocalDpi xmlns:a14="http://schemas.microsoft.com/office/drawing/2010/main" val="0"/>
@@ -6961,7 +5518,7 @@
         </p:blipFill>
         <p:spPr>
           <a:xfrm>
-            <a:off x="1466553" y="276669"/>
+            <a:off x="1628859" y="329389"/>
             <a:ext cx="9163491" cy="586435"/>
           </a:xfrm>
           <a:prstGeom prst="rect">
@@ -6977,7 +5534,7 @@
 </p:sld>
 </file>
 
-<file path=ppt/slides/slide5.xml><?xml version="1.0" encoding="utf-8"?>
+<file path=ppt/slides/slide11.xml><?xml version="1.0" encoding="utf-8"?>
 <p:sld xmlns:a="http://schemas.openxmlformats.org/drawingml/2006/main" xmlns:r="http://schemas.openxmlformats.org/officeDocument/2006/relationships" xmlns:p="http://schemas.openxmlformats.org/presentationml/2006/main">
   <p:cSld name="Slide 6">
     <p:spTree>
@@ -7084,52 +5641,6 @@
           </a:p>
         </p:txBody>
       </p:sp>
-      <p:pic>
-        <p:nvPicPr>
-          <p:cNvPr id="5" name="Image 1" descr="preencoded.png"/>
-          <p:cNvPicPr>
-            <a:picLocks noChangeAspect="1"/>
-          </p:cNvPicPr>
-          <p:nvPr/>
-        </p:nvPicPr>
-        <p:blipFill>
-          <a:blip r:embed="rId4"/>
-          <a:srcRect t="10" b="10"/>
-          <a:stretch/>
-        </p:blipFill>
-        <p:spPr>
-          <a:xfrm>
-            <a:off x="857707" y="381305"/>
-            <a:ext cx="1266444" cy="476402"/>
-          </a:xfrm>
-          <a:prstGeom prst="rect">
-            <a:avLst/>
-          </a:prstGeom>
-        </p:spPr>
-      </p:pic>
-      <p:pic>
-        <p:nvPicPr>
-          <p:cNvPr id="6" name="Image 2" descr="preencoded.png"/>
-          <p:cNvPicPr>
-            <a:picLocks noChangeAspect="1"/>
-          </p:cNvPicPr>
-          <p:nvPr/>
-        </p:nvPicPr>
-        <p:blipFill>
-          <a:blip r:embed="rId5"/>
-          <a:srcRect/>
-          <a:stretch/>
-        </p:blipFill>
-        <p:spPr>
-          <a:xfrm>
-            <a:off x="10858500" y="381305"/>
-            <a:ext cx="476402" cy="476402"/>
-          </a:xfrm>
-          <a:prstGeom prst="rect">
-            <a:avLst/>
-          </a:prstGeom>
-        </p:spPr>
-      </p:pic>
       <p:sp>
         <p:nvSpPr>
           <p:cNvPr id="7" name="Shape 2"/>
@@ -7399,7 +5910,7 @@
           <p:nvPr/>
         </p:nvPicPr>
         <p:blipFill>
-          <a:blip r:embed="rId6"/>
+          <a:blip r:embed="rId4"/>
           <a:srcRect l="-133" r="-133"/>
           <a:stretch/>
         </p:blipFill>
@@ -7462,8 +5973,8 @@
         </p:nvSpPr>
         <p:spPr>
           <a:xfrm>
-            <a:off x="961949" y="3845052"/>
-            <a:ext cx="5020056" cy="1783080"/>
+            <a:off x="961949" y="3845051"/>
+            <a:ext cx="5020056" cy="1890001"/>
           </a:xfrm>
           <a:prstGeom prst="roundRect">
             <a:avLst>
@@ -7560,7 +6071,7 @@
               <a:buNone/>
             </a:pPr>
             <a:r>
-              <a:rPr sz="1100" dirty="0">
+              <a:rPr sz="1100">
                 <a:solidFill>
                   <a:srgbClr val="FFFFFF"/>
                 </a:solidFill>
@@ -7581,7 +6092,7 @@
         <p:spPr>
           <a:xfrm>
             <a:off x="6210605" y="3845052"/>
-            <a:ext cx="5020056" cy="1783080"/>
+            <a:ext cx="5020056" cy="1890000"/>
           </a:xfrm>
           <a:prstGeom prst="roundRect">
             <a:avLst>
@@ -7655,7 +6166,7 @@
         </p:nvSpPr>
         <p:spPr>
           <a:xfrm>
-            <a:off x="6448349" y="4352544"/>
+            <a:off x="6448349" y="4389120"/>
             <a:ext cx="4239158" cy="1417320"/>
           </a:xfrm>
           <a:prstGeom prst="rect">
@@ -7678,7 +6189,7 @@
               <a:buNone/>
             </a:pPr>
             <a:r>
-              <a:rPr sz="1100" dirty="0">
+              <a:rPr sz="1100">
                 <a:solidFill>
                   <a:srgbClr val="FFFFFF"/>
                 </a:solidFill>
@@ -7705,7 +6216,7 @@
           <p:nvPr/>
         </p:nvPicPr>
         <p:blipFill>
-          <a:blip r:embed="rId7"/>
+          <a:blip r:embed="rId5"/>
           <a:stretch>
             <a:fillRect/>
           </a:stretch>
@@ -7779,7 +6290,7 @@
           <p:nvPr/>
         </p:nvPicPr>
         <p:blipFill>
-          <a:blip r:embed="rId8">
+          <a:blip r:embed="rId6">
             <a:extLst>
               <a:ext uri="{28A0092B-C50C-407E-A947-70E740481C1C}">
                 <a14:useLocalDpi xmlns:a14="http://schemas.microsoft.com/office/drawing/2010/main" val="0"/>
@@ -7808,7 +6319,7 @@
 </p:sld>
 </file>
 
-<file path=ppt/slides/slide6.xml><?xml version="1.0" encoding="utf-8"?>
+<file path=ppt/slides/slide12.xml><?xml version="1.0" encoding="utf-8"?>
 <p:sld xmlns:a="http://schemas.openxmlformats.org/drawingml/2006/main" xmlns:r="http://schemas.openxmlformats.org/officeDocument/2006/relationships" xmlns:p="http://schemas.openxmlformats.org/presentationml/2006/main">
   <p:cSld name="Slide 7">
     <p:spTree>
@@ -7915,52 +6426,6 @@
           </a:p>
         </p:txBody>
       </p:sp>
-      <p:pic>
-        <p:nvPicPr>
-          <p:cNvPr id="5" name="Image 1" descr="preencoded.png"/>
-          <p:cNvPicPr>
-            <a:picLocks noChangeAspect="1"/>
-          </p:cNvPicPr>
-          <p:nvPr/>
-        </p:nvPicPr>
-        <p:blipFill>
-          <a:blip r:embed="rId4"/>
-          <a:srcRect t="10" b="10"/>
-          <a:stretch/>
-        </p:blipFill>
-        <p:spPr>
-          <a:xfrm>
-            <a:off x="857707" y="381305"/>
-            <a:ext cx="1266444" cy="476402"/>
-          </a:xfrm>
-          <a:prstGeom prst="rect">
-            <a:avLst/>
-          </a:prstGeom>
-        </p:spPr>
-      </p:pic>
-      <p:pic>
-        <p:nvPicPr>
-          <p:cNvPr id="6" name="Image 2" descr="preencoded.png"/>
-          <p:cNvPicPr>
-            <a:picLocks noChangeAspect="1"/>
-          </p:cNvPicPr>
-          <p:nvPr/>
-        </p:nvPicPr>
-        <p:blipFill>
-          <a:blip r:embed="rId5"/>
-          <a:srcRect/>
-          <a:stretch/>
-        </p:blipFill>
-        <p:spPr>
-          <a:xfrm>
-            <a:off x="10858500" y="381305"/>
-            <a:ext cx="476402" cy="476402"/>
-          </a:xfrm>
-          <a:prstGeom prst="rect">
-            <a:avLst/>
-          </a:prstGeom>
-        </p:spPr>
-      </p:pic>
       <p:sp>
         <p:nvSpPr>
           <p:cNvPr id="7" name="Shape 2"/>
@@ -8230,7 +6695,7 @@
           <p:nvPr/>
         </p:nvPicPr>
         <p:blipFill>
-          <a:blip r:embed="rId6"/>
+          <a:blip r:embed="rId4"/>
           <a:srcRect/>
           <a:stretch/>
         </p:blipFill>
@@ -8330,7 +6795,7 @@
           <p:nvPr/>
         </p:nvPicPr>
         <p:blipFill>
-          <a:blip r:embed="rId7"/>
+          <a:blip r:embed="rId5"/>
           <a:srcRect/>
           <a:stretch/>
         </p:blipFill>
@@ -8391,7 +6856,7 @@
         </p:nvSpPr>
         <p:spPr>
           <a:xfrm>
-            <a:off x="1200607" y="4658868"/>
+            <a:off x="1258289" y="4693231"/>
             <a:ext cx="4148633" cy="1371600"/>
           </a:xfrm>
           <a:prstGeom prst="rect">
@@ -8471,7 +6936,7 @@
           <p:nvPr/>
         </p:nvPicPr>
         <p:blipFill>
-          <a:blip r:embed="rId8"/>
+          <a:blip r:embed="rId6"/>
           <a:srcRect l="-33" r="-33"/>
           <a:stretch/>
         </p:blipFill>
@@ -8532,7 +6997,7 @@
         </p:nvSpPr>
         <p:spPr>
           <a:xfrm>
-            <a:off x="6448349" y="4738878"/>
+            <a:off x="6448349" y="4791456"/>
             <a:ext cx="3986784" cy="1371600"/>
           </a:xfrm>
           <a:prstGeom prst="rect">
@@ -8555,7 +7020,7 @@
               <a:buNone/>
             </a:pPr>
             <a:r>
-              <a:rPr sz="1050" dirty="0">
+              <a:rPr sz="1050">
                 <a:solidFill>
                   <a:srgbClr val="D1D5DB"/>
                 </a:solidFill>
@@ -8582,7 +7047,7 @@
           <p:nvPr/>
         </p:nvPicPr>
         <p:blipFill>
-          <a:blip r:embed="rId9"/>
+          <a:blip r:embed="rId7"/>
           <a:stretch>
             <a:fillRect/>
           </a:stretch>
@@ -8656,7 +7121,7 @@
           <p:nvPr/>
         </p:nvPicPr>
         <p:blipFill>
-          <a:blip r:embed="rId10">
+          <a:blip r:embed="rId8">
             <a:extLst>
               <a:ext uri="{28A0092B-C50C-407E-A947-70E740481C1C}">
                 <a14:useLocalDpi xmlns:a14="http://schemas.microsoft.com/office/drawing/2010/main" val="0"/>
@@ -8685,7 +7150,7 @@
 </p:sld>
 </file>
 
-<file path=ppt/slides/slide7.xml><?xml version="1.0" encoding="utf-8"?>
+<file path=ppt/slides/slide13.xml><?xml version="1.0" encoding="utf-8"?>
 <p:sld xmlns:a="http://schemas.openxmlformats.org/drawingml/2006/main" xmlns:r="http://schemas.openxmlformats.org/officeDocument/2006/relationships" xmlns:p="http://schemas.openxmlformats.org/presentationml/2006/main">
   <p:cSld name="Slide 8">
     <p:spTree>
@@ -8792,52 +7257,6 @@
           </a:p>
         </p:txBody>
       </p:sp>
-      <p:pic>
-        <p:nvPicPr>
-          <p:cNvPr id="5" name="Image 1" descr="preencoded.png"/>
-          <p:cNvPicPr>
-            <a:picLocks noChangeAspect="1"/>
-          </p:cNvPicPr>
-          <p:nvPr/>
-        </p:nvPicPr>
-        <p:blipFill>
-          <a:blip r:embed="rId4"/>
-          <a:srcRect t="10" b="10"/>
-          <a:stretch/>
-        </p:blipFill>
-        <p:spPr>
-          <a:xfrm>
-            <a:off x="857707" y="381305"/>
-            <a:ext cx="1266444" cy="476402"/>
-          </a:xfrm>
-          <a:prstGeom prst="rect">
-            <a:avLst/>
-          </a:prstGeom>
-        </p:spPr>
-      </p:pic>
-      <p:pic>
-        <p:nvPicPr>
-          <p:cNvPr id="6" name="Image 2" descr="preencoded.png"/>
-          <p:cNvPicPr>
-            <a:picLocks noChangeAspect="1"/>
-          </p:cNvPicPr>
-          <p:nvPr/>
-        </p:nvPicPr>
-        <p:blipFill>
-          <a:blip r:embed="rId5"/>
-          <a:srcRect/>
-          <a:stretch/>
-        </p:blipFill>
-        <p:spPr>
-          <a:xfrm>
-            <a:off x="10858500" y="381305"/>
-            <a:ext cx="476402" cy="476402"/>
-          </a:xfrm>
-          <a:prstGeom prst="rect">
-            <a:avLst/>
-          </a:prstGeom>
-        </p:spPr>
-      </p:pic>
       <p:sp>
         <p:nvSpPr>
           <p:cNvPr id="7" name="Shape 2"/>
@@ -9107,7 +7526,7 @@
           <p:nvPr/>
         </p:nvPicPr>
         <p:blipFill>
-          <a:blip r:embed="rId6"/>
+          <a:blip r:embed="rId4"/>
           <a:srcRect/>
           <a:stretch/>
         </p:blipFill>
@@ -9245,7 +7664,7 @@
         </p:nvSpPr>
         <p:spPr>
           <a:xfrm>
-            <a:off x="1873494" y="3445917"/>
+            <a:off x="1873494" y="3419856"/>
             <a:ext cx="8748979" cy="1700784"/>
           </a:xfrm>
           <a:prstGeom prst="rect">
@@ -9335,10 +7754,10 @@
             <a:r>
               <a:rPr lang="en-US" sz="1000" dirty="0">
                 <a:solidFill>
-                  <a:srgbClr val="FFFFFF"/>
+                  <a:srgbClr val="7FC4FF"/>
                 </a:solidFill>
                 <a:latin typeface="Poppins"/>
-                <a:hlinkClick r:id="rId7"/>
+                <a:hlinkClick r:id="rId5"/>
               </a:rPr>
               <a:t>https://github.com/teja120805-cyber/Semicon-26---Kacha-Mango</a:t>
             </a:r>
@@ -9370,10 +7789,10 @@
             <a:r>
               <a:rPr lang="en-US" sz="1000" dirty="0">
                 <a:solidFill>
-                  <a:srgbClr val="FFFFFF"/>
+                  <a:srgbClr val="7FC4FF"/>
                 </a:solidFill>
                 <a:latin typeface="Poppins"/>
-                <a:hlinkClick r:id="rId8"/>
+                <a:hlinkClick r:id="rId6"/>
               </a:rPr>
               <a:t>https://drive.google.com/drive/folders/1G6Wa_ILJXcvpa6gIHGHpws5hdlO48gVC?usp=sharing</a:t>
             </a:r>
@@ -9525,7 +7944,7 @@
           <p:nvPr/>
         </p:nvPicPr>
         <p:blipFill>
-          <a:blip r:embed="rId9"/>
+          <a:blip r:embed="rId7"/>
           <a:srcRect t="-45" b="-45"/>
           <a:stretch/>
         </p:blipFill>
@@ -9625,7 +8044,7 @@
           <p:nvPr/>
         </p:nvPicPr>
         <p:blipFill>
-          <a:blip r:embed="rId10"/>
+          <a:blip r:embed="rId8"/>
           <a:srcRect/>
           <a:stretch/>
         </p:blipFill>
@@ -9725,7 +8144,7 @@
           <p:nvPr/>
         </p:nvPicPr>
         <p:blipFill>
-          <a:blip r:embed="rId11"/>
+          <a:blip r:embed="rId9"/>
           <a:srcRect/>
           <a:stretch/>
         </p:blipFill>
@@ -9793,7 +8212,7 @@
           <p:nvPr/>
         </p:nvPicPr>
         <p:blipFill>
-          <a:blip r:embed="rId12"/>
+          <a:blip r:embed="rId10"/>
           <a:stretch>
             <a:fillRect/>
           </a:stretch>
@@ -9867,7 +8286,7 @@
           <p:nvPr/>
         </p:nvPicPr>
         <p:blipFill>
-          <a:blip r:embed="rId13">
+          <a:blip r:embed="rId11">
             <a:extLst>
               <a:ext uri="{28A0092B-C50C-407E-A947-70E740481C1C}">
                 <a14:useLocalDpi xmlns:a14="http://schemas.microsoft.com/office/drawing/2010/main" val="0"/>
@@ -9896,7 +8315,7 @@
 </p:sld>
 </file>
 
-<file path=ppt/slides/slide8.xml><?xml version="1.0" encoding="utf-8"?>
+<file path=ppt/slides/slide14.xml><?xml version="1.0" encoding="utf-8"?>
 <p:sld xmlns:a="http://schemas.openxmlformats.org/drawingml/2006/main" xmlns:r="http://schemas.openxmlformats.org/officeDocument/2006/relationships" xmlns:p="http://schemas.openxmlformats.org/presentationml/2006/main">
   <p:cSld>
     <p:spTree>
@@ -10003,52 +8422,6 @@
           </a:p>
         </p:txBody>
       </p:sp>
-      <p:pic>
-        <p:nvPicPr>
-          <p:cNvPr id="5" name="Image 1" descr="preencoded.png"/>
-          <p:cNvPicPr>
-            <a:picLocks noChangeAspect="1"/>
-          </p:cNvPicPr>
-          <p:nvPr/>
-        </p:nvPicPr>
-        <p:blipFill>
-          <a:blip r:embed="rId4"/>
-          <a:srcRect t="10" b="10"/>
-          <a:stretch/>
-        </p:blipFill>
-        <p:spPr>
-          <a:xfrm>
-            <a:off x="857707" y="381305"/>
-            <a:ext cx="1266444" cy="476402"/>
-          </a:xfrm>
-          <a:prstGeom prst="rect">
-            <a:avLst/>
-          </a:prstGeom>
-        </p:spPr>
-      </p:pic>
-      <p:pic>
-        <p:nvPicPr>
-          <p:cNvPr id="6" name="Image 2" descr="preencoded.png"/>
-          <p:cNvPicPr>
-            <a:picLocks noChangeAspect="1"/>
-          </p:cNvPicPr>
-          <p:nvPr/>
-        </p:nvPicPr>
-        <p:blipFill>
-          <a:blip r:embed="rId5"/>
-          <a:srcRect/>
-          <a:stretch/>
-        </p:blipFill>
-        <p:spPr>
-          <a:xfrm>
-            <a:off x="10858500" y="381305"/>
-            <a:ext cx="476402" cy="476402"/>
-          </a:xfrm>
-          <a:prstGeom prst="rect">
-            <a:avLst/>
-          </a:prstGeom>
-        </p:spPr>
-      </p:pic>
       <p:sp>
         <p:nvSpPr>
           <p:cNvPr id="7" name="Shape 2"/>
@@ -10359,7 +8732,7 @@
           <p:nvPr/>
         </p:nvPicPr>
         <p:blipFill>
-          <a:blip r:embed="rId6"/>
+          <a:blip r:embed="rId4"/>
           <a:srcRect l="-237" r="-237"/>
           <a:stretch/>
         </p:blipFill>
@@ -10457,7 +8830,7 @@
           <p:nvPr/>
         </p:nvPicPr>
         <p:blipFill>
-          <a:blip r:embed="rId7"/>
+          <a:blip r:embed="rId5"/>
           <a:srcRect t="-180" b="-180"/>
           <a:stretch/>
         </p:blipFill>
@@ -10503,10 +8876,10 @@
             <a:r>
               <a:rPr lang="en-US" sz="1400">
                 <a:solidFill>
-                  <a:srgbClr val="FFFFFF"/>
+                  <a:srgbClr val="7FC4FF"/>
                 </a:solidFill>
                 <a:latin typeface="Poppins"/>
-                <a:hlinkClick r:id="rId8"/>
+                <a:hlinkClick r:id="rId6"/>
               </a:rPr>
               <a:t>https://github.com/teja120805-cyber/Semicon-26---Kacha-Mango</a:t>
             </a:r>
@@ -10603,7 +8976,7 @@
           <p:nvPr/>
         </p:nvPicPr>
         <p:blipFill>
-          <a:blip r:embed="rId9"/>
+          <a:blip r:embed="rId7"/>
           <a:srcRect l="-607" r="-607"/>
           <a:stretch/>
         </p:blipFill>
@@ -10701,7 +9074,7 @@
           <p:nvPr/>
         </p:nvPicPr>
         <p:blipFill>
-          <a:blip r:embed="rId10"/>
+          <a:blip r:embed="rId8"/>
           <a:srcRect l="-33" r="-33"/>
           <a:stretch/>
         </p:blipFill>
@@ -10723,7 +9096,7 @@
         </p:nvSpPr>
         <p:spPr>
           <a:xfrm>
-            <a:off x="2848356" y="5239511"/>
+            <a:off x="2832355" y="5191963"/>
             <a:ext cx="8321040" cy="322783"/>
           </a:xfrm>
           <a:prstGeom prst="rect">
@@ -10747,10 +9120,10 @@
             <a:r>
               <a:rPr lang="en-US" sz="1200" dirty="0">
                 <a:solidFill>
-                  <a:srgbClr val="FFFFFF"/>
+                  <a:srgbClr val="7FC4FF"/>
                 </a:solidFill>
                 <a:latin typeface="Poppins"/>
-                <a:hlinkClick r:id="rId11"/>
+                <a:hlinkClick r:id="rId9"/>
               </a:rPr>
               <a:t>https://drive.google.com/drive/folders/1G6Wa_ILJXcvpa6gIHGHpws5hdlO48gVC?usp=sharing</a:t>
             </a:r>
@@ -10778,7 +9151,7 @@
           <p:nvPr/>
         </p:nvPicPr>
         <p:blipFill>
-          <a:blip r:embed="rId12"/>
+          <a:blip r:embed="rId10"/>
           <a:stretch>
             <a:fillRect/>
           </a:stretch>
@@ -10852,7 +9225,7 @@
           <p:nvPr/>
         </p:nvPicPr>
         <p:blipFill>
-          <a:blip r:embed="rId13">
+          <a:blip r:embed="rId11">
             <a:extLst>
               <a:ext uri="{28A0092B-C50C-407E-A947-70E740481C1C}">
                 <a14:useLocalDpi xmlns:a14="http://schemas.microsoft.com/office/drawing/2010/main" val="0"/>
@@ -10881,7 +9254,7 @@
 </p:sld>
 </file>
 
-<file path=ppt/slides/slide9.xml><?xml version="1.0" encoding="utf-8"?>
+<file path=ppt/slides/slide15.xml><?xml version="1.0" encoding="utf-8"?>
 <p:sld xmlns:a="http://schemas.openxmlformats.org/drawingml/2006/main" xmlns:r="http://schemas.openxmlformats.org/officeDocument/2006/relationships" xmlns:p="http://schemas.openxmlformats.org/presentationml/2006/main">
   <p:cSld>
     <p:spTree>
@@ -10988,52 +9361,6 @@
           </a:p>
         </p:txBody>
       </p:sp>
-      <p:pic>
-        <p:nvPicPr>
-          <p:cNvPr id="5" name="Image 1" descr="preencoded.png"/>
-          <p:cNvPicPr>
-            <a:picLocks noChangeAspect="1"/>
-          </p:cNvPicPr>
-          <p:nvPr/>
-        </p:nvPicPr>
-        <p:blipFill>
-          <a:blip r:embed="rId4"/>
-          <a:srcRect t="10" b="10"/>
-          <a:stretch/>
-        </p:blipFill>
-        <p:spPr>
-          <a:xfrm>
-            <a:off x="857707" y="381305"/>
-            <a:ext cx="1266444" cy="476402"/>
-          </a:xfrm>
-          <a:prstGeom prst="rect">
-            <a:avLst/>
-          </a:prstGeom>
-        </p:spPr>
-      </p:pic>
-      <p:pic>
-        <p:nvPicPr>
-          <p:cNvPr id="6" name="Image 2" descr="preencoded.png"/>
-          <p:cNvPicPr>
-            <a:picLocks noChangeAspect="1"/>
-          </p:cNvPicPr>
-          <p:nvPr/>
-        </p:nvPicPr>
-        <p:blipFill>
-          <a:blip r:embed="rId5"/>
-          <a:srcRect/>
-          <a:stretch/>
-        </p:blipFill>
-        <p:spPr>
-          <a:xfrm>
-            <a:off x="10858500" y="381305"/>
-            <a:ext cx="476402" cy="476402"/>
-          </a:xfrm>
-          <a:prstGeom prst="rect">
-            <a:avLst/>
-          </a:prstGeom>
-        </p:spPr>
-      </p:pic>
       <p:sp>
         <p:nvSpPr>
           <p:cNvPr id="7" name="Shape 2"/>
@@ -11303,7 +9630,7 @@
           <p:nvPr/>
         </p:nvPicPr>
         <p:blipFill>
-          <a:blip r:embed="rId6"/>
+          <a:blip r:embed="rId4"/>
           <a:srcRect/>
           <a:stretch/>
         </p:blipFill>
@@ -11439,7 +9766,7 @@
         </p:nvSpPr>
         <p:spPr>
           <a:xfrm>
-            <a:off x="1790395" y="2884030"/>
+            <a:off x="1790395" y="2869388"/>
             <a:ext cx="9235440" cy="914400"/>
           </a:xfrm>
           <a:prstGeom prst="rect">
@@ -11515,7 +9842,7 @@
           <p:nvPr/>
         </p:nvPicPr>
         <p:blipFill>
-          <a:blip r:embed="rId7"/>
+          <a:blip r:embed="rId5"/>
           <a:srcRect l="-80" r="-80"/>
           <a:stretch/>
         </p:blipFill>
@@ -11839,7 +10166,7 @@
           <p:nvPr/>
         </p:nvPicPr>
         <p:blipFill>
-          <a:blip r:embed="rId8"/>
+          <a:blip r:embed="rId6"/>
           <a:stretch>
             <a:fillRect/>
           </a:stretch>
@@ -11913,7 +10240,7 @@
           <p:nvPr/>
         </p:nvPicPr>
         <p:blipFill>
-          <a:blip r:embed="rId9">
+          <a:blip r:embed="rId7">
             <a:extLst>
               <a:ext uri="{28A0092B-C50C-407E-A947-70E740481C1C}">
                 <a14:useLocalDpi xmlns:a14="http://schemas.microsoft.com/office/drawing/2010/main" val="0"/>
@@ -11927,6 +10254,6396 @@
         <p:spPr>
           <a:xfrm>
             <a:off x="1514101" y="390016"/>
+            <a:ext cx="9163491" cy="586435"/>
+          </a:xfrm>
+          <a:prstGeom prst="rect">
+            <a:avLst/>
+          </a:prstGeom>
+        </p:spPr>
+      </p:pic>
+    </p:spTree>
+  </p:cSld>
+  <p:clrMapOvr>
+    <a:masterClrMapping/>
+  </p:clrMapOvr>
+</p:sld>
+</file>
+
+<file path=ppt/slides/slide2.xml><?xml version="1.0" encoding="utf-8"?>
+<p:sld xmlns:a="http://schemas.openxmlformats.org/drawingml/2006/main" xmlns:r="http://schemas.openxmlformats.org/officeDocument/2006/relationships" xmlns:p="http://schemas.openxmlformats.org/presentationml/2006/main">
+  <p:cSld name="Slide 3">
+    <p:spTree>
+      <p:nvGrpSpPr>
+        <p:cNvPr id="1" name=""/>
+        <p:cNvGrpSpPr/>
+        <p:nvPr/>
+      </p:nvGrpSpPr>
+      <p:grpSpPr>
+        <a:xfrm>
+          <a:off x="0" y="0"/>
+          <a:ext cx="0" cy="0"/>
+          <a:chOff x="0" y="0"/>
+          <a:chExt cx="0" cy="0"/>
+        </a:xfrm>
+      </p:grpSpPr>
+      <p:sp>
+        <p:nvSpPr>
+          <p:cNvPr id="2" name="Shape 0"/>
+          <p:cNvSpPr/>
+          <p:nvPr/>
+        </p:nvSpPr>
+        <p:spPr>
+          <a:xfrm>
+            <a:off x="0" y="0"/>
+            <a:ext cx="12191695" cy="6858000"/>
+          </a:xfrm>
+          <a:prstGeom prst="rect">
+            <a:avLst/>
+          </a:prstGeom>
+          <a:solidFill>
+            <a:srgbClr val="000036"/>
+          </a:solidFill>
+          <a:ln/>
+        </p:spPr>
+        <p:txBody>
+          <a:bodyPr/>
+          <a:lstStyle/>
+          <a:p>
+            <a:endParaRPr lang="en-IN"/>
+          </a:p>
+        </p:txBody>
+      </p:sp>
+      <p:pic>
+        <p:nvPicPr>
+          <p:cNvPr id="3" name="Image 0" descr="preencoded.png"/>
+          <p:cNvPicPr>
+            <a:picLocks noChangeAspect="1"/>
+          </p:cNvPicPr>
+          <p:nvPr/>
+        </p:nvPicPr>
+        <p:blipFill>
+          <a:blip r:embed="rId3">
+            <a:alphaModFix amt="10000"/>
+          </a:blip>
+          <a:srcRect l="12327" r="12327"/>
+          <a:stretch/>
+        </p:blipFill>
+        <p:spPr>
+          <a:xfrm>
+            <a:off x="0" y="0"/>
+            <a:ext cx="12191695" cy="6858000"/>
+          </a:xfrm>
+          <a:prstGeom prst="rect">
+            <a:avLst/>
+          </a:prstGeom>
+        </p:spPr>
+      </p:pic>
+      <p:sp>
+        <p:nvSpPr>
+          <p:cNvPr id="7" name="Shape 2"/>
+          <p:cNvSpPr/>
+          <p:nvPr/>
+        </p:nvSpPr>
+        <p:spPr>
+          <a:xfrm>
+            <a:off x="571500" y="1333195"/>
+            <a:ext cx="75895" cy="409651"/>
+          </a:xfrm>
+          <a:prstGeom prst="rect">
+            <a:avLst/>
+          </a:prstGeom>
+          <a:solidFill>
+            <a:srgbClr val="88E555"/>
+          </a:solidFill>
+          <a:ln/>
+        </p:spPr>
+        <p:txBody>
+          <a:bodyPr/>
+          <a:lstStyle/>
+          <a:p>
+            <a:endParaRPr lang="en-IN"/>
+          </a:p>
+        </p:txBody>
+      </p:sp>
+      <p:sp>
+        <p:nvSpPr>
+          <p:cNvPr id="8" name="Text 3"/>
+          <p:cNvSpPr txBox="1"/>
+          <p:nvPr/>
+        </p:nvSpPr>
+        <p:spPr>
+          <a:xfrm>
+            <a:off x="838505" y="1295705"/>
+            <a:ext cx="5547665" cy="467258"/>
+          </a:xfrm>
+          <a:prstGeom prst="rect">
+            <a:avLst/>
+          </a:prstGeom>
+          <a:noFill/>
+          <a:ln/>
+        </p:spPr>
+        <p:txBody>
+          <a:bodyPr wrap="square" lIns="0" tIns="0" rIns="0" bIns="0" rtlCol="0" anchor="ctr"/>
+          <a:lstStyle/>
+          <a:p>
+            <a:pPr marL="0" indent="0" algn="l">
+              <a:buNone/>
+            </a:pPr>
+            <a:r>
+              <a:rPr lang="en-US" sz="2600" b="1" dirty="0">
+                <a:solidFill>
+                  <a:srgbClr val="FFFFFF"/>
+                </a:solidFill>
+                <a:latin typeface="Poppins" pitchFamily="34" charset="0"/>
+                <a:ea typeface="Poppins" pitchFamily="34" charset="-122"/>
+                <a:cs typeface="Poppins" pitchFamily="34" charset="-120"/>
+              </a:rPr>
+              <a:t>Problem Statement Addressed</a:t>
+            </a:r>
+            <a:endParaRPr lang="en-US" sz="2600" dirty="0"/>
+          </a:p>
+        </p:txBody>
+      </p:sp>
+      <p:sp>
+        <p:nvSpPr>
+          <p:cNvPr id="9" name="Shape 4"/>
+          <p:cNvSpPr/>
+          <p:nvPr/>
+        </p:nvSpPr>
+        <p:spPr>
+          <a:xfrm>
+            <a:off x="571500" y="2021738"/>
+            <a:ext cx="11048695" cy="4552798"/>
+          </a:xfrm>
+          <a:prstGeom prst="roundRect">
+            <a:avLst>
+              <a:gd name="adj" fmla="val 672"/>
+            </a:avLst>
+          </a:prstGeom>
+          <a:solidFill>
+            <a:srgbClr val="FFFFFF">
+              <a:alpha val="5000"/>
+            </a:srgbClr>
+          </a:solidFill>
+          <a:ln w="12700">
+            <a:solidFill>
+              <a:srgbClr val="88E555">
+                <a:alpha val="30000"/>
+              </a:srgbClr>
+            </a:solidFill>
+            <a:prstDash val="solid"/>
+          </a:ln>
+        </p:spPr>
+        <p:txBody>
+          <a:bodyPr/>
+          <a:lstStyle/>
+          <a:p>
+            <a:endParaRPr lang="en-IN"/>
+          </a:p>
+        </p:txBody>
+      </p:sp>
+      <p:sp>
+        <p:nvSpPr>
+          <p:cNvPr id="10" name="Shape 5"/>
+          <p:cNvSpPr/>
+          <p:nvPr/>
+        </p:nvSpPr>
+        <p:spPr>
+          <a:xfrm>
+            <a:off x="571500" y="2021738"/>
+            <a:ext cx="190195" cy="190195"/>
+          </a:xfrm>
+          <a:prstGeom prst="roundRect">
+            <a:avLst>
+              <a:gd name="adj" fmla="val 192308"/>
+            </a:avLst>
+          </a:prstGeom>
+          <a:noFill/>
+          <a:ln w="38100">
+            <a:solidFill>
+              <a:srgbClr val="88E555"/>
+            </a:solidFill>
+            <a:prstDash val="solid"/>
+          </a:ln>
+        </p:spPr>
+        <p:txBody>
+          <a:bodyPr/>
+          <a:lstStyle/>
+          <a:p>
+            <a:endParaRPr lang="en-IN"/>
+          </a:p>
+        </p:txBody>
+      </p:sp>
+      <p:sp>
+        <p:nvSpPr>
+          <p:cNvPr id="11" name="Shape 6"/>
+          <p:cNvSpPr/>
+          <p:nvPr/>
+        </p:nvSpPr>
+        <p:spPr>
+          <a:xfrm>
+            <a:off x="11430000" y="2021738"/>
+            <a:ext cx="190195" cy="190195"/>
+          </a:xfrm>
+          <a:prstGeom prst="rect">
+            <a:avLst/>
+          </a:prstGeom>
+          <a:noFill/>
+          <a:ln w="38100">
+            <a:solidFill>
+              <a:srgbClr val="88E555"/>
+            </a:solidFill>
+            <a:prstDash val="solid"/>
+          </a:ln>
+        </p:spPr>
+        <p:txBody>
+          <a:bodyPr/>
+          <a:lstStyle/>
+          <a:p>
+            <a:endParaRPr lang="en-IN"/>
+          </a:p>
+        </p:txBody>
+      </p:sp>
+      <p:sp>
+        <p:nvSpPr>
+          <p:cNvPr id="12" name="Shape 7"/>
+          <p:cNvSpPr/>
+          <p:nvPr/>
+        </p:nvSpPr>
+        <p:spPr>
+          <a:xfrm>
+            <a:off x="571500" y="6381598"/>
+            <a:ext cx="190195" cy="190195"/>
+          </a:xfrm>
+          <a:prstGeom prst="rect">
+            <a:avLst/>
+          </a:prstGeom>
+          <a:noFill/>
+          <a:ln w="38100">
+            <a:solidFill>
+              <a:srgbClr val="88E555"/>
+            </a:solidFill>
+            <a:prstDash val="solid"/>
+          </a:ln>
+        </p:spPr>
+        <p:txBody>
+          <a:bodyPr/>
+          <a:lstStyle/>
+          <a:p>
+            <a:endParaRPr lang="en-IN"/>
+          </a:p>
+        </p:txBody>
+      </p:sp>
+      <p:sp>
+        <p:nvSpPr>
+          <p:cNvPr id="13" name="Shape 8"/>
+          <p:cNvSpPr/>
+          <p:nvPr/>
+        </p:nvSpPr>
+        <p:spPr>
+          <a:xfrm>
+            <a:off x="11430000" y="6381598"/>
+            <a:ext cx="190195" cy="190195"/>
+          </a:xfrm>
+          <a:prstGeom prst="rect">
+            <a:avLst/>
+          </a:prstGeom>
+          <a:noFill/>
+          <a:ln w="38100">
+            <a:solidFill>
+              <a:srgbClr val="88E555"/>
+            </a:solidFill>
+            <a:prstDash val="solid"/>
+          </a:ln>
+        </p:spPr>
+        <p:txBody>
+          <a:bodyPr/>
+          <a:lstStyle/>
+          <a:p>
+            <a:endParaRPr lang="en-IN"/>
+          </a:p>
+        </p:txBody>
+      </p:sp>
+      <p:sp>
+        <p:nvSpPr>
+          <p:cNvPr id="14" name="Shape 9"/>
+          <p:cNvSpPr/>
+          <p:nvPr/>
+        </p:nvSpPr>
+        <p:spPr>
+          <a:xfrm>
+            <a:off x="961949" y="2412187"/>
+            <a:ext cx="571500" cy="571500"/>
+          </a:xfrm>
+          <a:prstGeom prst="ellipse">
+            <a:avLst/>
+          </a:prstGeom>
+          <a:solidFill>
+            <a:srgbClr val="273383">
+              <a:alpha val="50000"/>
+            </a:srgbClr>
+          </a:solidFill>
+          <a:ln w="25400">
+            <a:solidFill>
+              <a:srgbClr val="AEFF82"/>
+            </a:solidFill>
+            <a:prstDash val="solid"/>
+          </a:ln>
+        </p:spPr>
+        <p:txBody>
+          <a:bodyPr/>
+          <a:lstStyle/>
+          <a:p>
+            <a:endParaRPr lang="en-IN"/>
+          </a:p>
+        </p:txBody>
+      </p:sp>
+      <p:pic>
+        <p:nvPicPr>
+          <p:cNvPr id="15" name="Image 3" descr="preencoded.png"/>
+          <p:cNvPicPr>
+            <a:picLocks noChangeAspect="1"/>
+          </p:cNvPicPr>
+          <p:nvPr/>
+        </p:nvPicPr>
+        <p:blipFill>
+          <a:blip r:embed="rId4"/>
+          <a:srcRect/>
+          <a:stretch/>
+        </p:blipFill>
+        <p:spPr>
+          <a:xfrm>
+            <a:off x="1133856" y="2583180"/>
+            <a:ext cx="228600" cy="228600"/>
+          </a:xfrm>
+          <a:prstGeom prst="rect">
+            <a:avLst/>
+          </a:prstGeom>
+        </p:spPr>
+      </p:pic>
+      <p:sp>
+        <p:nvSpPr>
+          <p:cNvPr id="16" name="Text 10"/>
+          <p:cNvSpPr txBox="1"/>
+          <p:nvPr/>
+        </p:nvSpPr>
+        <p:spPr>
+          <a:xfrm>
+            <a:off x="961948" y="3193085"/>
+            <a:ext cx="8607167" cy="314554"/>
+          </a:xfrm>
+          <a:prstGeom prst="rect">
+            <a:avLst/>
+          </a:prstGeom>
+          <a:noFill/>
+          <a:ln/>
+        </p:spPr>
+        <p:txBody>
+          <a:bodyPr wrap="square" lIns="0" tIns="0" rIns="0" bIns="0" rtlCol="0" anchor="ctr"/>
+          <a:lstStyle/>
+          <a:p>
+            <a:r>
+              <a:rPr lang="en-US" cap="all" dirty="0">
+                <a:solidFill>
+                  <a:schemeClr val="accent6">
+                    <a:lumMod val="60000"/>
+                    <a:lumOff val="40000"/>
+                  </a:schemeClr>
+                </a:solidFill>
+              </a:rPr>
+              <a:t>Drift-Sense: AI-Powered Navigation-Error Recovery for Wafer Inspection Tools</a:t>
+            </a:r>
+          </a:p>
+        </p:txBody>
+      </p:sp>
+      <p:sp>
+        <p:nvSpPr>
+          <p:cNvPr id="17" name="Shape 11"/>
+          <p:cNvSpPr/>
+          <p:nvPr/>
+        </p:nvSpPr>
+        <p:spPr>
+          <a:xfrm>
+            <a:off x="961949" y="3768242"/>
+            <a:ext cx="10267798" cy="1990874"/>
+          </a:xfrm>
+          <a:prstGeom prst="roundRect">
+            <a:avLst>
+              <a:gd name="adj" fmla="val 4277"/>
+            </a:avLst>
+          </a:prstGeom>
+          <a:solidFill>
+            <a:srgbClr val="1E3A8A">
+              <a:alpha val="40000"/>
+            </a:srgbClr>
+          </a:solidFill>
+          <a:ln w="12700">
+            <a:solidFill>
+              <a:srgbClr val="1D4ED8"/>
+            </a:solidFill>
+            <a:prstDash val="solid"/>
+          </a:ln>
+        </p:spPr>
+        <p:txBody>
+          <a:bodyPr/>
+          <a:lstStyle/>
+          <a:p>
+            <a:endParaRPr lang="en-IN"/>
+          </a:p>
+        </p:txBody>
+      </p:sp>
+      <p:sp>
+        <p:nvSpPr>
+          <p:cNvPr id="18" name="Text 12"/>
+          <p:cNvSpPr txBox="1"/>
+          <p:nvPr/>
+        </p:nvSpPr>
+        <p:spPr>
+          <a:xfrm>
+            <a:off x="1200607" y="4006901"/>
+            <a:ext cx="1690726" cy="191110"/>
+          </a:xfrm>
+          <a:prstGeom prst="rect">
+            <a:avLst/>
+          </a:prstGeom>
+          <a:noFill/>
+          <a:ln/>
+        </p:spPr>
+        <p:txBody>
+          <a:bodyPr wrap="square" lIns="0" tIns="0" rIns="0" bIns="0" rtlCol="0" anchor="ctr"/>
+          <a:lstStyle/>
+          <a:p>
+            <a:pPr marL="0" indent="0" algn="l">
+              <a:buNone/>
+            </a:pPr>
+            <a:r>
+              <a:rPr lang="en-US" sz="1000" b="1" dirty="0">
+                <a:solidFill>
+                  <a:srgbClr val="9CA3AF"/>
+                </a:solidFill>
+                <a:latin typeface="Poppins" pitchFamily="34" charset="0"/>
+                <a:ea typeface="Poppins" pitchFamily="34" charset="-122"/>
+                <a:cs typeface="Poppins" pitchFamily="34" charset="-120"/>
+              </a:rPr>
+              <a:t>DESCRIPTION / DETAILS</a:t>
+            </a:r>
+            <a:endParaRPr lang="en-US" sz="1000" dirty="0"/>
+          </a:p>
+        </p:txBody>
+      </p:sp>
+      <p:sp>
+        <p:nvSpPr>
+          <p:cNvPr id="19" name="Text 13"/>
+          <p:cNvSpPr txBox="1"/>
+          <p:nvPr/>
+        </p:nvSpPr>
+        <p:spPr>
+          <a:xfrm>
+            <a:off x="1177956" y="3983127"/>
+            <a:ext cx="8968435" cy="1920240"/>
+          </a:xfrm>
+          <a:prstGeom prst="rect">
+            <a:avLst/>
+          </a:prstGeom>
+          <a:noFill/>
+          <a:ln/>
+        </p:spPr>
+        <p:txBody>
+          <a:bodyPr wrap="square" lIns="0" tIns="0" rIns="0" bIns="0" rtlCol="0" anchor="ctr"/>
+          <a:lstStyle/>
+          <a:p>
+            <a:pPr marL="0" indent="0" algn="l">
+              <a:lnSpc>
+                <a:spcPct val="115000"/>
+              </a:lnSpc>
+              <a:spcAft>
+                <a:spcPts val="400"/>
+              </a:spcAft>
+              <a:buNone/>
+            </a:pPr>
+            <a:r>
+              <a:rPr sz="1200" dirty="0">
+                <a:solidFill>
+                  <a:srgbClr val="FFFFFF"/>
+                </a:solidFill>
+                <a:latin typeface="Poppins"/>
+              </a:rPr>
+              <a:t>Inspection tools must relocate a previously captured 100x Reference to the same site in a wider, noisier 10x Search image — across a ~10:1 (9:1-11:1) scale gap, 1-2° rotation drift, and realistic SEM degradation.</a:t>
+            </a:r>
+            <a:endParaRPr lang="en-US" sz="1300" dirty="0"/>
+          </a:p>
+          <a:p>
+            <a:pPr>
+              <a:lnSpc>
+                <a:spcPct val="115000"/>
+              </a:lnSpc>
+              <a:spcAft>
+                <a:spcPts val="0"/>
+              </a:spcAft>
+            </a:pPr>
+            <a:r>
+              <a:rPr sz="1200" dirty="0">
+                <a:solidFill>
+                  <a:srgbClr val="FFFFFF"/>
+                </a:solidFill>
+                <a:latin typeface="Poppins"/>
+              </a:rPr>
+              <a:t>Real DRAM structure is highly repetitive: a wrong periodic repeat can score almost identically to the true site. </a:t>
+            </a:r>
+            <a:r>
+              <a:rPr sz="1200" dirty="0" err="1">
+                <a:solidFill>
+                  <a:srgbClr val="FFFFFF"/>
+                </a:solidFill>
+                <a:latin typeface="Poppins"/>
+              </a:rPr>
+              <a:t>DriftSense</a:t>
+            </a:r>
+            <a:r>
+              <a:rPr sz="1200" dirty="0">
+                <a:solidFill>
+                  <a:srgbClr val="FFFFFF"/>
+                </a:solidFill>
+                <a:latin typeface="Poppins"/>
+              </a:rPr>
+              <a:t> recovers the target center (x, y) automatically, with a confidence/ambiguity score alongside it.</a:t>
+            </a:r>
+          </a:p>
+        </p:txBody>
+      </p:sp>
+      <p:pic>
+        <p:nvPicPr>
+          <p:cNvPr id="20" name="Picture 19">
+            <a:extLst>
+              <a:ext uri="{FF2B5EF4-FFF2-40B4-BE49-F238E27FC236}">
+                <a16:creationId xmlns:a16="http://schemas.microsoft.com/office/drawing/2014/main" id="{E9F13985-00B4-3FE2-69FB-BA5F88420137}"/>
+              </a:ext>
+            </a:extLst>
+          </p:cNvPr>
+          <p:cNvPicPr>
+            <a:picLocks noChangeAspect="1"/>
+          </p:cNvPicPr>
+          <p:nvPr/>
+        </p:nvPicPr>
+        <p:blipFill>
+          <a:blip r:embed="rId5"/>
+          <a:stretch>
+            <a:fillRect/>
+          </a:stretch>
+        </p:blipFill>
+        <p:spPr>
+          <a:xfrm>
+            <a:off x="5292164" y="228650"/>
+            <a:ext cx="1607366" cy="783591"/>
+          </a:xfrm>
+          <a:prstGeom prst="rect">
+            <a:avLst/>
+          </a:prstGeom>
+        </p:spPr>
+      </p:pic>
+      <p:sp>
+        <p:nvSpPr>
+          <p:cNvPr id="22" name="Shape 1">
+            <a:extLst>
+              <a:ext uri="{FF2B5EF4-FFF2-40B4-BE49-F238E27FC236}">
+                <a16:creationId xmlns:a16="http://schemas.microsoft.com/office/drawing/2014/main" id="{8B3789FB-4EC6-29BB-8AB4-B514BCE88A9C}"/>
+              </a:ext>
+            </a:extLst>
+          </p:cNvPr>
+          <p:cNvSpPr/>
+          <p:nvPr/>
+        </p:nvSpPr>
+        <p:spPr>
+          <a:xfrm>
+            <a:off x="571500" y="266294"/>
+            <a:ext cx="11048695" cy="857707"/>
+          </a:xfrm>
+          <a:prstGeom prst="roundRect">
+            <a:avLst>
+              <a:gd name="adj" fmla="val 9476"/>
+            </a:avLst>
+          </a:prstGeom>
+          <a:solidFill>
+            <a:srgbClr val="FFFFFF">
+              <a:alpha val="95000"/>
+            </a:srgbClr>
+          </a:solidFill>
+          <a:ln/>
+          <a:effectLst>
+            <a:outerShdw blurRad="63500" dist="38100" dir="5400000" algn="bl" rotWithShape="0">
+              <a:srgbClr val="000000">
+                <a:alpha val="10000"/>
+              </a:srgbClr>
+            </a:outerShdw>
+          </a:effectLst>
+        </p:spPr>
+        <p:txBody>
+          <a:bodyPr/>
+          <a:lstStyle/>
+          <a:p>
+            <a:endParaRPr lang="en-IN"/>
+          </a:p>
+        </p:txBody>
+      </p:sp>
+      <p:pic>
+        <p:nvPicPr>
+          <p:cNvPr id="5" name="Picture 4">
+            <a:extLst>
+              <a:ext uri="{FF2B5EF4-FFF2-40B4-BE49-F238E27FC236}">
+                <a16:creationId xmlns:a16="http://schemas.microsoft.com/office/drawing/2014/main" id="{AFA5626A-1768-0BB6-2B3B-C29607998D96}"/>
+              </a:ext>
+            </a:extLst>
+          </p:cNvPr>
+          <p:cNvPicPr>
+            <a:picLocks noChangeAspect="1"/>
+          </p:cNvPicPr>
+          <p:nvPr/>
+        </p:nvPicPr>
+        <p:blipFill>
+          <a:blip r:embed="rId6">
+            <a:extLst>
+              <a:ext uri="{28A0092B-C50C-407E-A947-70E740481C1C}">
+                <a14:useLocalDpi xmlns:a14="http://schemas.microsoft.com/office/drawing/2010/main" val="0"/>
+              </a:ext>
+            </a:extLst>
+          </a:blip>
+          <a:stretch>
+            <a:fillRect/>
+          </a:stretch>
+        </p:blipFill>
+        <p:spPr>
+          <a:xfrm>
+            <a:off x="1533449" y="416814"/>
+            <a:ext cx="9163491" cy="586435"/>
+          </a:xfrm>
+          <a:prstGeom prst="rect">
+            <a:avLst/>
+          </a:prstGeom>
+        </p:spPr>
+      </p:pic>
+    </p:spTree>
+  </p:cSld>
+  <p:clrMapOvr>
+    <a:masterClrMapping/>
+  </p:clrMapOvr>
+</p:sld>
+</file>
+
+<file path=ppt/slides/slide3.xml><?xml version="1.0" encoding="utf-8"?>
+<p:sld xmlns:a="http://schemas.openxmlformats.org/drawingml/2006/main" xmlns:r="http://schemas.openxmlformats.org/officeDocument/2006/relationships" xmlns:p="http://schemas.openxmlformats.org/presentationml/2006/main">
+  <p:cSld name="Slide 4">
+    <p:spTree>
+      <p:nvGrpSpPr>
+        <p:cNvPr id="1" name=""/>
+        <p:cNvGrpSpPr/>
+        <p:nvPr/>
+      </p:nvGrpSpPr>
+      <p:grpSpPr>
+        <a:xfrm>
+          <a:off x="0" y="0"/>
+          <a:ext cx="0" cy="0"/>
+          <a:chOff x="0" y="0"/>
+          <a:chExt cx="0" cy="0"/>
+        </a:xfrm>
+      </p:grpSpPr>
+      <p:sp>
+        <p:nvSpPr>
+          <p:cNvPr id="2" name="Shape 0"/>
+          <p:cNvSpPr/>
+          <p:nvPr/>
+        </p:nvSpPr>
+        <p:spPr>
+          <a:xfrm>
+            <a:off x="0" y="0"/>
+            <a:ext cx="12191695" cy="6858000"/>
+          </a:xfrm>
+          <a:prstGeom prst="rect">
+            <a:avLst/>
+          </a:prstGeom>
+          <a:solidFill>
+            <a:srgbClr val="000036"/>
+          </a:solidFill>
+          <a:ln/>
+        </p:spPr>
+        <p:txBody>
+          <a:bodyPr/>
+          <a:lstStyle/>
+          <a:p>
+            <a:endParaRPr lang="en-IN"/>
+          </a:p>
+        </p:txBody>
+      </p:sp>
+      <p:pic>
+        <p:nvPicPr>
+          <p:cNvPr id="3" name="Image 0" descr="preencoded.png"/>
+          <p:cNvPicPr>
+            <a:picLocks noChangeAspect="1"/>
+          </p:cNvPicPr>
+          <p:nvPr/>
+        </p:nvPicPr>
+        <p:blipFill>
+          <a:blip r:embed="rId3">
+            <a:alphaModFix amt="10000"/>
+          </a:blip>
+          <a:srcRect l="12327" r="12327"/>
+          <a:stretch/>
+        </p:blipFill>
+        <p:spPr>
+          <a:xfrm>
+            <a:off x="0" y="0"/>
+            <a:ext cx="12191695" cy="6858000"/>
+          </a:xfrm>
+          <a:prstGeom prst="rect">
+            <a:avLst/>
+          </a:prstGeom>
+        </p:spPr>
+      </p:pic>
+      <p:sp>
+        <p:nvSpPr>
+          <p:cNvPr id="4" name="Shape 1"/>
+          <p:cNvSpPr/>
+          <p:nvPr/>
+        </p:nvSpPr>
+        <p:spPr>
+          <a:xfrm>
+            <a:off x="571500" y="286207"/>
+            <a:ext cx="11048695" cy="666598"/>
+          </a:xfrm>
+          <a:prstGeom prst="roundRect">
+            <a:avLst>
+              <a:gd name="adj" fmla="val 15677"/>
+            </a:avLst>
+          </a:prstGeom>
+          <a:solidFill>
+            <a:srgbClr val="FFFFFF">
+              <a:alpha val="95000"/>
+            </a:srgbClr>
+          </a:solidFill>
+          <a:ln/>
+          <a:effectLst>
+            <a:outerShdw blurRad="63500" dist="38100" dir="5400000" algn="bl" rotWithShape="0">
+              <a:srgbClr val="000000">
+                <a:alpha val="10000"/>
+              </a:srgbClr>
+            </a:outerShdw>
+          </a:effectLst>
+        </p:spPr>
+        <p:txBody>
+          <a:bodyPr/>
+          <a:lstStyle/>
+          <a:p>
+            <a:endParaRPr lang="en-IN"/>
+          </a:p>
+        </p:txBody>
+      </p:sp>
+      <p:sp>
+        <p:nvSpPr>
+          <p:cNvPr id="7" name="Shape 2"/>
+          <p:cNvSpPr/>
+          <p:nvPr/>
+        </p:nvSpPr>
+        <p:spPr>
+          <a:xfrm>
+            <a:off x="571500" y="1333195"/>
+            <a:ext cx="75895" cy="409651"/>
+          </a:xfrm>
+          <a:prstGeom prst="rect">
+            <a:avLst/>
+          </a:prstGeom>
+          <a:solidFill>
+            <a:srgbClr val="88E555"/>
+          </a:solidFill>
+          <a:ln/>
+        </p:spPr>
+        <p:txBody>
+          <a:bodyPr/>
+          <a:lstStyle/>
+          <a:p>
+            <a:endParaRPr lang="en-IN"/>
+          </a:p>
+        </p:txBody>
+      </p:sp>
+      <p:sp>
+        <p:nvSpPr>
+          <p:cNvPr id="8" name="Text 3"/>
+          <p:cNvSpPr txBox="1"/>
+          <p:nvPr/>
+        </p:nvSpPr>
+        <p:spPr>
+          <a:xfrm>
+            <a:off x="838504" y="1295705"/>
+            <a:ext cx="10682936" cy="467258"/>
+          </a:xfrm>
+          <a:prstGeom prst="rect">
+            <a:avLst/>
+          </a:prstGeom>
+          <a:noFill/>
+          <a:ln/>
+        </p:spPr>
+        <p:txBody>
+          <a:bodyPr wrap="square" lIns="0" tIns="0" rIns="0" bIns="0" rtlCol="0" anchor="ctr"/>
+          <a:lstStyle/>
+          <a:p>
+            <a:r>
+              <a:rPr lang="en-US" sz="2600" b="1" dirty="0">
+                <a:solidFill>
+                  <a:srgbClr val="FFFFFF"/>
+                </a:solidFill>
+                <a:latin typeface="Poppins" pitchFamily="34" charset="0"/>
+                <a:ea typeface="Poppins" pitchFamily="34" charset="-122"/>
+                <a:cs typeface="Poppins" pitchFamily="34" charset="-120"/>
+              </a:rPr>
+              <a:t>Idea Description</a:t>
+            </a:r>
+            <a:endParaRPr lang="en-US" sz="2600" dirty="0">
+              <a:latin typeface="Poppins" panose="00000500000000000000" pitchFamily="2" charset="0"/>
+              <a:cs typeface="Poppins" panose="00000500000000000000" pitchFamily="2" charset="0"/>
+            </a:endParaRPr>
+          </a:p>
+        </p:txBody>
+      </p:sp>
+      <p:sp>
+        <p:nvSpPr>
+          <p:cNvPr id="9" name="Shape 4"/>
+          <p:cNvSpPr/>
+          <p:nvPr/>
+        </p:nvSpPr>
+        <p:spPr>
+          <a:xfrm>
+            <a:off x="571500" y="2021738"/>
+            <a:ext cx="11048695" cy="4552798"/>
+          </a:xfrm>
+          <a:prstGeom prst="roundRect">
+            <a:avLst>
+              <a:gd name="adj" fmla="val 672"/>
+            </a:avLst>
+          </a:prstGeom>
+          <a:solidFill>
+            <a:srgbClr val="FFFFFF">
+              <a:alpha val="5000"/>
+            </a:srgbClr>
+          </a:solidFill>
+          <a:ln w="12700">
+            <a:solidFill>
+              <a:srgbClr val="88E555">
+                <a:alpha val="30000"/>
+              </a:srgbClr>
+            </a:solidFill>
+            <a:prstDash val="solid"/>
+          </a:ln>
+        </p:spPr>
+        <p:txBody>
+          <a:bodyPr/>
+          <a:lstStyle/>
+          <a:p>
+            <a:endParaRPr lang="en-IN"/>
+          </a:p>
+        </p:txBody>
+      </p:sp>
+      <p:sp>
+        <p:nvSpPr>
+          <p:cNvPr id="10" name="Shape 5"/>
+          <p:cNvSpPr/>
+          <p:nvPr/>
+        </p:nvSpPr>
+        <p:spPr>
+          <a:xfrm>
+            <a:off x="571500" y="2021738"/>
+            <a:ext cx="190195" cy="190195"/>
+          </a:xfrm>
+          <a:prstGeom prst="roundRect">
+            <a:avLst>
+              <a:gd name="adj" fmla="val 192308"/>
+            </a:avLst>
+          </a:prstGeom>
+          <a:noFill/>
+          <a:ln w="38100">
+            <a:solidFill>
+              <a:srgbClr val="88E555"/>
+            </a:solidFill>
+            <a:prstDash val="solid"/>
+          </a:ln>
+        </p:spPr>
+        <p:txBody>
+          <a:bodyPr/>
+          <a:lstStyle/>
+          <a:p>
+            <a:endParaRPr lang="en-IN"/>
+          </a:p>
+        </p:txBody>
+      </p:sp>
+      <p:sp>
+        <p:nvSpPr>
+          <p:cNvPr id="11" name="Shape 6"/>
+          <p:cNvSpPr/>
+          <p:nvPr/>
+        </p:nvSpPr>
+        <p:spPr>
+          <a:xfrm>
+            <a:off x="11430000" y="2021738"/>
+            <a:ext cx="190195" cy="190195"/>
+          </a:xfrm>
+          <a:prstGeom prst="rect">
+            <a:avLst/>
+          </a:prstGeom>
+          <a:noFill/>
+          <a:ln w="38100">
+            <a:solidFill>
+              <a:srgbClr val="88E555"/>
+            </a:solidFill>
+            <a:prstDash val="solid"/>
+          </a:ln>
+        </p:spPr>
+        <p:txBody>
+          <a:bodyPr/>
+          <a:lstStyle/>
+          <a:p>
+            <a:endParaRPr lang="en-IN"/>
+          </a:p>
+        </p:txBody>
+      </p:sp>
+      <p:sp>
+        <p:nvSpPr>
+          <p:cNvPr id="12" name="Shape 7"/>
+          <p:cNvSpPr/>
+          <p:nvPr/>
+        </p:nvSpPr>
+        <p:spPr>
+          <a:xfrm>
+            <a:off x="571500" y="6381598"/>
+            <a:ext cx="190195" cy="190195"/>
+          </a:xfrm>
+          <a:prstGeom prst="rect">
+            <a:avLst/>
+          </a:prstGeom>
+          <a:noFill/>
+          <a:ln w="38100">
+            <a:solidFill>
+              <a:srgbClr val="88E555"/>
+            </a:solidFill>
+            <a:prstDash val="solid"/>
+          </a:ln>
+        </p:spPr>
+        <p:txBody>
+          <a:bodyPr/>
+          <a:lstStyle/>
+          <a:p>
+            <a:endParaRPr lang="en-IN"/>
+          </a:p>
+        </p:txBody>
+      </p:sp>
+      <p:sp>
+        <p:nvSpPr>
+          <p:cNvPr id="13" name="Shape 8"/>
+          <p:cNvSpPr/>
+          <p:nvPr/>
+        </p:nvSpPr>
+        <p:spPr>
+          <a:xfrm>
+            <a:off x="11430000" y="6381598"/>
+            <a:ext cx="190195" cy="190195"/>
+          </a:xfrm>
+          <a:prstGeom prst="rect">
+            <a:avLst/>
+          </a:prstGeom>
+          <a:noFill/>
+          <a:ln w="38100">
+            <a:solidFill>
+              <a:srgbClr val="88E555"/>
+            </a:solidFill>
+            <a:prstDash val="solid"/>
+          </a:ln>
+        </p:spPr>
+        <p:txBody>
+          <a:bodyPr/>
+          <a:lstStyle/>
+          <a:p>
+            <a:endParaRPr lang="en-IN"/>
+          </a:p>
+        </p:txBody>
+      </p:sp>
+      <p:sp>
+        <p:nvSpPr>
+          <p:cNvPr id="14" name="Shape 9"/>
+          <p:cNvSpPr/>
+          <p:nvPr/>
+        </p:nvSpPr>
+        <p:spPr>
+          <a:xfrm>
+            <a:off x="961949" y="2412187"/>
+            <a:ext cx="571500" cy="571500"/>
+          </a:xfrm>
+          <a:prstGeom prst="ellipse">
+            <a:avLst/>
+          </a:prstGeom>
+          <a:solidFill>
+            <a:srgbClr val="273383">
+              <a:alpha val="50000"/>
+            </a:srgbClr>
+          </a:solidFill>
+          <a:ln w="25400">
+            <a:solidFill>
+              <a:srgbClr val="AEFF82"/>
+            </a:solidFill>
+            <a:prstDash val="solid"/>
+          </a:ln>
+        </p:spPr>
+        <p:txBody>
+          <a:bodyPr/>
+          <a:lstStyle/>
+          <a:p>
+            <a:endParaRPr lang="en-IN"/>
+          </a:p>
+        </p:txBody>
+      </p:sp>
+      <p:pic>
+        <p:nvPicPr>
+          <p:cNvPr id="15" name="Image 3" descr="preencoded.png"/>
+          <p:cNvPicPr>
+            <a:picLocks noChangeAspect="1"/>
+          </p:cNvPicPr>
+          <p:nvPr/>
+        </p:nvPicPr>
+        <p:blipFill>
+          <a:blip r:embed="rId4"/>
+          <a:srcRect l="-133" r="-133"/>
+          <a:stretch/>
+        </p:blipFill>
+        <p:spPr>
+          <a:xfrm>
+            <a:off x="1162202" y="2583180"/>
+            <a:ext cx="171907" cy="228600"/>
+          </a:xfrm>
+          <a:prstGeom prst="rect">
+            <a:avLst/>
+          </a:prstGeom>
+        </p:spPr>
+      </p:pic>
+      <p:sp>
+        <p:nvSpPr>
+          <p:cNvPr id="16" name="Text 10"/>
+          <p:cNvSpPr txBox="1"/>
+          <p:nvPr/>
+        </p:nvSpPr>
+        <p:spPr>
+          <a:xfrm>
+            <a:off x="961949" y="3183941"/>
+            <a:ext cx="9813341" cy="629107"/>
+          </a:xfrm>
+          <a:prstGeom prst="rect">
+            <a:avLst/>
+          </a:prstGeom>
+          <a:noFill/>
+          <a:ln/>
+        </p:spPr>
+        <p:txBody>
+          <a:bodyPr wrap="square" lIns="0" tIns="0" rIns="0" bIns="0" rtlCol="0" anchor="ctr"/>
+          <a:lstStyle/>
+          <a:p>
+            <a:pPr marL="0" indent="0" algn="l">
+              <a:buNone/>
+            </a:pPr>
+            <a:r>
+              <a:rPr lang="en-US" sz="1600" dirty="0">
+                <a:solidFill>
+                  <a:srgbClr val="AEFF82">
+                    <a:alpha val="90000"/>
+                  </a:srgbClr>
+                </a:solidFill>
+                <a:latin typeface="Poppins" pitchFamily="34" charset="0"/>
+                <a:ea typeface="Poppins" pitchFamily="34" charset="-122"/>
+                <a:cs typeface="Poppins" pitchFamily="34" charset="-120"/>
+              </a:rPr>
+              <a:t>A classical, fully-reproducible localizer: search the scale x rotation space explicitly, score by normalised cross-correlation, and say so when the answer is not decisive.</a:t>
+            </a:r>
+            <a:endParaRPr lang="en-US" sz="1600" dirty="0"/>
+          </a:p>
+        </p:txBody>
+      </p:sp>
+      <p:sp>
+        <p:nvSpPr>
+          <p:cNvPr id="17" name="Shape 11"/>
+          <p:cNvSpPr/>
+          <p:nvPr/>
+        </p:nvSpPr>
+        <p:spPr>
+          <a:xfrm>
+            <a:off x="961949" y="4060850"/>
+            <a:ext cx="10267798" cy="1051560"/>
+          </a:xfrm>
+          <a:prstGeom prst="roundRect">
+            <a:avLst>
+              <a:gd name="adj" fmla="val 8693"/>
+            </a:avLst>
+          </a:prstGeom>
+          <a:solidFill>
+            <a:srgbClr val="1E3A8A">
+              <a:alpha val="40000"/>
+            </a:srgbClr>
+          </a:solidFill>
+          <a:ln w="12700">
+            <a:solidFill>
+              <a:srgbClr val="1D4ED8"/>
+            </a:solidFill>
+            <a:prstDash val="solid"/>
+          </a:ln>
+        </p:spPr>
+        <p:txBody>
+          <a:bodyPr/>
+          <a:lstStyle/>
+          <a:p>
+            <a:endParaRPr lang="en-IN"/>
+          </a:p>
+        </p:txBody>
+      </p:sp>
+      <p:sp>
+        <p:nvSpPr>
+          <p:cNvPr id="18" name="Text 12"/>
+          <p:cNvSpPr txBox="1"/>
+          <p:nvPr/>
+        </p:nvSpPr>
+        <p:spPr>
+          <a:xfrm>
+            <a:off x="1162202" y="4261104"/>
+            <a:ext cx="1996135" cy="191110"/>
+          </a:xfrm>
+          <a:prstGeom prst="rect">
+            <a:avLst/>
+          </a:prstGeom>
+          <a:noFill/>
+          <a:ln/>
+        </p:spPr>
+        <p:txBody>
+          <a:bodyPr wrap="square" lIns="0" tIns="0" rIns="0" bIns="0" rtlCol="0" anchor="ctr"/>
+          <a:lstStyle/>
+          <a:p>
+            <a:pPr marL="0" indent="0" algn="l">
+              <a:buNone/>
+            </a:pPr>
+            <a:r>
+              <a:rPr lang="en-US" sz="1000" b="1" dirty="0">
+                <a:solidFill>
+                  <a:srgbClr val="9CA3AF"/>
+                </a:solidFill>
+                <a:latin typeface="Poppins" pitchFamily="34" charset="0"/>
+                <a:ea typeface="Poppins" pitchFamily="34" charset="-122"/>
+                <a:cs typeface="Poppins" pitchFamily="34" charset="-120"/>
+              </a:rPr>
+              <a:t>KEY CONCEPT &amp; APPROACH</a:t>
+            </a:r>
+            <a:endParaRPr lang="en-US" sz="1000" dirty="0"/>
+          </a:p>
+        </p:txBody>
+      </p:sp>
+      <p:sp>
+        <p:nvSpPr>
+          <p:cNvPr id="19" name="Text 13"/>
+          <p:cNvSpPr txBox="1"/>
+          <p:nvPr/>
+        </p:nvSpPr>
+        <p:spPr>
+          <a:xfrm>
+            <a:off x="1162202" y="4528109"/>
+            <a:ext cx="7677302" cy="411480"/>
+          </a:xfrm>
+          <a:prstGeom prst="rect">
+            <a:avLst/>
+          </a:prstGeom>
+          <a:noFill/>
+          <a:ln/>
+        </p:spPr>
+        <p:txBody>
+          <a:bodyPr wrap="square" lIns="0" tIns="0" rIns="0" bIns="0" rtlCol="0" anchor="ctr"/>
+          <a:lstStyle/>
+          <a:p>
+            <a:pPr marL="0" indent="0" algn="l">
+              <a:lnSpc>
+                <a:spcPct val="115000"/>
+              </a:lnSpc>
+              <a:spcAft>
+                <a:spcPts val="0"/>
+              </a:spcAft>
+              <a:buNone/>
+            </a:pPr>
+            <a:r>
+              <a:rPr sz="1150">
+                <a:solidFill>
+                  <a:srgbClr val="FFFFFF"/>
+                </a:solidFill>
+                <a:latin typeface="Poppins"/>
+              </a:rPr>
+              <a:t>Classical multi-scale, multi-rotation template matching: search scale x rotation hypotheses, rank candidates by normalized cross-correlation, then refine to sub-pixel precision.</a:t>
+            </a:r>
+            <a:endParaRPr lang="en-US" sz="1200" dirty="0"/>
+          </a:p>
+        </p:txBody>
+      </p:sp>
+      <p:sp>
+        <p:nvSpPr>
+          <p:cNvPr id="20" name="Shape 14"/>
+          <p:cNvSpPr/>
+          <p:nvPr/>
+        </p:nvSpPr>
+        <p:spPr>
+          <a:xfrm>
+            <a:off x="961949" y="5257800"/>
+            <a:ext cx="10267798" cy="1188720"/>
+          </a:xfrm>
+          <a:prstGeom prst="roundRect">
+            <a:avLst>
+              <a:gd name="adj" fmla="val 8693"/>
+            </a:avLst>
+          </a:prstGeom>
+          <a:solidFill>
+            <a:srgbClr val="1E3A8A">
+              <a:alpha val="40000"/>
+            </a:srgbClr>
+          </a:solidFill>
+          <a:ln w="12700">
+            <a:solidFill>
+              <a:srgbClr val="1D4ED8"/>
+            </a:solidFill>
+            <a:prstDash val="solid"/>
+          </a:ln>
+        </p:spPr>
+        <p:txBody>
+          <a:bodyPr/>
+          <a:lstStyle/>
+          <a:p>
+            <a:endParaRPr lang="en-IN"/>
+          </a:p>
+        </p:txBody>
+      </p:sp>
+      <p:sp>
+        <p:nvSpPr>
+          <p:cNvPr id="21" name="Text 15"/>
+          <p:cNvSpPr txBox="1"/>
+          <p:nvPr/>
+        </p:nvSpPr>
+        <p:spPr>
+          <a:xfrm>
+            <a:off x="1162202" y="5458968"/>
+            <a:ext cx="1548079" cy="191110"/>
+          </a:xfrm>
+          <a:prstGeom prst="rect">
+            <a:avLst/>
+          </a:prstGeom>
+          <a:noFill/>
+          <a:ln/>
+        </p:spPr>
+        <p:txBody>
+          <a:bodyPr wrap="square" lIns="0" tIns="0" rIns="0" bIns="0" rtlCol="0" anchor="ctr"/>
+          <a:lstStyle/>
+          <a:p>
+            <a:pPr marL="0" indent="0" algn="l">
+              <a:buNone/>
+            </a:pPr>
+            <a:r>
+              <a:rPr lang="en-US" sz="1000" b="1" dirty="0">
+                <a:solidFill>
+                  <a:srgbClr val="9CA3AF"/>
+                </a:solidFill>
+                <a:latin typeface="Poppins" pitchFamily="34" charset="0"/>
+                <a:ea typeface="Poppins" pitchFamily="34" charset="-122"/>
+                <a:cs typeface="Poppins" pitchFamily="34" charset="-120"/>
+              </a:rPr>
+              <a:t>SOLUTION OVERVIEW</a:t>
+            </a:r>
+            <a:endParaRPr lang="en-US" sz="1000" dirty="0"/>
+          </a:p>
+        </p:txBody>
+      </p:sp>
+      <p:sp>
+        <p:nvSpPr>
+          <p:cNvPr id="22" name="Text 16"/>
+          <p:cNvSpPr txBox="1"/>
+          <p:nvPr/>
+        </p:nvSpPr>
+        <p:spPr>
+          <a:xfrm>
+            <a:off x="1162202" y="5724144"/>
+            <a:ext cx="8458200" cy="502920"/>
+          </a:xfrm>
+          <a:prstGeom prst="rect">
+            <a:avLst/>
+          </a:prstGeom>
+          <a:noFill/>
+          <a:ln/>
+        </p:spPr>
+        <p:txBody>
+          <a:bodyPr wrap="square" lIns="0" tIns="0" rIns="0" bIns="0" rtlCol="0" anchor="ctr"/>
+          <a:lstStyle/>
+          <a:p>
+            <a:pPr marL="0" indent="0" algn="l">
+              <a:lnSpc>
+                <a:spcPct val="115000"/>
+              </a:lnSpc>
+              <a:spcAft>
+                <a:spcPts val="0"/>
+              </a:spcAft>
+              <a:buNone/>
+            </a:pPr>
+            <a:r>
+              <a:rPr sz="1150">
+                <a:solidFill>
+                  <a:srgbClr val="FFFFFF"/>
+                </a:solidFill>
+                <a:latin typeface="Poppins"/>
+              </a:rPr>
+              <a:t>Paired with DriftSense's own synthetic DRAM mat/strip generator (realistic macro-structure + SEM degradations), so the pipeline is built and evaluated against data that mirrors real repetitive-pattern ambiguity.</a:t>
+            </a:r>
+            <a:endParaRPr lang="en-US" sz="1200" dirty="0"/>
+          </a:p>
+        </p:txBody>
+      </p:sp>
+      <p:pic>
+        <p:nvPicPr>
+          <p:cNvPr id="23" name="Picture 22">
+            <a:extLst>
+              <a:ext uri="{FF2B5EF4-FFF2-40B4-BE49-F238E27FC236}">
+                <a16:creationId xmlns:a16="http://schemas.microsoft.com/office/drawing/2014/main" id="{C033FF08-6369-1C95-EB39-A51D568DF008}"/>
+              </a:ext>
+            </a:extLst>
+          </p:cNvPr>
+          <p:cNvPicPr>
+            <a:picLocks noChangeAspect="1"/>
+          </p:cNvPicPr>
+          <p:nvPr/>
+        </p:nvPicPr>
+        <p:blipFill>
+          <a:blip r:embed="rId5"/>
+          <a:stretch>
+            <a:fillRect/>
+          </a:stretch>
+        </p:blipFill>
+        <p:spPr>
+          <a:xfrm>
+            <a:off x="5292164" y="228650"/>
+            <a:ext cx="1607366" cy="783591"/>
+          </a:xfrm>
+          <a:prstGeom prst="rect">
+            <a:avLst/>
+          </a:prstGeom>
+        </p:spPr>
+      </p:pic>
+      <p:sp>
+        <p:nvSpPr>
+          <p:cNvPr id="25" name="Shape 1">
+            <a:extLst>
+              <a:ext uri="{FF2B5EF4-FFF2-40B4-BE49-F238E27FC236}">
+                <a16:creationId xmlns:a16="http://schemas.microsoft.com/office/drawing/2014/main" id="{82B7216B-04F1-E2CC-935F-9AA2CE5B9E43}"/>
+              </a:ext>
+            </a:extLst>
+          </p:cNvPr>
+          <p:cNvSpPr/>
+          <p:nvPr/>
+        </p:nvSpPr>
+        <p:spPr>
+          <a:xfrm>
+            <a:off x="571500" y="209602"/>
+            <a:ext cx="11048695" cy="857707"/>
+          </a:xfrm>
+          <a:prstGeom prst="roundRect">
+            <a:avLst>
+              <a:gd name="adj" fmla="val 9476"/>
+            </a:avLst>
+          </a:prstGeom>
+          <a:solidFill>
+            <a:srgbClr val="FFFFFF">
+              <a:alpha val="95000"/>
+            </a:srgbClr>
+          </a:solidFill>
+          <a:ln/>
+          <a:effectLst>
+            <a:outerShdw blurRad="63500" dist="38100" dir="5400000" algn="bl" rotWithShape="0">
+              <a:srgbClr val="000000">
+                <a:alpha val="10000"/>
+              </a:srgbClr>
+            </a:outerShdw>
+          </a:effectLst>
+        </p:spPr>
+        <p:txBody>
+          <a:bodyPr/>
+          <a:lstStyle/>
+          <a:p>
+            <a:endParaRPr lang="en-IN"/>
+          </a:p>
+        </p:txBody>
+      </p:sp>
+      <p:pic>
+        <p:nvPicPr>
+          <p:cNvPr id="26" name="Picture 25">
+            <a:extLst>
+              <a:ext uri="{FF2B5EF4-FFF2-40B4-BE49-F238E27FC236}">
+                <a16:creationId xmlns:a16="http://schemas.microsoft.com/office/drawing/2014/main" id="{7743FE56-9400-E309-F93C-96E3C8B4AF82}"/>
+              </a:ext>
+            </a:extLst>
+          </p:cNvPr>
+          <p:cNvPicPr>
+            <a:picLocks noChangeAspect="1"/>
+          </p:cNvPicPr>
+          <p:nvPr/>
+        </p:nvPicPr>
+        <p:blipFill>
+          <a:blip r:embed="rId6">
+            <a:extLst>
+              <a:ext uri="{28A0092B-C50C-407E-A947-70E740481C1C}">
+                <a14:useLocalDpi xmlns:a14="http://schemas.microsoft.com/office/drawing/2010/main" val="0"/>
+              </a:ext>
+            </a:extLst>
+          </a:blip>
+          <a:stretch>
+            <a:fillRect/>
+          </a:stretch>
+        </p:blipFill>
+        <p:spPr>
+          <a:xfrm>
+            <a:off x="1501375" y="329389"/>
+            <a:ext cx="9163491" cy="586435"/>
+          </a:xfrm>
+          <a:prstGeom prst="rect">
+            <a:avLst/>
+          </a:prstGeom>
+        </p:spPr>
+      </p:pic>
+    </p:spTree>
+  </p:cSld>
+  <p:clrMapOvr>
+    <a:masterClrMapping/>
+  </p:clrMapOvr>
+</p:sld>
+</file>
+
+<file path=ppt/slides/slide4.xml><?xml version="1.0" encoding="utf-8"?>
+<p:sld xmlns:a="http://schemas.openxmlformats.org/drawingml/2006/main" xmlns:r="http://schemas.openxmlformats.org/officeDocument/2006/relationships" xmlns:p="http://schemas.openxmlformats.org/presentationml/2006/main">
+  <p:cSld name="Slide 5">
+    <p:spTree>
+      <p:nvGrpSpPr>
+        <p:cNvPr id="1" name=""/>
+        <p:cNvGrpSpPr/>
+        <p:nvPr/>
+      </p:nvGrpSpPr>
+      <p:grpSpPr>
+        <a:xfrm>
+          <a:off x="0" y="0"/>
+          <a:ext cx="0" cy="0"/>
+          <a:chOff x="0" y="0"/>
+          <a:chExt cx="0" cy="0"/>
+        </a:xfrm>
+      </p:grpSpPr>
+      <p:sp>
+        <p:nvSpPr>
+          <p:cNvPr id="2" name="Shape 0"/>
+          <p:cNvSpPr/>
+          <p:nvPr/>
+        </p:nvSpPr>
+        <p:spPr>
+          <a:xfrm>
+            <a:off x="0" y="0"/>
+            <a:ext cx="12191695" cy="6858000"/>
+          </a:xfrm>
+          <a:prstGeom prst="rect">
+            <a:avLst/>
+          </a:prstGeom>
+          <a:solidFill>
+            <a:srgbClr val="000036"/>
+          </a:solidFill>
+          <a:ln/>
+        </p:spPr>
+        <p:txBody>
+          <a:bodyPr/>
+          <a:lstStyle/>
+          <a:p>
+            <a:endParaRPr lang="en-IN"/>
+          </a:p>
+        </p:txBody>
+      </p:sp>
+      <p:pic>
+        <p:nvPicPr>
+          <p:cNvPr id="3" name="Image 0" descr="preencoded.png"/>
+          <p:cNvPicPr>
+            <a:picLocks noChangeAspect="1"/>
+          </p:cNvPicPr>
+          <p:nvPr/>
+        </p:nvPicPr>
+        <p:blipFill>
+          <a:blip r:embed="rId3">
+            <a:alphaModFix amt="10000"/>
+          </a:blip>
+          <a:srcRect l="12327" r="12327"/>
+          <a:stretch/>
+        </p:blipFill>
+        <p:spPr>
+          <a:xfrm>
+            <a:off x="0" y="0"/>
+            <a:ext cx="12191695" cy="6858000"/>
+          </a:xfrm>
+          <a:prstGeom prst="rect">
+            <a:avLst/>
+          </a:prstGeom>
+        </p:spPr>
+      </p:pic>
+      <p:sp>
+        <p:nvSpPr>
+          <p:cNvPr id="4" name="Shape 1"/>
+          <p:cNvSpPr/>
+          <p:nvPr/>
+        </p:nvSpPr>
+        <p:spPr>
+          <a:xfrm>
+            <a:off x="571500" y="286207"/>
+            <a:ext cx="11048695" cy="666598"/>
+          </a:xfrm>
+          <a:prstGeom prst="roundRect">
+            <a:avLst>
+              <a:gd name="adj" fmla="val 15677"/>
+            </a:avLst>
+          </a:prstGeom>
+          <a:solidFill>
+            <a:srgbClr val="FFFFFF">
+              <a:alpha val="95000"/>
+            </a:srgbClr>
+          </a:solidFill>
+          <a:ln/>
+          <a:effectLst>
+            <a:outerShdw blurRad="63500" dist="38100" dir="5400000" algn="bl" rotWithShape="0">
+              <a:srgbClr val="000000">
+                <a:alpha val="10000"/>
+              </a:srgbClr>
+            </a:outerShdw>
+          </a:effectLst>
+        </p:spPr>
+        <p:txBody>
+          <a:bodyPr/>
+          <a:lstStyle/>
+          <a:p>
+            <a:endParaRPr lang="en-IN"/>
+          </a:p>
+        </p:txBody>
+      </p:sp>
+      <p:sp>
+        <p:nvSpPr>
+          <p:cNvPr id="7" name="Shape 2"/>
+          <p:cNvSpPr/>
+          <p:nvPr/>
+        </p:nvSpPr>
+        <p:spPr>
+          <a:xfrm>
+            <a:off x="571500" y="1333195"/>
+            <a:ext cx="75895" cy="409651"/>
+          </a:xfrm>
+          <a:prstGeom prst="rect">
+            <a:avLst/>
+          </a:prstGeom>
+          <a:solidFill>
+            <a:srgbClr val="88E555"/>
+          </a:solidFill>
+          <a:ln/>
+        </p:spPr>
+        <p:txBody>
+          <a:bodyPr/>
+          <a:lstStyle/>
+          <a:p>
+            <a:endParaRPr lang="en-IN"/>
+          </a:p>
+        </p:txBody>
+      </p:sp>
+      <p:sp>
+        <p:nvSpPr>
+          <p:cNvPr id="8" name="Text 3"/>
+          <p:cNvSpPr txBox="1"/>
+          <p:nvPr/>
+        </p:nvSpPr>
+        <p:spPr>
+          <a:xfrm>
+            <a:off x="838505" y="1295705"/>
+            <a:ext cx="10296144" cy="467258"/>
+          </a:xfrm>
+          <a:prstGeom prst="rect">
+            <a:avLst/>
+          </a:prstGeom>
+          <a:noFill/>
+          <a:ln/>
+        </p:spPr>
+        <p:txBody>
+          <a:bodyPr wrap="square" lIns="0" tIns="0" rIns="0" bIns="0" rtlCol="0" anchor="ctr"/>
+          <a:lstStyle/>
+          <a:p>
+            <a:r>
+              <a:rPr lang="en-US" sz="2600" b="1" dirty="0">
+                <a:solidFill>
+                  <a:srgbClr val="FFFFFF"/>
+                </a:solidFill>
+                <a:latin typeface="Poppins" pitchFamily="34" charset="0"/>
+                <a:ea typeface="Poppins" pitchFamily="34" charset="-122"/>
+                <a:cs typeface="Poppins" pitchFamily="34" charset="-120"/>
+              </a:rPr>
+              <a:t>Proposed Solution</a:t>
+            </a:r>
+            <a:endParaRPr lang="en-US" sz="2600" dirty="0"/>
+          </a:p>
+        </p:txBody>
+      </p:sp>
+      <p:sp>
+        <p:nvSpPr>
+          <p:cNvPr id="9" name="Shape 4"/>
+          <p:cNvSpPr/>
+          <p:nvPr/>
+        </p:nvSpPr>
+        <p:spPr>
+          <a:xfrm>
+            <a:off x="571500" y="2021738"/>
+            <a:ext cx="11048695" cy="4552798"/>
+          </a:xfrm>
+          <a:prstGeom prst="roundRect">
+            <a:avLst>
+              <a:gd name="adj" fmla="val 672"/>
+            </a:avLst>
+          </a:prstGeom>
+          <a:solidFill>
+            <a:srgbClr val="FFFFFF">
+              <a:alpha val="5000"/>
+            </a:srgbClr>
+          </a:solidFill>
+          <a:ln w="12700">
+            <a:solidFill>
+              <a:srgbClr val="88E555">
+                <a:alpha val="30000"/>
+              </a:srgbClr>
+            </a:solidFill>
+            <a:prstDash val="solid"/>
+          </a:ln>
+        </p:spPr>
+        <p:txBody>
+          <a:bodyPr/>
+          <a:lstStyle/>
+          <a:p>
+            <a:endParaRPr lang="en-IN"/>
+          </a:p>
+        </p:txBody>
+      </p:sp>
+      <p:sp>
+        <p:nvSpPr>
+          <p:cNvPr id="10" name="Shape 5"/>
+          <p:cNvSpPr/>
+          <p:nvPr/>
+        </p:nvSpPr>
+        <p:spPr>
+          <a:xfrm>
+            <a:off x="571500" y="2021738"/>
+            <a:ext cx="190195" cy="190195"/>
+          </a:xfrm>
+          <a:prstGeom prst="roundRect">
+            <a:avLst>
+              <a:gd name="adj" fmla="val 192308"/>
+            </a:avLst>
+          </a:prstGeom>
+          <a:noFill/>
+          <a:ln w="38100">
+            <a:solidFill>
+              <a:srgbClr val="88E555"/>
+            </a:solidFill>
+            <a:prstDash val="solid"/>
+          </a:ln>
+        </p:spPr>
+        <p:txBody>
+          <a:bodyPr/>
+          <a:lstStyle/>
+          <a:p>
+            <a:endParaRPr lang="en-IN"/>
+          </a:p>
+        </p:txBody>
+      </p:sp>
+      <p:sp>
+        <p:nvSpPr>
+          <p:cNvPr id="11" name="Shape 6"/>
+          <p:cNvSpPr/>
+          <p:nvPr/>
+        </p:nvSpPr>
+        <p:spPr>
+          <a:xfrm>
+            <a:off x="11430000" y="2021738"/>
+            <a:ext cx="190195" cy="190195"/>
+          </a:xfrm>
+          <a:prstGeom prst="rect">
+            <a:avLst/>
+          </a:prstGeom>
+          <a:noFill/>
+          <a:ln w="38100">
+            <a:solidFill>
+              <a:srgbClr val="88E555"/>
+            </a:solidFill>
+            <a:prstDash val="solid"/>
+          </a:ln>
+        </p:spPr>
+        <p:txBody>
+          <a:bodyPr/>
+          <a:lstStyle/>
+          <a:p>
+            <a:endParaRPr lang="en-IN"/>
+          </a:p>
+        </p:txBody>
+      </p:sp>
+      <p:sp>
+        <p:nvSpPr>
+          <p:cNvPr id="12" name="Shape 7"/>
+          <p:cNvSpPr/>
+          <p:nvPr/>
+        </p:nvSpPr>
+        <p:spPr>
+          <a:xfrm>
+            <a:off x="571500" y="6381598"/>
+            <a:ext cx="190195" cy="190195"/>
+          </a:xfrm>
+          <a:prstGeom prst="rect">
+            <a:avLst/>
+          </a:prstGeom>
+          <a:noFill/>
+          <a:ln w="38100">
+            <a:solidFill>
+              <a:srgbClr val="88E555"/>
+            </a:solidFill>
+            <a:prstDash val="solid"/>
+          </a:ln>
+        </p:spPr>
+        <p:txBody>
+          <a:bodyPr/>
+          <a:lstStyle/>
+          <a:p>
+            <a:endParaRPr lang="en-IN"/>
+          </a:p>
+        </p:txBody>
+      </p:sp>
+      <p:sp>
+        <p:nvSpPr>
+          <p:cNvPr id="13" name="Shape 8"/>
+          <p:cNvSpPr/>
+          <p:nvPr/>
+        </p:nvSpPr>
+        <p:spPr>
+          <a:xfrm>
+            <a:off x="11430000" y="6381598"/>
+            <a:ext cx="190195" cy="190195"/>
+          </a:xfrm>
+          <a:prstGeom prst="rect">
+            <a:avLst/>
+          </a:prstGeom>
+          <a:noFill/>
+          <a:ln w="38100">
+            <a:solidFill>
+              <a:srgbClr val="88E555"/>
+            </a:solidFill>
+            <a:prstDash val="solid"/>
+          </a:ln>
+        </p:spPr>
+        <p:txBody>
+          <a:bodyPr/>
+          <a:lstStyle/>
+          <a:p>
+            <a:endParaRPr lang="en-IN"/>
+          </a:p>
+        </p:txBody>
+      </p:sp>
+      <p:sp>
+        <p:nvSpPr>
+          <p:cNvPr id="14" name="Shape 9"/>
+          <p:cNvSpPr/>
+          <p:nvPr/>
+        </p:nvSpPr>
+        <p:spPr>
+          <a:xfrm>
+            <a:off x="961949" y="2412187"/>
+            <a:ext cx="571500" cy="571500"/>
+          </a:xfrm>
+          <a:prstGeom prst="ellipse">
+            <a:avLst/>
+          </a:prstGeom>
+          <a:solidFill>
+            <a:srgbClr val="273383">
+              <a:alpha val="50000"/>
+            </a:srgbClr>
+          </a:solidFill>
+          <a:ln w="25400">
+            <a:solidFill>
+              <a:srgbClr val="AEFF82"/>
+            </a:solidFill>
+            <a:prstDash val="solid"/>
+          </a:ln>
+        </p:spPr>
+        <p:txBody>
+          <a:bodyPr/>
+          <a:lstStyle/>
+          <a:p>
+            <a:endParaRPr lang="en-IN"/>
+          </a:p>
+        </p:txBody>
+      </p:sp>
+      <p:pic>
+        <p:nvPicPr>
+          <p:cNvPr id="15" name="Image 3" descr="preencoded.png"/>
+          <p:cNvPicPr>
+            <a:picLocks noChangeAspect="1"/>
+          </p:cNvPicPr>
+          <p:nvPr/>
+        </p:nvPicPr>
+        <p:blipFill>
+          <a:blip r:embed="rId4"/>
+          <a:srcRect l="-80" r="-80"/>
+          <a:stretch/>
+        </p:blipFill>
+        <p:spPr>
+          <a:xfrm>
+            <a:off x="1104595" y="2583180"/>
+            <a:ext cx="286207" cy="228600"/>
+          </a:xfrm>
+          <a:prstGeom prst="rect">
+            <a:avLst/>
+          </a:prstGeom>
+        </p:spPr>
+      </p:pic>
+      <p:sp>
+        <p:nvSpPr>
+          <p:cNvPr id="16" name="Text 10"/>
+          <p:cNvSpPr txBox="1"/>
+          <p:nvPr/>
+        </p:nvSpPr>
+        <p:spPr>
+          <a:xfrm>
+            <a:off x="961949" y="3193085"/>
+            <a:ext cx="10172700" cy="685800"/>
+          </a:xfrm>
+          <a:prstGeom prst="rect">
+            <a:avLst/>
+          </a:prstGeom>
+          <a:noFill/>
+          <a:ln/>
+        </p:spPr>
+        <p:txBody>
+          <a:bodyPr wrap="square" lIns="0" tIns="0" rIns="0" bIns="0" rtlCol="0" anchor="ctr"/>
+          <a:lstStyle/>
+          <a:p>
+            <a:pPr marL="0" indent="0" algn="l">
+              <a:buNone/>
+            </a:pPr>
+            <a:r>
+              <a:rPr lang="en-US" sz="1800" dirty="0">
+                <a:solidFill>
+                  <a:srgbClr val="AEFF82">
+                    <a:alpha val="80000"/>
+                  </a:srgbClr>
+                </a:solidFill>
+                <a:latin typeface="Poppins" pitchFamily="34" charset="0"/>
+                <a:ea typeface="Poppins" pitchFamily="34" charset="-122"/>
+                <a:cs typeface="Poppins" pitchFamily="34" charset="-120"/>
+              </a:rPr>
+              <a:t>Two connected parts, both runnable from the repository root: a physically-grounded synthetic DRAM generator, and a deterministic classical localization pipeline.</a:t>
+            </a:r>
+            <a:endParaRPr lang="en-US" sz="1800" dirty="0"/>
+          </a:p>
+        </p:txBody>
+      </p:sp>
+      <p:sp>
+        <p:nvSpPr>
+          <p:cNvPr id="17" name="Shape 11"/>
+          <p:cNvSpPr/>
+          <p:nvPr/>
+        </p:nvSpPr>
+        <p:spPr>
+          <a:xfrm>
+            <a:off x="961949" y="4134002"/>
+            <a:ext cx="10267798" cy="2148840"/>
+          </a:xfrm>
+          <a:prstGeom prst="roundRect">
+            <a:avLst>
+              <a:gd name="adj" fmla="val 4277"/>
+            </a:avLst>
+          </a:prstGeom>
+          <a:solidFill>
+            <a:srgbClr val="1E3A8A">
+              <a:alpha val="40000"/>
+            </a:srgbClr>
+          </a:solidFill>
+          <a:ln w="12700">
+            <a:solidFill>
+              <a:srgbClr val="1D4ED8"/>
+            </a:solidFill>
+            <a:prstDash val="solid"/>
+          </a:ln>
+        </p:spPr>
+        <p:txBody>
+          <a:bodyPr/>
+          <a:lstStyle/>
+          <a:p>
+            <a:endParaRPr lang="en-IN"/>
+          </a:p>
+        </p:txBody>
+      </p:sp>
+      <p:sp>
+        <p:nvSpPr>
+          <p:cNvPr id="18" name="Text 12"/>
+          <p:cNvSpPr txBox="1"/>
+          <p:nvPr/>
+        </p:nvSpPr>
+        <p:spPr>
+          <a:xfrm>
+            <a:off x="1200607" y="4295851"/>
+            <a:ext cx="1367028" cy="191110"/>
+          </a:xfrm>
+          <a:prstGeom prst="rect">
+            <a:avLst/>
+          </a:prstGeom>
+          <a:noFill/>
+          <a:ln/>
+        </p:spPr>
+        <p:txBody>
+          <a:bodyPr wrap="square" lIns="0" tIns="0" rIns="0" bIns="0" rtlCol="0" anchor="ctr"/>
+          <a:lstStyle/>
+          <a:p>
+            <a:pPr marL="0" indent="0" algn="l">
+              <a:buNone/>
+            </a:pPr>
+            <a:r>
+              <a:rPr lang="en-US" sz="1000" b="1" dirty="0">
+                <a:solidFill>
+                  <a:srgbClr val="9CA3AF"/>
+                </a:solidFill>
+                <a:latin typeface="Poppins" pitchFamily="34" charset="0"/>
+                <a:ea typeface="Poppins" pitchFamily="34" charset="-122"/>
+                <a:cs typeface="Poppins" pitchFamily="34" charset="-120"/>
+              </a:rPr>
+              <a:t>SOLUTION DETAILS</a:t>
+            </a:r>
+            <a:endParaRPr lang="en-US" sz="1000" dirty="0"/>
+          </a:p>
+        </p:txBody>
+      </p:sp>
+      <p:sp>
+        <p:nvSpPr>
+          <p:cNvPr id="19" name="Text 13"/>
+          <p:cNvSpPr txBox="1"/>
+          <p:nvPr/>
+        </p:nvSpPr>
+        <p:spPr>
+          <a:xfrm>
+            <a:off x="1200607" y="4522699"/>
+            <a:ext cx="8996782" cy="1572768"/>
+          </a:xfrm>
+          <a:prstGeom prst="rect">
+            <a:avLst/>
+          </a:prstGeom>
+          <a:noFill/>
+          <a:ln/>
+        </p:spPr>
+        <p:txBody>
+          <a:bodyPr wrap="square" lIns="0" tIns="0" rIns="0" bIns="0" rtlCol="0" anchor="ctr"/>
+          <a:lstStyle/>
+          <a:p>
+            <a:pPr marL="0" indent="0" algn="l">
+              <a:lnSpc>
+                <a:spcPct val="115000"/>
+              </a:lnSpc>
+              <a:spcAft>
+                <a:spcPts val="400"/>
+              </a:spcAft>
+              <a:buNone/>
+            </a:pPr>
+            <a:r>
+              <a:rPr sz="1050" dirty="0">
+                <a:solidFill>
+                  <a:srgbClr val="FFFFFF"/>
+                </a:solidFill>
+                <a:latin typeface="Poppins"/>
+              </a:rPr>
+              <a:t>Pipeline: Reference → candidate generation (ZNCC over 99 scale × rotation hypotheses — 11 scales spanning the literal 9:1–11:1 range × 9 rotations across ±5°, built with both a sharp and a PSF-matched template) → </a:t>
+            </a:r>
+            <a:r>
+              <a:rPr sz="1050" dirty="0" err="1">
+                <a:solidFill>
+                  <a:srgbClr val="FFFFFF"/>
+                </a:solidFill>
+                <a:latin typeface="Poppins"/>
+              </a:rPr>
+              <a:t>dedup</a:t>
+            </a:r>
+            <a:r>
+              <a:rPr sz="1050" dirty="0">
+                <a:solidFill>
+                  <a:srgbClr val="FFFFFF"/>
+                </a:solidFill>
+                <a:latin typeface="Poppins"/>
+              </a:rPr>
+              <a:t> → ranking → sub-pixel refinement → (x, y) with a confidence and ambiguity score.</a:t>
+            </a:r>
+            <a:endParaRPr lang="en-US" sz="1300" dirty="0"/>
+          </a:p>
+          <a:p>
+            <a:pPr>
+              <a:lnSpc>
+                <a:spcPct val="115000"/>
+              </a:lnSpc>
+              <a:spcAft>
+                <a:spcPts val="400"/>
+              </a:spcAft>
+            </a:pPr>
+            <a:r>
+              <a:rPr sz="1050" dirty="0">
+                <a:solidFill>
+                  <a:srgbClr val="FFFFFF"/>
+                </a:solidFill>
+                <a:latin typeface="Poppins"/>
+              </a:rPr>
+              <a:t>Data generator: DRAM mats rendered independently, tiled with strip/routing regions on a shared canvas — real structural boundaries, not an injected marker, disambiguate repeats; SEM degradations layered on after.</a:t>
+            </a:r>
+          </a:p>
+          <a:p>
+            <a:pPr>
+              <a:lnSpc>
+                <a:spcPct val="115000"/>
+              </a:lnSpc>
+              <a:spcAft>
+                <a:spcPts val="0"/>
+              </a:spcAft>
+            </a:pPr>
+            <a:r>
+              <a:rPr sz="1050" dirty="0">
+                <a:solidFill>
+                  <a:srgbClr val="FFFFFF"/>
+                </a:solidFill>
+                <a:latin typeface="Poppins"/>
+              </a:rPr>
+              <a:t>The grid was densified (5→9 steps) and then widened to the literal 9:1–11:1 span; a PSF-matched dual-arm template and a recalibrated ambiguity threshold followed. Each shipped as a documented gate exception, logged with the criteria it did not clear.</a:t>
+            </a:r>
+          </a:p>
+        </p:txBody>
+      </p:sp>
+      <p:pic>
+        <p:nvPicPr>
+          <p:cNvPr id="20" name="Picture 19">
+            <a:extLst>
+              <a:ext uri="{FF2B5EF4-FFF2-40B4-BE49-F238E27FC236}">
+                <a16:creationId xmlns:a16="http://schemas.microsoft.com/office/drawing/2014/main" id="{667D8EB9-0510-8E20-AE50-3B9EC8704685}"/>
+              </a:ext>
+            </a:extLst>
+          </p:cNvPr>
+          <p:cNvPicPr>
+            <a:picLocks noChangeAspect="1"/>
+          </p:cNvPicPr>
+          <p:nvPr/>
+        </p:nvPicPr>
+        <p:blipFill>
+          <a:blip r:embed="rId5"/>
+          <a:stretch>
+            <a:fillRect/>
+          </a:stretch>
+        </p:blipFill>
+        <p:spPr>
+          <a:xfrm>
+            <a:off x="5292164" y="227710"/>
+            <a:ext cx="1607366" cy="783591"/>
+          </a:xfrm>
+          <a:prstGeom prst="rect">
+            <a:avLst/>
+          </a:prstGeom>
+        </p:spPr>
+      </p:pic>
+      <p:sp>
+        <p:nvSpPr>
+          <p:cNvPr id="22" name="Shape 1">
+            <a:extLst>
+              <a:ext uri="{FF2B5EF4-FFF2-40B4-BE49-F238E27FC236}">
+                <a16:creationId xmlns:a16="http://schemas.microsoft.com/office/drawing/2014/main" id="{50164B49-38DE-6195-0A8B-DC6EC6DA2457}"/>
+              </a:ext>
+            </a:extLst>
+          </p:cNvPr>
+          <p:cNvSpPr/>
+          <p:nvPr/>
+        </p:nvSpPr>
+        <p:spPr>
+          <a:xfrm>
+            <a:off x="571500" y="142799"/>
+            <a:ext cx="11048695" cy="857707"/>
+          </a:xfrm>
+          <a:prstGeom prst="roundRect">
+            <a:avLst>
+              <a:gd name="adj" fmla="val 9476"/>
+            </a:avLst>
+          </a:prstGeom>
+          <a:solidFill>
+            <a:srgbClr val="FFFFFF">
+              <a:alpha val="95000"/>
+            </a:srgbClr>
+          </a:solidFill>
+          <a:ln/>
+          <a:effectLst>
+            <a:outerShdw blurRad="63500" dist="38100" dir="5400000" algn="bl" rotWithShape="0">
+              <a:srgbClr val="000000">
+                <a:alpha val="10000"/>
+              </a:srgbClr>
+            </a:outerShdw>
+          </a:effectLst>
+        </p:spPr>
+        <p:txBody>
+          <a:bodyPr/>
+          <a:lstStyle/>
+          <a:p>
+            <a:endParaRPr lang="en-IN"/>
+          </a:p>
+        </p:txBody>
+      </p:sp>
+      <p:pic>
+        <p:nvPicPr>
+          <p:cNvPr id="23" name="Picture 22">
+            <a:extLst>
+              <a:ext uri="{FF2B5EF4-FFF2-40B4-BE49-F238E27FC236}">
+                <a16:creationId xmlns:a16="http://schemas.microsoft.com/office/drawing/2014/main" id="{18A68BD0-3127-AC0B-80B4-CA2643B37A26}"/>
+              </a:ext>
+            </a:extLst>
+          </p:cNvPr>
+          <p:cNvPicPr>
+            <a:picLocks noChangeAspect="1"/>
+          </p:cNvPicPr>
+          <p:nvPr/>
+        </p:nvPicPr>
+        <p:blipFill>
+          <a:blip r:embed="rId6">
+            <a:extLst>
+              <a:ext uri="{28A0092B-C50C-407E-A947-70E740481C1C}">
+                <a14:useLocalDpi xmlns:a14="http://schemas.microsoft.com/office/drawing/2010/main" val="0"/>
+              </a:ext>
+            </a:extLst>
+          </a:blip>
+          <a:stretch>
+            <a:fillRect/>
+          </a:stretch>
+        </p:blipFill>
+        <p:spPr>
+          <a:xfrm>
+            <a:off x="1466553" y="276669"/>
+            <a:ext cx="9163491" cy="586435"/>
+          </a:xfrm>
+          <a:prstGeom prst="rect">
+            <a:avLst/>
+          </a:prstGeom>
+        </p:spPr>
+      </p:pic>
+    </p:spTree>
+  </p:cSld>
+  <p:clrMapOvr>
+    <a:masterClrMapping/>
+  </p:clrMapOvr>
+</p:sld>
+</file>
+
+<file path=ppt/slides/slide5.xml><?xml version="1.0" encoding="utf-8"?>
+<p:sld xmlns:a="http://schemas.openxmlformats.org/drawingml/2006/main" xmlns:r="http://schemas.openxmlformats.org/officeDocument/2006/relationships" xmlns:p="http://schemas.openxmlformats.org/presentationml/2006/main">
+  <p:cSld name="Slide 5">
+    <p:spTree>
+      <p:nvGrpSpPr>
+        <p:cNvPr id="1" name=""/>
+        <p:cNvGrpSpPr/>
+        <p:nvPr/>
+      </p:nvGrpSpPr>
+      <p:grpSpPr>
+        <a:xfrm>
+          <a:off x="0" y="0"/>
+          <a:ext cx="0" cy="0"/>
+          <a:chOff x="0" y="0"/>
+          <a:chExt cx="0" cy="0"/>
+        </a:xfrm>
+      </p:grpSpPr>
+      <p:sp>
+        <p:nvSpPr>
+          <p:cNvPr id="2" name="Shape 0"/>
+          <p:cNvSpPr/>
+          <p:nvPr/>
+        </p:nvSpPr>
+        <p:spPr>
+          <a:xfrm>
+            <a:off x="0" y="0"/>
+            <a:ext cx="12191695" cy="6858000"/>
+          </a:xfrm>
+          <a:prstGeom prst="rect">
+            <a:avLst/>
+          </a:prstGeom>
+          <a:solidFill>
+            <a:srgbClr val="000036"/>
+          </a:solidFill>
+          <a:ln/>
+        </p:spPr>
+        <p:txBody>
+          <a:bodyPr/>
+          <a:lstStyle/>
+          <a:p>
+            <a:endParaRPr lang="en-IN"/>
+          </a:p>
+        </p:txBody>
+      </p:sp>
+      <p:pic>
+        <p:nvPicPr>
+          <p:cNvPr id="3" name="Image 0" descr="preencoded.png"/>
+          <p:cNvPicPr>
+            <a:picLocks noChangeAspect="1"/>
+          </p:cNvPicPr>
+          <p:nvPr/>
+        </p:nvPicPr>
+        <p:blipFill>
+          <a:blip r:embed="rId2">
+            <a:alphaModFix amt="10000"/>
+          </a:blip>
+          <a:srcRect l="12327" r="12327"/>
+          <a:stretch/>
+        </p:blipFill>
+        <p:spPr>
+          <a:xfrm>
+            <a:off x="0" y="0"/>
+            <a:ext cx="12191695" cy="6858000"/>
+          </a:xfrm>
+          <a:prstGeom prst="rect">
+            <a:avLst/>
+          </a:prstGeom>
+        </p:spPr>
+      </p:pic>
+      <p:sp>
+        <p:nvSpPr>
+          <p:cNvPr id="4" name="Shape 1"/>
+          <p:cNvSpPr/>
+          <p:nvPr/>
+        </p:nvSpPr>
+        <p:spPr>
+          <a:xfrm>
+            <a:off x="571500" y="286207"/>
+            <a:ext cx="11048695" cy="666598"/>
+          </a:xfrm>
+          <a:prstGeom prst="roundRect">
+            <a:avLst>
+              <a:gd name="adj" fmla="val 15677"/>
+            </a:avLst>
+          </a:prstGeom>
+          <a:solidFill>
+            <a:srgbClr val="FFFFFF">
+              <a:alpha val="95000"/>
+            </a:srgbClr>
+          </a:solidFill>
+          <a:ln/>
+          <a:effectLst>
+            <a:outerShdw blurRad="63500" dist="38100" dir="5400000" algn="bl" rotWithShape="0">
+              <a:srgbClr val="000000">
+                <a:alpha val="10000"/>
+              </a:srgbClr>
+            </a:outerShdw>
+          </a:effectLst>
+        </p:spPr>
+        <p:txBody>
+          <a:bodyPr/>
+          <a:lstStyle/>
+          <a:p>
+            <a:endParaRPr lang="en-IN"/>
+          </a:p>
+        </p:txBody>
+      </p:sp>
+      <p:sp>
+        <p:nvSpPr>
+          <p:cNvPr id="7" name="Shape 2"/>
+          <p:cNvSpPr/>
+          <p:nvPr/>
+        </p:nvSpPr>
+        <p:spPr>
+          <a:xfrm>
+            <a:off x="571500" y="1333195"/>
+            <a:ext cx="75895" cy="409651"/>
+          </a:xfrm>
+          <a:prstGeom prst="rect">
+            <a:avLst/>
+          </a:prstGeom>
+          <a:solidFill>
+            <a:srgbClr val="88E555"/>
+          </a:solidFill>
+          <a:ln/>
+        </p:spPr>
+        <p:txBody>
+          <a:bodyPr/>
+          <a:lstStyle/>
+          <a:p>
+            <a:endParaRPr lang="en-IN"/>
+          </a:p>
+        </p:txBody>
+      </p:sp>
+      <p:sp>
+        <p:nvSpPr>
+          <p:cNvPr id="8" name="Text 3"/>
+          <p:cNvSpPr txBox="1"/>
+          <p:nvPr/>
+        </p:nvSpPr>
+        <p:spPr>
+          <a:xfrm>
+            <a:off x="838505" y="1295705"/>
+            <a:ext cx="9692640" cy="467258"/>
+          </a:xfrm>
+          <a:prstGeom prst="rect">
+            <a:avLst/>
+          </a:prstGeom>
+          <a:noFill/>
+          <a:ln/>
+        </p:spPr>
+        <p:txBody>
+          <a:bodyPr wrap="square" lIns="0" tIns="0" rIns="0" bIns="0" rtlCol="0" anchor="ctr"/>
+          <a:lstStyle/>
+          <a:p>
+            <a:r>
+              <a:rPr lang="en-US" sz="2600" b="1" dirty="0">
+                <a:solidFill>
+                  <a:srgbClr val="FFFFFF"/>
+                </a:solidFill>
+                <a:latin typeface="Poppins" pitchFamily="34" charset="0"/>
+                <a:ea typeface="Poppins" pitchFamily="34" charset="-122"/>
+                <a:cs typeface="Poppins" pitchFamily="34" charset="-120"/>
+              </a:rPr>
+              <a:t>Synthetic Data Design</a:t>
+            </a:r>
+            <a:endParaRPr lang="en-US" sz="2600" dirty="0"/>
+          </a:p>
+        </p:txBody>
+      </p:sp>
+      <p:sp>
+        <p:nvSpPr>
+          <p:cNvPr id="9" name="Shape 4"/>
+          <p:cNvSpPr/>
+          <p:nvPr/>
+        </p:nvSpPr>
+        <p:spPr>
+          <a:xfrm>
+            <a:off x="571500" y="2021738"/>
+            <a:ext cx="11048695" cy="4552798"/>
+          </a:xfrm>
+          <a:prstGeom prst="roundRect">
+            <a:avLst>
+              <a:gd name="adj" fmla="val 672"/>
+            </a:avLst>
+          </a:prstGeom>
+          <a:solidFill>
+            <a:srgbClr val="FFFFFF">
+              <a:alpha val="5000"/>
+            </a:srgbClr>
+          </a:solidFill>
+          <a:ln w="12700">
+            <a:solidFill>
+              <a:srgbClr val="88E555">
+                <a:alpha val="30000"/>
+              </a:srgbClr>
+            </a:solidFill>
+            <a:prstDash val="solid"/>
+          </a:ln>
+        </p:spPr>
+        <p:txBody>
+          <a:bodyPr/>
+          <a:lstStyle/>
+          <a:p>
+            <a:endParaRPr lang="en-IN"/>
+          </a:p>
+        </p:txBody>
+      </p:sp>
+      <p:sp>
+        <p:nvSpPr>
+          <p:cNvPr id="10" name="Shape 5"/>
+          <p:cNvSpPr/>
+          <p:nvPr/>
+        </p:nvSpPr>
+        <p:spPr>
+          <a:xfrm>
+            <a:off x="571500" y="2021738"/>
+            <a:ext cx="190195" cy="190195"/>
+          </a:xfrm>
+          <a:prstGeom prst="roundRect">
+            <a:avLst>
+              <a:gd name="adj" fmla="val 192308"/>
+            </a:avLst>
+          </a:prstGeom>
+          <a:noFill/>
+          <a:ln w="38100">
+            <a:solidFill>
+              <a:srgbClr val="88E555"/>
+            </a:solidFill>
+            <a:prstDash val="solid"/>
+          </a:ln>
+        </p:spPr>
+        <p:txBody>
+          <a:bodyPr/>
+          <a:lstStyle/>
+          <a:p>
+            <a:endParaRPr lang="en-IN"/>
+          </a:p>
+        </p:txBody>
+      </p:sp>
+      <p:sp>
+        <p:nvSpPr>
+          <p:cNvPr id="11" name="Shape 6"/>
+          <p:cNvSpPr/>
+          <p:nvPr/>
+        </p:nvSpPr>
+        <p:spPr>
+          <a:xfrm>
+            <a:off x="11430000" y="2021738"/>
+            <a:ext cx="190195" cy="190195"/>
+          </a:xfrm>
+          <a:prstGeom prst="rect">
+            <a:avLst/>
+          </a:prstGeom>
+          <a:noFill/>
+          <a:ln w="38100">
+            <a:solidFill>
+              <a:srgbClr val="88E555"/>
+            </a:solidFill>
+            <a:prstDash val="solid"/>
+          </a:ln>
+        </p:spPr>
+        <p:txBody>
+          <a:bodyPr/>
+          <a:lstStyle/>
+          <a:p>
+            <a:endParaRPr lang="en-IN"/>
+          </a:p>
+        </p:txBody>
+      </p:sp>
+      <p:sp>
+        <p:nvSpPr>
+          <p:cNvPr id="12" name="Shape 7"/>
+          <p:cNvSpPr/>
+          <p:nvPr/>
+        </p:nvSpPr>
+        <p:spPr>
+          <a:xfrm>
+            <a:off x="571500" y="6381598"/>
+            <a:ext cx="190195" cy="190195"/>
+          </a:xfrm>
+          <a:prstGeom prst="rect">
+            <a:avLst/>
+          </a:prstGeom>
+          <a:noFill/>
+          <a:ln w="38100">
+            <a:solidFill>
+              <a:srgbClr val="88E555"/>
+            </a:solidFill>
+            <a:prstDash val="solid"/>
+          </a:ln>
+        </p:spPr>
+        <p:txBody>
+          <a:bodyPr/>
+          <a:lstStyle/>
+          <a:p>
+            <a:endParaRPr lang="en-IN"/>
+          </a:p>
+        </p:txBody>
+      </p:sp>
+      <p:sp>
+        <p:nvSpPr>
+          <p:cNvPr id="13" name="Shape 8"/>
+          <p:cNvSpPr/>
+          <p:nvPr/>
+        </p:nvSpPr>
+        <p:spPr>
+          <a:xfrm>
+            <a:off x="11430000" y="6381598"/>
+            <a:ext cx="190195" cy="190195"/>
+          </a:xfrm>
+          <a:prstGeom prst="rect">
+            <a:avLst/>
+          </a:prstGeom>
+          <a:noFill/>
+          <a:ln w="38100">
+            <a:solidFill>
+              <a:srgbClr val="88E555"/>
+            </a:solidFill>
+            <a:prstDash val="solid"/>
+          </a:ln>
+        </p:spPr>
+        <p:txBody>
+          <a:bodyPr/>
+          <a:lstStyle/>
+          <a:p>
+            <a:endParaRPr lang="en-IN"/>
+          </a:p>
+        </p:txBody>
+      </p:sp>
+      <p:sp>
+        <p:nvSpPr>
+          <p:cNvPr id="14" name="Shape 9"/>
+          <p:cNvSpPr/>
+          <p:nvPr/>
+        </p:nvSpPr>
+        <p:spPr>
+          <a:xfrm>
+            <a:off x="961949" y="2412187"/>
+            <a:ext cx="571500" cy="571500"/>
+          </a:xfrm>
+          <a:prstGeom prst="ellipse">
+            <a:avLst/>
+          </a:prstGeom>
+          <a:solidFill>
+            <a:srgbClr val="273383">
+              <a:alpha val="50000"/>
+            </a:srgbClr>
+          </a:solidFill>
+          <a:ln w="25400">
+            <a:solidFill>
+              <a:srgbClr val="AEFF82"/>
+            </a:solidFill>
+            <a:prstDash val="solid"/>
+          </a:ln>
+        </p:spPr>
+        <p:txBody>
+          <a:bodyPr/>
+          <a:lstStyle/>
+          <a:p>
+            <a:endParaRPr lang="en-IN"/>
+          </a:p>
+        </p:txBody>
+      </p:sp>
+      <p:pic>
+        <p:nvPicPr>
+          <p:cNvPr id="15" name="Image 3" descr="preencoded.png"/>
+          <p:cNvPicPr>
+            <a:picLocks noChangeAspect="1"/>
+          </p:cNvPicPr>
+          <p:nvPr/>
+        </p:nvPicPr>
+        <p:blipFill>
+          <a:blip r:embed="rId3"/>
+          <a:srcRect l="-80" r="-80"/>
+          <a:stretch/>
+        </p:blipFill>
+        <p:spPr>
+          <a:xfrm>
+            <a:off x="1104595" y="2583180"/>
+            <a:ext cx="286207" cy="228600"/>
+          </a:xfrm>
+          <a:prstGeom prst="rect">
+            <a:avLst/>
+          </a:prstGeom>
+        </p:spPr>
+      </p:pic>
+      <p:sp>
+        <p:nvSpPr>
+          <p:cNvPr id="16" name="Text 10"/>
+          <p:cNvSpPr txBox="1"/>
+          <p:nvPr/>
+        </p:nvSpPr>
+        <p:spPr>
+          <a:xfrm>
+            <a:off x="961949" y="3193085"/>
+            <a:ext cx="10172700" cy="685800"/>
+          </a:xfrm>
+          <a:prstGeom prst="rect">
+            <a:avLst/>
+          </a:prstGeom>
+          <a:noFill/>
+          <a:ln/>
+        </p:spPr>
+        <p:txBody>
+          <a:bodyPr wrap="square" lIns="0" tIns="0" rIns="0" bIns="0" rtlCol="0" anchor="ctr"/>
+          <a:lstStyle/>
+          <a:p>
+            <a:pPr marL="0" indent="0" algn="l">
+              <a:buNone/>
+            </a:pPr>
+            <a:r>
+              <a:rPr lang="en-US" sz="1800" dirty="0">
+                <a:solidFill>
+                  <a:srgbClr val="AEFF82">
+                    <a:alpha val="80000"/>
+                  </a:srgbClr>
+                </a:solidFill>
+                <a:latin typeface="Poppins" pitchFamily="34" charset="0"/>
+                <a:ea typeface="Poppins" pitchFamily="34" charset="-122"/>
+                <a:cs typeface="Poppins" pitchFamily="34" charset="-120"/>
+              </a:rPr>
+              <a:t>A DRAM die is not one continuous periodic field. The generator reproduces that, because it is what makes the problem solvable at all.</a:t>
+            </a:r>
+            <a:endParaRPr lang="en-US" sz="1800" dirty="0"/>
+          </a:p>
+        </p:txBody>
+      </p:sp>
+      <p:sp>
+        <p:nvSpPr>
+          <p:cNvPr id="17" name="Shape 11"/>
+          <p:cNvSpPr/>
+          <p:nvPr/>
+        </p:nvSpPr>
+        <p:spPr>
+          <a:xfrm>
+            <a:off x="961949" y="4134002"/>
+            <a:ext cx="10267798" cy="2148840"/>
+          </a:xfrm>
+          <a:prstGeom prst="roundRect">
+            <a:avLst>
+              <a:gd name="adj" fmla="val 4277"/>
+            </a:avLst>
+          </a:prstGeom>
+          <a:solidFill>
+            <a:srgbClr val="1E3A8A">
+              <a:alpha val="40000"/>
+            </a:srgbClr>
+          </a:solidFill>
+          <a:ln w="12700">
+            <a:solidFill>
+              <a:srgbClr val="1D4ED8"/>
+            </a:solidFill>
+            <a:prstDash val="solid"/>
+          </a:ln>
+        </p:spPr>
+        <p:txBody>
+          <a:bodyPr/>
+          <a:lstStyle/>
+          <a:p>
+            <a:endParaRPr lang="en-IN"/>
+          </a:p>
+        </p:txBody>
+      </p:sp>
+      <p:sp>
+        <p:nvSpPr>
+          <p:cNvPr id="18" name="Text 12"/>
+          <p:cNvSpPr txBox="1"/>
+          <p:nvPr/>
+        </p:nvSpPr>
+        <p:spPr>
+          <a:xfrm>
+            <a:off x="1200607" y="4372661"/>
+            <a:ext cx="8961120" cy="191110"/>
+          </a:xfrm>
+          <a:prstGeom prst="rect">
+            <a:avLst/>
+          </a:prstGeom>
+          <a:noFill/>
+          <a:ln/>
+        </p:spPr>
+        <p:txBody>
+          <a:bodyPr wrap="square" lIns="0" tIns="0" rIns="0" bIns="0" rtlCol="0" anchor="ctr"/>
+          <a:lstStyle/>
+          <a:p>
+            <a:pPr marL="0" indent="0" algn="l">
+              <a:buNone/>
+            </a:pPr>
+            <a:r>
+              <a:rPr lang="en-US" sz="1000" b="1" dirty="0">
+                <a:solidFill>
+                  <a:srgbClr val="9CA3AF"/>
+                </a:solidFill>
+                <a:latin typeface="Poppins" pitchFamily="34" charset="0"/>
+                <a:ea typeface="Poppins" pitchFamily="34" charset="-122"/>
+                <a:cs typeface="Poppins" pitchFamily="34" charset="-120"/>
+              </a:rPr>
+              <a:t>STRUCTURE — MATS, STRIPS, AND WHY IT MATTERS</a:t>
+            </a:r>
+            <a:endParaRPr lang="en-US" sz="1000" dirty="0"/>
+          </a:p>
+        </p:txBody>
+      </p:sp>
+      <p:sp>
+        <p:nvSpPr>
+          <p:cNvPr id="19" name="Text 13"/>
+          <p:cNvSpPr txBox="1"/>
+          <p:nvPr/>
+        </p:nvSpPr>
+        <p:spPr>
+          <a:xfrm>
+            <a:off x="1200607" y="4648810"/>
+            <a:ext cx="8996782" cy="1572768"/>
+          </a:xfrm>
+          <a:prstGeom prst="rect">
+            <a:avLst/>
+          </a:prstGeom>
+          <a:noFill/>
+          <a:ln/>
+        </p:spPr>
+        <p:txBody>
+          <a:bodyPr wrap="square" lIns="0" tIns="0" rIns="0" bIns="0" rtlCol="0" anchor="t"/>
+          <a:lstStyle/>
+          <a:p>
+            <a:pPr marL="0" indent="0" algn="l">
+              <a:lnSpc>
+                <a:spcPct val="115000"/>
+              </a:lnSpc>
+              <a:spcAft>
+                <a:spcPts val="400"/>
+              </a:spcAft>
+              <a:buNone/>
+            </a:pPr>
+            <a:r>
+              <a:rPr sz="1050">
+                <a:solidFill>
+                  <a:srgbClr val="FFFFFF"/>
+                </a:solidFill>
+                <a:latin typeface="Poppins"/>
+              </a:rPr>
+              <a:t>Real DRAM is organised as sub-array mats tiled with peripheral bands — bitline sense amplifiers on one axis, sub-wordline drivers on the other (Keeth et al. 2007; Vogelsang 2010). The generator renders each mat independently on a 10000x10000 px, 1 nm/px canvas and tiles them with strip/routing regions, so structural boundaries emerge from the layout rather than from an injected landmark.</a:t>
+            </a:r>
+            <a:endParaRPr lang="en-US" sz="1300" dirty="0"/>
+          </a:p>
+          <a:p>
+            <a:pPr>
+              <a:lnSpc>
+                <a:spcPct val="115000"/>
+              </a:lnSpc>
+              <a:spcAft>
+                <a:spcPts val="400"/>
+              </a:spcAft>
+            </a:pPr>
+            <a:r>
+              <a:rPr sz="1050">
+                <a:solidFill>
+                  <a:srgbClr val="FFFFFF"/>
+                </a:solidFill>
+                <a:latin typeface="Poppins"/>
+              </a:rPr>
+              <a:t>Six DRAM mat presets, each with its own word/bit pitch and contact sub-lattice, plus a continuous feature_size_scale so one preset spans a range of process nodes instead of a single discrete point.</a:t>
+            </a:r>
+          </a:p>
+          <a:p>
+            <a:pPr>
+              <a:lnSpc>
+                <a:spcPct val="115000"/>
+              </a:lnSpc>
+              <a:spcAft>
+                <a:spcPts val="0"/>
+              </a:spcAft>
+            </a:pPr>
+            <a:r>
+              <a:rPr sz="1050">
+                <a:solidFill>
+                  <a:srgbClr val="FFFFFF"/>
+                </a:solidFill>
+                <a:latin typeface="Poppins"/>
+              </a:rPr>
+              <a:t>Ground truth is computed from the crop origin BEFORE any imaging call — gt = (x0/10 + 50, y0/10 + 50) — so no degradation can move it and no label leakage is possible.</a:t>
+            </a:r>
+          </a:p>
+        </p:txBody>
+      </p:sp>
+      <p:pic>
+        <p:nvPicPr>
+          <p:cNvPr id="20" name="Picture 19">
+            <a:extLst>
+              <a:ext uri="{FF2B5EF4-FFF2-40B4-BE49-F238E27FC236}">
+                <a16:creationId xmlns:a16="http://schemas.microsoft.com/office/drawing/2014/main" id="{667D8EB9-0510-8E20-AE50-3B9EC8704685}"/>
+              </a:ext>
+            </a:extLst>
+          </p:cNvPr>
+          <p:cNvPicPr>
+            <a:picLocks noChangeAspect="1"/>
+          </p:cNvPicPr>
+          <p:nvPr/>
+        </p:nvPicPr>
+        <p:blipFill>
+          <a:blip r:embed="rId4"/>
+          <a:stretch>
+            <a:fillRect/>
+          </a:stretch>
+        </p:blipFill>
+        <p:spPr>
+          <a:xfrm>
+            <a:off x="5292164" y="227710"/>
+            <a:ext cx="1607366" cy="783591"/>
+          </a:xfrm>
+          <a:prstGeom prst="rect">
+            <a:avLst/>
+          </a:prstGeom>
+        </p:spPr>
+      </p:pic>
+      <p:sp>
+        <p:nvSpPr>
+          <p:cNvPr id="22" name="Shape 1">
+            <a:extLst>
+              <a:ext uri="{FF2B5EF4-FFF2-40B4-BE49-F238E27FC236}">
+                <a16:creationId xmlns:a16="http://schemas.microsoft.com/office/drawing/2014/main" id="{50164B49-38DE-6195-0A8B-DC6EC6DA2457}"/>
+              </a:ext>
+            </a:extLst>
+          </p:cNvPr>
+          <p:cNvSpPr/>
+          <p:nvPr/>
+        </p:nvSpPr>
+        <p:spPr>
+          <a:xfrm>
+            <a:off x="571500" y="142799"/>
+            <a:ext cx="11048695" cy="857707"/>
+          </a:xfrm>
+          <a:prstGeom prst="roundRect">
+            <a:avLst>
+              <a:gd name="adj" fmla="val 9476"/>
+            </a:avLst>
+          </a:prstGeom>
+          <a:solidFill>
+            <a:srgbClr val="FFFFFF">
+              <a:alpha val="95000"/>
+            </a:srgbClr>
+          </a:solidFill>
+          <a:ln/>
+          <a:effectLst>
+            <a:outerShdw blurRad="63500" dist="38100" dir="5400000" algn="bl" rotWithShape="0">
+              <a:srgbClr val="000000">
+                <a:alpha val="10000"/>
+              </a:srgbClr>
+            </a:outerShdw>
+          </a:effectLst>
+        </p:spPr>
+        <p:txBody>
+          <a:bodyPr/>
+          <a:lstStyle/>
+          <a:p>
+            <a:endParaRPr lang="en-IN"/>
+          </a:p>
+        </p:txBody>
+      </p:sp>
+      <p:pic>
+        <p:nvPicPr>
+          <p:cNvPr id="23" name="Picture 22">
+            <a:extLst>
+              <a:ext uri="{FF2B5EF4-FFF2-40B4-BE49-F238E27FC236}">
+                <a16:creationId xmlns:a16="http://schemas.microsoft.com/office/drawing/2014/main" id="{18A68BD0-3127-AC0B-80B4-CA2643B37A26}"/>
+              </a:ext>
+            </a:extLst>
+          </p:cNvPr>
+          <p:cNvPicPr>
+            <a:picLocks noChangeAspect="1"/>
+          </p:cNvPicPr>
+          <p:nvPr/>
+        </p:nvPicPr>
+        <p:blipFill>
+          <a:blip r:embed="rId5">
+            <a:extLst>
+              <a:ext uri="{28A0092B-C50C-407E-A947-70E740481C1C}">
+                <a14:useLocalDpi xmlns:a14="http://schemas.microsoft.com/office/drawing/2010/main" val="0"/>
+              </a:ext>
+            </a:extLst>
+          </a:blip>
+          <a:stretch>
+            <a:fillRect/>
+          </a:stretch>
+        </p:blipFill>
+        <p:spPr>
+          <a:xfrm>
+            <a:off x="1466553" y="276669"/>
+            <a:ext cx="9163491" cy="586435"/>
+          </a:xfrm>
+          <a:prstGeom prst="rect">
+            <a:avLst/>
+          </a:prstGeom>
+        </p:spPr>
+      </p:pic>
+    </p:spTree>
+  </p:cSld>
+  <p:clrMapOvr>
+    <a:masterClrMapping/>
+  </p:clrMapOvr>
+</p:sld>
+</file>
+
+<file path=ppt/slides/slide6.xml><?xml version="1.0" encoding="utf-8"?>
+<p:sld xmlns:a="http://schemas.openxmlformats.org/drawingml/2006/main" xmlns:r="http://schemas.openxmlformats.org/officeDocument/2006/relationships" xmlns:p="http://schemas.openxmlformats.org/presentationml/2006/main">
+  <p:cSld>
+    <p:spTree>
+      <p:nvGrpSpPr>
+        <p:cNvPr id="1" name=""/>
+        <p:cNvGrpSpPr/>
+        <p:nvPr/>
+      </p:nvGrpSpPr>
+      <p:grpSpPr>
+        <a:xfrm>
+          <a:off x="0" y="0"/>
+          <a:ext cx="0" cy="0"/>
+          <a:chOff x="0" y="0"/>
+          <a:chExt cx="0" cy="0"/>
+        </a:xfrm>
+      </p:grpSpPr>
+      <p:sp>
+        <p:nvSpPr>
+          <p:cNvPr id="2" name="Shape 0"/>
+          <p:cNvSpPr/>
+          <p:nvPr/>
+        </p:nvSpPr>
+        <p:spPr>
+          <a:xfrm>
+            <a:off x="0" y="0"/>
+            <a:ext cx="12191695" cy="6858000"/>
+          </a:xfrm>
+          <a:prstGeom prst="rect">
+            <a:avLst/>
+          </a:prstGeom>
+          <a:solidFill>
+            <a:srgbClr val="000036"/>
+          </a:solidFill>
+          <a:ln/>
+        </p:spPr>
+        <p:txBody>
+          <a:bodyPr/>
+          <a:lstStyle/>
+          <a:p>
+            <a:endParaRPr lang="en-IN"/>
+          </a:p>
+        </p:txBody>
+      </p:sp>
+      <p:pic>
+        <p:nvPicPr>
+          <p:cNvPr id="3" name="Image 0" descr="preencoded.png"/>
+          <p:cNvPicPr>
+            <a:picLocks noChangeAspect="1"/>
+          </p:cNvPicPr>
+          <p:nvPr/>
+        </p:nvPicPr>
+        <p:blipFill>
+          <a:blip r:embed="rId2">
+            <a:alphaModFix amt="10000"/>
+          </a:blip>
+          <a:srcRect l="12327" r="12327"/>
+          <a:stretch/>
+        </p:blipFill>
+        <p:spPr>
+          <a:xfrm>
+            <a:off x="0" y="0"/>
+            <a:ext cx="12191695" cy="6858000"/>
+          </a:xfrm>
+          <a:prstGeom prst="rect">
+            <a:avLst/>
+          </a:prstGeom>
+        </p:spPr>
+      </p:pic>
+      <p:sp>
+        <p:nvSpPr>
+          <p:cNvPr id="4" name="Shape 1"/>
+          <p:cNvSpPr/>
+          <p:nvPr/>
+        </p:nvSpPr>
+        <p:spPr>
+          <a:xfrm>
+            <a:off x="571500" y="286207"/>
+            <a:ext cx="11048695" cy="666598"/>
+          </a:xfrm>
+          <a:prstGeom prst="roundRect">
+            <a:avLst>
+              <a:gd name="adj" fmla="val 15677"/>
+            </a:avLst>
+          </a:prstGeom>
+          <a:solidFill>
+            <a:srgbClr val="FFFFFF">
+              <a:alpha val="95000"/>
+            </a:srgbClr>
+          </a:solidFill>
+          <a:ln/>
+          <a:effectLst>
+            <a:outerShdw blurRad="63500" dist="38100" dir="5400000" algn="bl" rotWithShape="0">
+              <a:srgbClr val="000000">
+                <a:alpha val="10000"/>
+              </a:srgbClr>
+            </a:outerShdw>
+          </a:effectLst>
+        </p:spPr>
+        <p:txBody>
+          <a:bodyPr/>
+          <a:lstStyle/>
+          <a:p>
+            <a:endParaRPr lang="en-IN"/>
+          </a:p>
+        </p:txBody>
+      </p:sp>
+      <p:sp>
+        <p:nvSpPr>
+          <p:cNvPr id="7" name="Shape 2"/>
+          <p:cNvSpPr/>
+          <p:nvPr/>
+        </p:nvSpPr>
+        <p:spPr>
+          <a:xfrm>
+            <a:off x="571500" y="1190549"/>
+            <a:ext cx="75895" cy="409651"/>
+          </a:xfrm>
+          <a:prstGeom prst="rect">
+            <a:avLst/>
+          </a:prstGeom>
+          <a:solidFill>
+            <a:srgbClr val="88E555"/>
+          </a:solidFill>
+          <a:ln/>
+        </p:spPr>
+        <p:txBody>
+          <a:bodyPr/>
+          <a:lstStyle/>
+          <a:p>
+            <a:endParaRPr lang="en-IN"/>
+          </a:p>
+        </p:txBody>
+      </p:sp>
+      <p:sp>
+        <p:nvSpPr>
+          <p:cNvPr id="8" name="Text 3"/>
+          <p:cNvSpPr txBox="1"/>
+          <p:nvPr/>
+        </p:nvSpPr>
+        <p:spPr>
+          <a:xfrm>
+            <a:off x="838505" y="1152144"/>
+            <a:ext cx="9692640" cy="467258"/>
+          </a:xfrm>
+          <a:prstGeom prst="rect">
+            <a:avLst/>
+          </a:prstGeom>
+          <a:noFill/>
+          <a:ln/>
+        </p:spPr>
+        <p:txBody>
+          <a:bodyPr wrap="square" lIns="0" tIns="0" rIns="0" bIns="0" rtlCol="0" anchor="ctr"/>
+          <a:lstStyle/>
+          <a:p>
+            <a:pPr marL="0" indent="0" algn="l">
+              <a:buNone/>
+            </a:pPr>
+            <a:r>
+              <a:rPr lang="en-US" sz="2600" b="1" dirty="0">
+                <a:solidFill>
+                  <a:srgbClr val="FFFFFF"/>
+                </a:solidFill>
+                <a:latin typeface="Poppins" pitchFamily="34" charset="0"/>
+                <a:ea typeface="Poppins" pitchFamily="34" charset="-122"/>
+                <a:cs typeface="Poppins" pitchFamily="34" charset="-120"/>
+              </a:rPr>
+              <a:t>Degradation, Scale and Rotation Modelling</a:t>
+            </a:r>
+            <a:endParaRPr lang="en-US" sz="2600" dirty="0"/>
+          </a:p>
+        </p:txBody>
+      </p:sp>
+      <p:sp>
+        <p:nvSpPr>
+          <p:cNvPr id="9" name="Shape 4"/>
+          <p:cNvSpPr/>
+          <p:nvPr/>
+        </p:nvSpPr>
+        <p:spPr>
+          <a:xfrm>
+            <a:off x="571500" y="1830629"/>
+            <a:ext cx="11048695" cy="4743907"/>
+          </a:xfrm>
+          <a:prstGeom prst="roundRect">
+            <a:avLst>
+              <a:gd name="adj" fmla="val 619"/>
+            </a:avLst>
+          </a:prstGeom>
+          <a:solidFill>
+            <a:srgbClr val="FFFFFF">
+              <a:alpha val="5000"/>
+            </a:srgbClr>
+          </a:solidFill>
+          <a:ln w="12700">
+            <a:solidFill>
+              <a:srgbClr val="88E555">
+                <a:alpha val="30000"/>
+              </a:srgbClr>
+            </a:solidFill>
+            <a:prstDash val="solid"/>
+          </a:ln>
+        </p:spPr>
+        <p:txBody>
+          <a:bodyPr/>
+          <a:lstStyle/>
+          <a:p>
+            <a:endParaRPr lang="en-IN"/>
+          </a:p>
+        </p:txBody>
+      </p:sp>
+      <p:sp>
+        <p:nvSpPr>
+          <p:cNvPr id="10" name="Shape 5"/>
+          <p:cNvSpPr/>
+          <p:nvPr/>
+        </p:nvSpPr>
+        <p:spPr>
+          <a:xfrm>
+            <a:off x="571500" y="1830629"/>
+            <a:ext cx="190195" cy="190195"/>
+          </a:xfrm>
+          <a:prstGeom prst="roundRect">
+            <a:avLst>
+              <a:gd name="adj" fmla="val 192308"/>
+            </a:avLst>
+          </a:prstGeom>
+          <a:noFill/>
+          <a:ln w="38100">
+            <a:solidFill>
+              <a:srgbClr val="88E555"/>
+            </a:solidFill>
+            <a:prstDash val="solid"/>
+          </a:ln>
+        </p:spPr>
+        <p:txBody>
+          <a:bodyPr/>
+          <a:lstStyle/>
+          <a:p>
+            <a:endParaRPr lang="en-IN"/>
+          </a:p>
+        </p:txBody>
+      </p:sp>
+      <p:sp>
+        <p:nvSpPr>
+          <p:cNvPr id="11" name="Shape 6"/>
+          <p:cNvSpPr/>
+          <p:nvPr/>
+        </p:nvSpPr>
+        <p:spPr>
+          <a:xfrm>
+            <a:off x="11430000" y="1830629"/>
+            <a:ext cx="190195" cy="190195"/>
+          </a:xfrm>
+          <a:prstGeom prst="rect">
+            <a:avLst/>
+          </a:prstGeom>
+          <a:noFill/>
+          <a:ln w="38100">
+            <a:solidFill>
+              <a:srgbClr val="88E555"/>
+            </a:solidFill>
+            <a:prstDash val="solid"/>
+          </a:ln>
+        </p:spPr>
+        <p:txBody>
+          <a:bodyPr/>
+          <a:lstStyle/>
+          <a:p>
+            <a:endParaRPr lang="en-IN"/>
+          </a:p>
+        </p:txBody>
+      </p:sp>
+      <p:sp>
+        <p:nvSpPr>
+          <p:cNvPr id="12" name="Shape 7"/>
+          <p:cNvSpPr/>
+          <p:nvPr/>
+        </p:nvSpPr>
+        <p:spPr>
+          <a:xfrm>
+            <a:off x="571500" y="6381598"/>
+            <a:ext cx="190195" cy="190195"/>
+          </a:xfrm>
+          <a:prstGeom prst="rect">
+            <a:avLst/>
+          </a:prstGeom>
+          <a:noFill/>
+          <a:ln w="38100">
+            <a:solidFill>
+              <a:srgbClr val="88E555"/>
+            </a:solidFill>
+            <a:prstDash val="solid"/>
+          </a:ln>
+        </p:spPr>
+        <p:txBody>
+          <a:bodyPr/>
+          <a:lstStyle/>
+          <a:p>
+            <a:endParaRPr lang="en-IN"/>
+          </a:p>
+        </p:txBody>
+      </p:sp>
+      <p:sp>
+        <p:nvSpPr>
+          <p:cNvPr id="13" name="Shape 8"/>
+          <p:cNvSpPr/>
+          <p:nvPr/>
+        </p:nvSpPr>
+        <p:spPr>
+          <a:xfrm>
+            <a:off x="11430000" y="6381598"/>
+            <a:ext cx="190195" cy="190195"/>
+          </a:xfrm>
+          <a:prstGeom prst="rect">
+            <a:avLst/>
+          </a:prstGeom>
+          <a:noFill/>
+          <a:ln w="38100">
+            <a:solidFill>
+              <a:srgbClr val="88E555"/>
+            </a:solidFill>
+            <a:prstDash val="solid"/>
+          </a:ln>
+        </p:spPr>
+        <p:txBody>
+          <a:bodyPr/>
+          <a:lstStyle/>
+          <a:p>
+            <a:endParaRPr lang="en-IN"/>
+          </a:p>
+        </p:txBody>
+      </p:sp>
+      <p:sp>
+        <p:nvSpPr>
+          <p:cNvPr id="14" name="Shape 9"/>
+          <p:cNvSpPr/>
+          <p:nvPr/>
+        </p:nvSpPr>
+        <p:spPr>
+          <a:xfrm>
+            <a:off x="961949" y="2173529"/>
+            <a:ext cx="476402" cy="476402"/>
+          </a:xfrm>
+          <a:prstGeom prst="ellipse">
+            <a:avLst/>
+          </a:prstGeom>
+          <a:solidFill>
+            <a:srgbClr val="273383">
+              <a:alpha val="50000"/>
+            </a:srgbClr>
+          </a:solidFill>
+          <a:ln w="25400">
+            <a:solidFill>
+              <a:srgbClr val="AEFF82"/>
+            </a:solidFill>
+            <a:prstDash val="solid"/>
+          </a:ln>
+        </p:spPr>
+        <p:txBody>
+          <a:bodyPr/>
+          <a:lstStyle/>
+          <a:p>
+            <a:endParaRPr lang="en-IN"/>
+          </a:p>
+        </p:txBody>
+      </p:sp>
+      <p:pic>
+        <p:nvPicPr>
+          <p:cNvPr id="15" name="Image 3" descr="preencoded.png"/>
+          <p:cNvPicPr>
+            <a:picLocks noChangeAspect="1"/>
+          </p:cNvPicPr>
+          <p:nvPr/>
+        </p:nvPicPr>
+        <p:blipFill>
+          <a:blip r:embed="rId3"/>
+          <a:srcRect/>
+          <a:stretch/>
+        </p:blipFill>
+        <p:spPr>
+          <a:xfrm>
+            <a:off x="1086307" y="2297887"/>
+            <a:ext cx="228600" cy="228600"/>
+          </a:xfrm>
+          <a:prstGeom prst="rect">
+            <a:avLst/>
+          </a:prstGeom>
+        </p:spPr>
+      </p:pic>
+      <p:sp>
+        <p:nvSpPr>
+          <p:cNvPr id="16" name="Text 10"/>
+          <p:cNvSpPr txBox="1"/>
+          <p:nvPr/>
+        </p:nvSpPr>
+        <p:spPr>
+          <a:xfrm>
+            <a:off x="1628546" y="2173529"/>
+            <a:ext cx="4206240" cy="267005"/>
+          </a:xfrm>
+          <a:prstGeom prst="rect">
+            <a:avLst/>
+          </a:prstGeom>
+          <a:noFill/>
+          <a:ln/>
+        </p:spPr>
+        <p:txBody>
+          <a:bodyPr wrap="square" lIns="0" tIns="0" rIns="0" bIns="0" rtlCol="0" anchor="ctr"/>
+          <a:lstStyle/>
+          <a:p>
+            <a:pPr marL="0" indent="0" algn="l">
+              <a:buNone/>
+            </a:pPr>
+            <a:r>
+              <a:rPr lang="en-US" sz="1500" b="1" dirty="0">
+                <a:solidFill>
+                  <a:srgbClr val="88E555"/>
+                </a:solidFill>
+                <a:latin typeface="Poppins" pitchFamily="34" charset="0"/>
+                <a:ea typeface="Poppins" pitchFamily="34" charset="-122"/>
+                <a:cs typeface="Poppins" pitchFamily="34" charset="-120"/>
+              </a:rPr>
+              <a:t>22 Modelled Mechanisms</a:t>
+            </a:r>
+            <a:endParaRPr lang="en-US" sz="1500" dirty="0"/>
+          </a:p>
+        </p:txBody>
+      </p:sp>
+      <p:sp>
+        <p:nvSpPr>
+          <p:cNvPr id="17" name="Text 11"/>
+          <p:cNvSpPr txBox="1"/>
+          <p:nvPr/>
+        </p:nvSpPr>
+        <p:spPr>
+          <a:xfrm>
+            <a:off x="1628546" y="2516429"/>
+            <a:ext cx="9235440" cy="191110"/>
+          </a:xfrm>
+          <a:prstGeom prst="rect">
+            <a:avLst/>
+          </a:prstGeom>
+          <a:noFill/>
+          <a:ln/>
+        </p:spPr>
+        <p:txBody>
+          <a:bodyPr wrap="square" lIns="0" tIns="0" rIns="0" bIns="0" rtlCol="0" anchor="ctr"/>
+          <a:lstStyle/>
+          <a:p>
+            <a:pPr marL="0" indent="0" algn="l">
+              <a:buNone/>
+            </a:pPr>
+            <a:r>
+              <a:rPr lang="en-US" sz="1000" dirty="0">
+                <a:solidFill>
+                  <a:srgbClr val="D1D5DB"/>
+                </a:solidFill>
+                <a:latin typeface="Poppins" pitchFamily="34" charset="0"/>
+                <a:ea typeface="Poppins" pitchFamily="34" charset="-122"/>
+                <a:cs typeface="Poppins" pitchFamily="34" charset="-120"/>
+              </a:rPr>
+              <a:t>Every mechanism is a real acquisition effect, applied in physical order and justified against a published source.</a:t>
+            </a:r>
+            <a:endParaRPr lang="en-US" sz="1000" dirty="0"/>
+          </a:p>
+        </p:txBody>
+      </p:sp>
+      <p:sp>
+        <p:nvSpPr>
+          <p:cNvPr id="18" name="Shape 12"/>
+          <p:cNvSpPr/>
+          <p:nvPr/>
+        </p:nvSpPr>
+        <p:spPr>
+          <a:xfrm>
+            <a:off x="1628546" y="2783434"/>
+            <a:ext cx="9601200" cy="1067105"/>
+          </a:xfrm>
+          <a:prstGeom prst="roundRect">
+            <a:avLst>
+              <a:gd name="adj" fmla="val 6121"/>
+            </a:avLst>
+          </a:prstGeom>
+          <a:solidFill>
+            <a:srgbClr val="1E3A8A">
+              <a:alpha val="40000"/>
+            </a:srgbClr>
+          </a:solidFill>
+          <a:ln w="12700">
+            <a:solidFill>
+              <a:srgbClr val="1D4ED8"/>
+            </a:solidFill>
+            <a:prstDash val="solid"/>
+          </a:ln>
+        </p:spPr>
+        <p:txBody>
+          <a:bodyPr/>
+          <a:lstStyle/>
+          <a:p>
+            <a:endParaRPr lang="en-IN"/>
+          </a:p>
+        </p:txBody>
+      </p:sp>
+      <p:sp>
+        <p:nvSpPr>
+          <p:cNvPr id="19" name="Text 13"/>
+          <p:cNvSpPr txBox="1"/>
+          <p:nvPr/>
+        </p:nvSpPr>
+        <p:spPr>
+          <a:xfrm>
+            <a:off x="1790395" y="2897733"/>
+            <a:ext cx="9235440" cy="914400"/>
+          </a:xfrm>
+          <a:prstGeom prst="rect">
+            <a:avLst/>
+          </a:prstGeom>
+          <a:noFill/>
+          <a:ln/>
+        </p:spPr>
+        <p:txBody>
+          <a:bodyPr wrap="square" lIns="0" tIns="0" rIns="0" bIns="0" rtlCol="0" anchor="t"/>
+          <a:lstStyle/>
+          <a:p>
+            <a:pPr marL="0" indent="0" algn="l">
+              <a:buNone/>
+            </a:pPr>
+            <a:r>
+              <a:rPr lang="en-US" sz="1050" i="1" dirty="0">
+                <a:solidFill>
+                  <a:srgbClr val="FFFFFF">
+                    <a:alpha val="70000"/>
+                  </a:srgbClr>
+                </a:solidFill>
+                <a:latin typeface="Poppins" pitchFamily="34" charset="0"/>
+                <a:ea typeface="Poppins" pitchFamily="34" charset="-122"/>
+                <a:cs typeface="Poppins" pitchFamily="34" charset="-120"/>
+              </a:rPr>
+              <a:t>In acquisition order: beam PSF blur and astigmatism (Reimer 1998) -&gt; Poisson shot noise at a chosen dose plus Gaussian read noise (Foi et al. 2008; Timischl et al. 2012) -&gt; charging streaks on insulating strips (Cazaux 2004) -&gt; raster shear and per-row jitter, modelled separately from fixed barrel/pincushion scan nonlinearity because they are physically distinct error classes (Sutton et al. 2006) -&gt; exact 10x area-average decimation -&gt; residual rotation (+/-4 deg) and scale drift (9:1-11:1). Structural effects are applied at render time, where they belong: capillary pattern collapse (Tanaka et al. 1993), CD bias and line-edge roughness (Orji et al. 2018), corner rounding.</a:t>
+            </a:r>
+            <a:endParaRPr lang="en-US" sz="1200" dirty="0"/>
+          </a:p>
+        </p:txBody>
+      </p:sp>
+      <p:sp>
+        <p:nvSpPr>
+          <p:cNvPr id="20" name="Shape 14"/>
+          <p:cNvSpPr/>
+          <p:nvPr/>
+        </p:nvSpPr>
+        <p:spPr>
+          <a:xfrm>
+            <a:off x="961949" y="4155034"/>
+            <a:ext cx="476402" cy="476402"/>
+          </a:xfrm>
+          <a:prstGeom prst="ellipse">
+            <a:avLst/>
+          </a:prstGeom>
+          <a:solidFill>
+            <a:srgbClr val="273383">
+              <a:alpha val="50000"/>
+            </a:srgbClr>
+          </a:solidFill>
+          <a:ln w="25400">
+            <a:solidFill>
+              <a:srgbClr val="AEFF82"/>
+            </a:solidFill>
+            <a:prstDash val="solid"/>
+          </a:ln>
+        </p:spPr>
+        <p:txBody>
+          <a:bodyPr/>
+          <a:lstStyle/>
+          <a:p>
+            <a:endParaRPr lang="en-IN"/>
+          </a:p>
+        </p:txBody>
+      </p:sp>
+      <p:pic>
+        <p:nvPicPr>
+          <p:cNvPr id="21" name="Image 4" descr="preencoded.png"/>
+          <p:cNvPicPr>
+            <a:picLocks noChangeAspect="1"/>
+          </p:cNvPicPr>
+          <p:nvPr/>
+        </p:nvPicPr>
+        <p:blipFill>
+          <a:blip r:embed="rId4"/>
+          <a:srcRect l="-80" r="-80"/>
+          <a:stretch/>
+        </p:blipFill>
+        <p:spPr>
+          <a:xfrm>
+            <a:off x="1057046" y="4279392"/>
+            <a:ext cx="286207" cy="228600"/>
+          </a:xfrm>
+          <a:prstGeom prst="rect">
+            <a:avLst/>
+          </a:prstGeom>
+        </p:spPr>
+      </p:pic>
+      <p:sp>
+        <p:nvSpPr>
+          <p:cNvPr id="22" name="Text 15"/>
+          <p:cNvSpPr txBox="1"/>
+          <p:nvPr/>
+        </p:nvSpPr>
+        <p:spPr>
+          <a:xfrm>
+            <a:off x="1628546" y="4155034"/>
+            <a:ext cx="4206240" cy="267005"/>
+          </a:xfrm>
+          <a:prstGeom prst="rect">
+            <a:avLst/>
+          </a:prstGeom>
+          <a:noFill/>
+          <a:ln/>
+        </p:spPr>
+        <p:txBody>
+          <a:bodyPr wrap="square" lIns="0" tIns="0" rIns="0" bIns="0" rtlCol="0" anchor="ctr"/>
+          <a:lstStyle/>
+          <a:p>
+            <a:pPr marL="0" indent="0" algn="l">
+              <a:buNone/>
+            </a:pPr>
+            <a:r>
+              <a:rPr lang="en-US" sz="1500" b="1" dirty="0">
+                <a:solidFill>
+                  <a:srgbClr val="88E555"/>
+                </a:solidFill>
+                <a:latin typeface="Poppins" pitchFamily="34" charset="0"/>
+                <a:ea typeface="Poppins" pitchFamily="34" charset="-122"/>
+                <a:cs typeface="Poppins" pitchFamily="34" charset="-120"/>
+              </a:rPr>
+              <a:t>Coverage, Stated Honestly</a:t>
+            </a:r>
+            <a:endParaRPr lang="en-US" sz="1500" dirty="0"/>
+          </a:p>
+        </p:txBody>
+      </p:sp>
+      <p:sp>
+        <p:nvSpPr>
+          <p:cNvPr id="23" name="Text 16"/>
+          <p:cNvSpPr txBox="1"/>
+          <p:nvPr/>
+        </p:nvSpPr>
+        <p:spPr>
+          <a:xfrm>
+            <a:off x="1628546" y="4497934"/>
+            <a:ext cx="9235440" cy="191110"/>
+          </a:xfrm>
+          <a:prstGeom prst="rect">
+            <a:avLst/>
+          </a:prstGeom>
+          <a:noFill/>
+          <a:ln/>
+        </p:spPr>
+        <p:txBody>
+          <a:bodyPr wrap="square" lIns="0" tIns="0" rIns="0" bIns="0" rtlCol="0" anchor="ctr"/>
+          <a:lstStyle/>
+          <a:p>
+            <a:pPr marL="0" indent="0" algn="l">
+              <a:buNone/>
+            </a:pPr>
+            <a:r>
+              <a:rPr lang="en-US" sz="1000" dirty="0">
+                <a:solidFill>
+                  <a:srgbClr val="D1D5DB"/>
+                </a:solidFill>
+                <a:latin typeface="Poppins" pitchFamily="34" charset="0"/>
+                <a:ea typeface="Poppins" pitchFamily="34" charset="-122"/>
+                <a:cs typeface="Poppins" pitchFamily="34" charset="-120"/>
+              </a:rPr>
+              <a:t>Of the 22 mechanisms, 14 carry a source treating that exact effect; 6 are standard models anchored to a textbook chapter; 2 are not physical degradations at all.</a:t>
+            </a:r>
+            <a:endParaRPr lang="en-US" sz="1000" dirty="0"/>
+          </a:p>
+        </p:txBody>
+      </p:sp>
+      <p:sp>
+        <p:nvSpPr>
+          <p:cNvPr id="24" name="Shape 17"/>
+          <p:cNvSpPr/>
+          <p:nvPr/>
+        </p:nvSpPr>
+        <p:spPr>
+          <a:xfrm>
+            <a:off x="1628546" y="4764938"/>
+            <a:ext cx="9601200" cy="1410005"/>
+          </a:xfrm>
+          <a:prstGeom prst="roundRect">
+            <a:avLst>
+              <a:gd name="adj" fmla="val 3505"/>
+            </a:avLst>
+          </a:prstGeom>
+          <a:solidFill>
+            <a:srgbClr val="1E3A8A">
+              <a:alpha val="40000"/>
+            </a:srgbClr>
+          </a:solidFill>
+          <a:ln w="12700">
+            <a:solidFill>
+              <a:srgbClr val="1D4ED8"/>
+            </a:solidFill>
+            <a:prstDash val="solid"/>
+          </a:ln>
+        </p:spPr>
+        <p:txBody>
+          <a:bodyPr/>
+          <a:lstStyle/>
+          <a:p>
+            <a:endParaRPr lang="en-IN"/>
+          </a:p>
+        </p:txBody>
+      </p:sp>
+      <p:sp>
+        <p:nvSpPr>
+          <p:cNvPr id="25" name="Shape 18"/>
+          <p:cNvSpPr/>
+          <p:nvPr/>
+        </p:nvSpPr>
+        <p:spPr>
+          <a:xfrm>
+            <a:off x="1790395" y="5232197"/>
+            <a:ext cx="9277502" cy="9144"/>
+          </a:xfrm>
+          <a:prstGeom prst="rect">
+            <a:avLst/>
+          </a:prstGeom>
+          <a:solidFill>
+            <a:srgbClr val="1E40AF">
+              <a:alpha val="30000"/>
+            </a:srgbClr>
+          </a:solidFill>
+          <a:ln/>
+        </p:spPr>
+        <p:txBody>
+          <a:bodyPr/>
+          <a:lstStyle/>
+          <a:p>
+            <a:endParaRPr lang="en-IN"/>
+          </a:p>
+        </p:txBody>
+      </p:sp>
+      <p:sp>
+        <p:nvSpPr>
+          <p:cNvPr id="26" name="Text 19"/>
+          <p:cNvSpPr txBox="1"/>
+          <p:nvPr/>
+        </p:nvSpPr>
+        <p:spPr>
+          <a:xfrm>
+            <a:off x="1790395" y="4926787"/>
+            <a:ext cx="9235440" cy="274320"/>
+          </a:xfrm>
+          <a:prstGeom prst="rect">
+            <a:avLst/>
+          </a:prstGeom>
+          <a:noFill/>
+          <a:ln/>
+        </p:spPr>
+        <p:txBody>
+          <a:bodyPr wrap="square" lIns="0" tIns="0" rIns="0" bIns="0" rtlCol="0" anchor="ctr"/>
+          <a:lstStyle/>
+          <a:p>
+            <a:pPr marL="0" indent="0" algn="l">
+              <a:buNone/>
+            </a:pPr>
+            <a:r>
+              <a:rPr lang="en-US" sz="1000" dirty="0">
+                <a:solidFill>
+                  <a:srgbClr val="FFFFFF">
+                    <a:alpha val="80000"/>
+                  </a:srgbClr>
+                </a:solidFill>
+                <a:latin typeface="Poppins" pitchFamily="34" charset="0"/>
+                <a:ea typeface="Poppins" pitchFamily="34" charset="-122"/>
+                <a:cs typeface="Poppins" pitchFamily="34" charset="-120"/>
+              </a:rPr>
+              <a:t>Full mechanism -&gt; code -&gt; source map in references/README.md, with BibTeX in references/BIBLIOGRAPHY.bib; coverage audit in reports/DEGRADATION_COVERAGE.md.</a:t>
+            </a:r>
+            <a:endParaRPr lang="en-US" sz="1200" dirty="0"/>
+          </a:p>
+        </p:txBody>
+      </p:sp>
+      <p:sp>
+        <p:nvSpPr>
+          <p:cNvPr id="27" name="Shape 20"/>
+          <p:cNvSpPr/>
+          <p:nvPr/>
+        </p:nvSpPr>
+        <p:spPr>
+          <a:xfrm>
+            <a:off x="1790395" y="5661050"/>
+            <a:ext cx="9277502" cy="9144"/>
+          </a:xfrm>
+          <a:prstGeom prst="rect">
+            <a:avLst/>
+          </a:prstGeom>
+          <a:solidFill>
+            <a:srgbClr val="1E40AF">
+              <a:alpha val="30000"/>
+            </a:srgbClr>
+          </a:solidFill>
+          <a:ln/>
+        </p:spPr>
+        <p:txBody>
+          <a:bodyPr/>
+          <a:lstStyle/>
+          <a:p>
+            <a:endParaRPr lang="en-IN"/>
+          </a:p>
+        </p:txBody>
+      </p:sp>
+      <p:sp>
+        <p:nvSpPr>
+          <p:cNvPr id="28" name="Text 21"/>
+          <p:cNvSpPr txBox="1"/>
+          <p:nvPr/>
+        </p:nvSpPr>
+        <p:spPr>
+          <a:xfrm>
+            <a:off x="1790395" y="5355641"/>
+            <a:ext cx="9235440" cy="274320"/>
+          </a:xfrm>
+          <a:prstGeom prst="rect">
+            <a:avLst/>
+          </a:prstGeom>
+          <a:noFill/>
+          <a:ln/>
+        </p:spPr>
+        <p:txBody>
+          <a:bodyPr wrap="square" lIns="0" tIns="0" rIns="0" bIns="0" rtlCol="0" anchor="ctr"/>
+          <a:lstStyle/>
+          <a:p>
+            <a:pPr marL="0" indent="0" algn="l">
+              <a:buNone/>
+            </a:pPr>
+            <a:r>
+              <a:rPr lang="en-US" sz="1000" dirty="0">
+                <a:solidFill>
+                  <a:srgbClr val="FFFFFF">
+                    <a:alpha val="80000"/>
+                  </a:srgbClr>
+                </a:solidFill>
+                <a:latin typeface="Poppins" pitchFamily="34" charset="0"/>
+                <a:ea typeface="Poppins" pitchFamily="34" charset="-122"/>
+                <a:cs typeface="Poppins" pitchFamily="34" charset="-120"/>
+              </a:rPr>
+              <a:t>Not dressed up: a row whose justification is "standard radial falloff model" is labelled exactly that, rather than given a loosely-related citation.</a:t>
+            </a:r>
+            <a:endParaRPr lang="en-US" sz="1200" dirty="0"/>
+          </a:p>
+        </p:txBody>
+      </p:sp>
+      <p:sp>
+        <p:nvSpPr>
+          <p:cNvPr id="29" name="Text 22"/>
+          <p:cNvSpPr txBox="1"/>
+          <p:nvPr/>
+        </p:nvSpPr>
+        <p:spPr>
+          <a:xfrm>
+            <a:off x="1790395" y="5783580"/>
+            <a:ext cx="9235440" cy="274320"/>
+          </a:xfrm>
+          <a:prstGeom prst="rect">
+            <a:avLst/>
+          </a:prstGeom>
+          <a:noFill/>
+          <a:ln/>
+        </p:spPr>
+        <p:txBody>
+          <a:bodyPr wrap="square" lIns="0" tIns="0" rIns="0" bIns="0" rtlCol="0" anchor="ctr"/>
+          <a:lstStyle/>
+          <a:p>
+            <a:pPr marL="0" indent="0" algn="l">
+              <a:buNone/>
+            </a:pPr>
+            <a:r>
+              <a:rPr lang="en-US" sz="1000" dirty="0">
+                <a:solidFill>
+                  <a:srgbClr val="FFFFFF">
+                    <a:alpha val="80000"/>
+                  </a:srgbClr>
+                </a:solidFill>
+                <a:latin typeface="Poppins" pitchFamily="34" charset="0"/>
+                <a:ea typeface="Poppins" pitchFamily="34" charset="-122"/>
+                <a:cs typeface="Poppins" pitchFamily="34" charset="-120"/>
+              </a:rPr>
+              <a:t>The Applied Materials / Hugging Face reference generator was read for coverage comparison only — never imported, copied or executed.</a:t>
+            </a:r>
+            <a:endParaRPr lang="en-US" sz="1200" dirty="0"/>
+          </a:p>
+        </p:txBody>
+      </p:sp>
+      <p:pic>
+        <p:nvPicPr>
+          <p:cNvPr id="30" name="Picture 29">
+            <a:extLst>
+              <a:ext uri="{FF2B5EF4-FFF2-40B4-BE49-F238E27FC236}">
+                <a16:creationId xmlns:a16="http://schemas.microsoft.com/office/drawing/2014/main" id="{135E3709-F1C8-6E84-EA51-720EFCF71B26}"/>
+              </a:ext>
+            </a:extLst>
+          </p:cNvPr>
+          <p:cNvPicPr>
+            <a:picLocks noChangeAspect="1"/>
+          </p:cNvPicPr>
+          <p:nvPr/>
+        </p:nvPicPr>
+        <p:blipFill>
+          <a:blip r:embed="rId5"/>
+          <a:stretch>
+            <a:fillRect/>
+          </a:stretch>
+        </p:blipFill>
+        <p:spPr>
+          <a:xfrm>
+            <a:off x="5292164" y="227710"/>
+            <a:ext cx="1607366" cy="783591"/>
+          </a:xfrm>
+          <a:prstGeom prst="rect">
+            <a:avLst/>
+          </a:prstGeom>
+        </p:spPr>
+      </p:pic>
+      <p:sp>
+        <p:nvSpPr>
+          <p:cNvPr id="32" name="Shape 1">
+            <a:extLst>
+              <a:ext uri="{FF2B5EF4-FFF2-40B4-BE49-F238E27FC236}">
+                <a16:creationId xmlns:a16="http://schemas.microsoft.com/office/drawing/2014/main" id="{3E27E131-AC1D-E75C-0267-02565ACC1BC3}"/>
+              </a:ext>
+            </a:extLst>
+          </p:cNvPr>
+          <p:cNvSpPr/>
+          <p:nvPr/>
+        </p:nvSpPr>
+        <p:spPr>
+          <a:xfrm>
+            <a:off x="571500" y="259714"/>
+            <a:ext cx="11048695" cy="857707"/>
+          </a:xfrm>
+          <a:prstGeom prst="roundRect">
+            <a:avLst>
+              <a:gd name="adj" fmla="val 9476"/>
+            </a:avLst>
+          </a:prstGeom>
+          <a:solidFill>
+            <a:srgbClr val="FFFFFF">
+              <a:alpha val="95000"/>
+            </a:srgbClr>
+          </a:solidFill>
+          <a:ln/>
+          <a:effectLst>
+            <a:outerShdw blurRad="63500" dist="38100" dir="5400000" algn="bl" rotWithShape="0">
+              <a:srgbClr val="000000">
+                <a:alpha val="10000"/>
+              </a:srgbClr>
+            </a:outerShdw>
+          </a:effectLst>
+        </p:spPr>
+        <p:txBody>
+          <a:bodyPr/>
+          <a:lstStyle/>
+          <a:p>
+            <a:endParaRPr lang="en-IN"/>
+          </a:p>
+        </p:txBody>
+      </p:sp>
+      <p:pic>
+        <p:nvPicPr>
+          <p:cNvPr id="33" name="Picture 32">
+            <a:extLst>
+              <a:ext uri="{FF2B5EF4-FFF2-40B4-BE49-F238E27FC236}">
+                <a16:creationId xmlns:a16="http://schemas.microsoft.com/office/drawing/2014/main" id="{1D876DBE-D402-1B41-B952-69F6F5BF98C9}"/>
+              </a:ext>
+            </a:extLst>
+          </p:cNvPr>
+          <p:cNvPicPr>
+            <a:picLocks noChangeAspect="1"/>
+          </p:cNvPicPr>
+          <p:nvPr/>
+        </p:nvPicPr>
+        <p:blipFill>
+          <a:blip r:embed="rId6">
+            <a:extLst>
+              <a:ext uri="{28A0092B-C50C-407E-A947-70E740481C1C}">
+                <a14:useLocalDpi xmlns:a14="http://schemas.microsoft.com/office/drawing/2010/main" val="0"/>
+              </a:ext>
+            </a:extLst>
+          </a:blip>
+          <a:stretch>
+            <a:fillRect/>
+          </a:stretch>
+        </p:blipFill>
+        <p:spPr>
+          <a:xfrm>
+            <a:off x="1514101" y="390016"/>
+            <a:ext cx="9163491" cy="586435"/>
+          </a:xfrm>
+          <a:prstGeom prst="rect">
+            <a:avLst/>
+          </a:prstGeom>
+        </p:spPr>
+      </p:pic>
+    </p:spTree>
+  </p:cSld>
+  <p:clrMapOvr>
+    <a:masterClrMapping/>
+  </p:clrMapOvr>
+</p:sld>
+</file>
+
+<file path=ppt/slides/slide7.xml><?xml version="1.0" encoding="utf-8"?>
+<p:sld xmlns:a="http://schemas.openxmlformats.org/drawingml/2006/main" xmlns:r="http://schemas.openxmlformats.org/officeDocument/2006/relationships" xmlns:p="http://schemas.openxmlformats.org/presentationml/2006/main">
+  <p:cSld name="Slide 5">
+    <p:spTree>
+      <p:nvGrpSpPr>
+        <p:cNvPr id="1" name=""/>
+        <p:cNvGrpSpPr/>
+        <p:nvPr/>
+      </p:nvGrpSpPr>
+      <p:grpSpPr>
+        <a:xfrm>
+          <a:off x="0" y="0"/>
+          <a:ext cx="0" cy="0"/>
+          <a:chOff x="0" y="0"/>
+          <a:chExt cx="0" cy="0"/>
+        </a:xfrm>
+      </p:grpSpPr>
+      <p:sp>
+        <p:nvSpPr>
+          <p:cNvPr id="2" name="Shape 0"/>
+          <p:cNvSpPr/>
+          <p:nvPr/>
+        </p:nvSpPr>
+        <p:spPr>
+          <a:xfrm>
+            <a:off x="0" y="0"/>
+            <a:ext cx="12191695" cy="6858000"/>
+          </a:xfrm>
+          <a:prstGeom prst="rect">
+            <a:avLst/>
+          </a:prstGeom>
+          <a:solidFill>
+            <a:srgbClr val="000036"/>
+          </a:solidFill>
+          <a:ln/>
+        </p:spPr>
+        <p:txBody>
+          <a:bodyPr/>
+          <a:lstStyle/>
+          <a:p>
+            <a:endParaRPr lang="en-IN"/>
+          </a:p>
+        </p:txBody>
+      </p:sp>
+      <p:pic>
+        <p:nvPicPr>
+          <p:cNvPr id="3" name="Image 0" descr="preencoded.png"/>
+          <p:cNvPicPr>
+            <a:picLocks noChangeAspect="1"/>
+          </p:cNvPicPr>
+          <p:nvPr/>
+        </p:nvPicPr>
+        <p:blipFill>
+          <a:blip r:embed="rId2">
+            <a:alphaModFix amt="10000"/>
+          </a:blip>
+          <a:srcRect l="12327" r="12327"/>
+          <a:stretch/>
+        </p:blipFill>
+        <p:spPr>
+          <a:xfrm>
+            <a:off x="0" y="0"/>
+            <a:ext cx="12191695" cy="6858000"/>
+          </a:xfrm>
+          <a:prstGeom prst="rect">
+            <a:avLst/>
+          </a:prstGeom>
+        </p:spPr>
+      </p:pic>
+      <p:sp>
+        <p:nvSpPr>
+          <p:cNvPr id="4" name="Shape 1"/>
+          <p:cNvSpPr/>
+          <p:nvPr/>
+        </p:nvSpPr>
+        <p:spPr>
+          <a:xfrm>
+            <a:off x="571500" y="286207"/>
+            <a:ext cx="11048695" cy="666598"/>
+          </a:xfrm>
+          <a:prstGeom prst="roundRect">
+            <a:avLst>
+              <a:gd name="adj" fmla="val 15677"/>
+            </a:avLst>
+          </a:prstGeom>
+          <a:solidFill>
+            <a:srgbClr val="FFFFFF">
+              <a:alpha val="95000"/>
+            </a:srgbClr>
+          </a:solidFill>
+          <a:ln/>
+          <a:effectLst>
+            <a:outerShdw blurRad="63500" dist="38100" dir="5400000" algn="bl" rotWithShape="0">
+              <a:srgbClr val="000000">
+                <a:alpha val="10000"/>
+              </a:srgbClr>
+            </a:outerShdw>
+          </a:effectLst>
+        </p:spPr>
+        <p:txBody>
+          <a:bodyPr/>
+          <a:lstStyle/>
+          <a:p>
+            <a:endParaRPr lang="en-IN"/>
+          </a:p>
+        </p:txBody>
+      </p:sp>
+      <p:sp>
+        <p:nvSpPr>
+          <p:cNvPr id="7" name="Shape 2"/>
+          <p:cNvSpPr/>
+          <p:nvPr/>
+        </p:nvSpPr>
+        <p:spPr>
+          <a:xfrm>
+            <a:off x="571500" y="1333195"/>
+            <a:ext cx="75895" cy="409651"/>
+          </a:xfrm>
+          <a:prstGeom prst="rect">
+            <a:avLst/>
+          </a:prstGeom>
+          <a:solidFill>
+            <a:srgbClr val="88E555"/>
+          </a:solidFill>
+          <a:ln/>
+        </p:spPr>
+        <p:txBody>
+          <a:bodyPr/>
+          <a:lstStyle/>
+          <a:p>
+            <a:endParaRPr lang="en-IN"/>
+          </a:p>
+        </p:txBody>
+      </p:sp>
+      <p:sp>
+        <p:nvSpPr>
+          <p:cNvPr id="8" name="Text 3"/>
+          <p:cNvSpPr txBox="1"/>
+          <p:nvPr/>
+        </p:nvSpPr>
+        <p:spPr>
+          <a:xfrm>
+            <a:off x="838505" y="1295705"/>
+            <a:ext cx="9692640" cy="467258"/>
+          </a:xfrm>
+          <a:prstGeom prst="rect">
+            <a:avLst/>
+          </a:prstGeom>
+          <a:noFill/>
+          <a:ln/>
+        </p:spPr>
+        <p:txBody>
+          <a:bodyPr wrap="square" lIns="0" tIns="0" rIns="0" bIns="0" rtlCol="0" anchor="ctr"/>
+          <a:lstStyle/>
+          <a:p>
+            <a:r>
+              <a:rPr lang="en-US" sz="2600" b="1" dirty="0">
+                <a:solidFill>
+                  <a:srgbClr val="FFFFFF"/>
+                </a:solidFill>
+                <a:latin typeface="Poppins" pitchFamily="34" charset="0"/>
+                <a:ea typeface="Poppins" pitchFamily="34" charset="-122"/>
+                <a:cs typeface="Poppins" pitchFamily="34" charset="-120"/>
+              </a:rPr>
+              <a:t>Experiment Setup and Test Diversity</a:t>
+            </a:r>
+            <a:endParaRPr lang="en-US" sz="2600" dirty="0"/>
+          </a:p>
+        </p:txBody>
+      </p:sp>
+      <p:sp>
+        <p:nvSpPr>
+          <p:cNvPr id="9" name="Shape 4"/>
+          <p:cNvSpPr/>
+          <p:nvPr/>
+        </p:nvSpPr>
+        <p:spPr>
+          <a:xfrm>
+            <a:off x="571500" y="2021738"/>
+            <a:ext cx="11048695" cy="4552798"/>
+          </a:xfrm>
+          <a:prstGeom prst="roundRect">
+            <a:avLst>
+              <a:gd name="adj" fmla="val 672"/>
+            </a:avLst>
+          </a:prstGeom>
+          <a:solidFill>
+            <a:srgbClr val="FFFFFF">
+              <a:alpha val="5000"/>
+            </a:srgbClr>
+          </a:solidFill>
+          <a:ln w="12700">
+            <a:solidFill>
+              <a:srgbClr val="88E555">
+                <a:alpha val="30000"/>
+              </a:srgbClr>
+            </a:solidFill>
+            <a:prstDash val="solid"/>
+          </a:ln>
+        </p:spPr>
+        <p:txBody>
+          <a:bodyPr/>
+          <a:lstStyle/>
+          <a:p>
+            <a:endParaRPr lang="en-IN"/>
+          </a:p>
+        </p:txBody>
+      </p:sp>
+      <p:sp>
+        <p:nvSpPr>
+          <p:cNvPr id="10" name="Shape 5"/>
+          <p:cNvSpPr/>
+          <p:nvPr/>
+        </p:nvSpPr>
+        <p:spPr>
+          <a:xfrm>
+            <a:off x="571500" y="2021738"/>
+            <a:ext cx="190195" cy="190195"/>
+          </a:xfrm>
+          <a:prstGeom prst="roundRect">
+            <a:avLst>
+              <a:gd name="adj" fmla="val 192308"/>
+            </a:avLst>
+          </a:prstGeom>
+          <a:noFill/>
+          <a:ln w="38100">
+            <a:solidFill>
+              <a:srgbClr val="88E555"/>
+            </a:solidFill>
+            <a:prstDash val="solid"/>
+          </a:ln>
+        </p:spPr>
+        <p:txBody>
+          <a:bodyPr/>
+          <a:lstStyle/>
+          <a:p>
+            <a:endParaRPr lang="en-IN"/>
+          </a:p>
+        </p:txBody>
+      </p:sp>
+      <p:sp>
+        <p:nvSpPr>
+          <p:cNvPr id="11" name="Shape 6"/>
+          <p:cNvSpPr/>
+          <p:nvPr/>
+        </p:nvSpPr>
+        <p:spPr>
+          <a:xfrm>
+            <a:off x="11430000" y="2021738"/>
+            <a:ext cx="190195" cy="190195"/>
+          </a:xfrm>
+          <a:prstGeom prst="rect">
+            <a:avLst/>
+          </a:prstGeom>
+          <a:noFill/>
+          <a:ln w="38100">
+            <a:solidFill>
+              <a:srgbClr val="88E555"/>
+            </a:solidFill>
+            <a:prstDash val="solid"/>
+          </a:ln>
+        </p:spPr>
+        <p:txBody>
+          <a:bodyPr/>
+          <a:lstStyle/>
+          <a:p>
+            <a:endParaRPr lang="en-IN"/>
+          </a:p>
+        </p:txBody>
+      </p:sp>
+      <p:sp>
+        <p:nvSpPr>
+          <p:cNvPr id="12" name="Shape 7"/>
+          <p:cNvSpPr/>
+          <p:nvPr/>
+        </p:nvSpPr>
+        <p:spPr>
+          <a:xfrm>
+            <a:off x="571500" y="6381598"/>
+            <a:ext cx="190195" cy="190195"/>
+          </a:xfrm>
+          <a:prstGeom prst="rect">
+            <a:avLst/>
+          </a:prstGeom>
+          <a:noFill/>
+          <a:ln w="38100">
+            <a:solidFill>
+              <a:srgbClr val="88E555"/>
+            </a:solidFill>
+            <a:prstDash val="solid"/>
+          </a:ln>
+        </p:spPr>
+        <p:txBody>
+          <a:bodyPr/>
+          <a:lstStyle/>
+          <a:p>
+            <a:endParaRPr lang="en-IN"/>
+          </a:p>
+        </p:txBody>
+      </p:sp>
+      <p:sp>
+        <p:nvSpPr>
+          <p:cNvPr id="13" name="Shape 8"/>
+          <p:cNvSpPr/>
+          <p:nvPr/>
+        </p:nvSpPr>
+        <p:spPr>
+          <a:xfrm>
+            <a:off x="11430000" y="6381598"/>
+            <a:ext cx="190195" cy="190195"/>
+          </a:xfrm>
+          <a:prstGeom prst="rect">
+            <a:avLst/>
+          </a:prstGeom>
+          <a:noFill/>
+          <a:ln w="38100">
+            <a:solidFill>
+              <a:srgbClr val="88E555"/>
+            </a:solidFill>
+            <a:prstDash val="solid"/>
+          </a:ln>
+        </p:spPr>
+        <p:txBody>
+          <a:bodyPr/>
+          <a:lstStyle/>
+          <a:p>
+            <a:endParaRPr lang="en-IN"/>
+          </a:p>
+        </p:txBody>
+      </p:sp>
+      <p:sp>
+        <p:nvSpPr>
+          <p:cNvPr id="14" name="Shape 9"/>
+          <p:cNvSpPr/>
+          <p:nvPr/>
+        </p:nvSpPr>
+        <p:spPr>
+          <a:xfrm>
+            <a:off x="961949" y="2412187"/>
+            <a:ext cx="571500" cy="571500"/>
+          </a:xfrm>
+          <a:prstGeom prst="ellipse">
+            <a:avLst/>
+          </a:prstGeom>
+          <a:solidFill>
+            <a:srgbClr val="273383">
+              <a:alpha val="50000"/>
+            </a:srgbClr>
+          </a:solidFill>
+          <a:ln w="25400">
+            <a:solidFill>
+              <a:srgbClr val="AEFF82"/>
+            </a:solidFill>
+            <a:prstDash val="solid"/>
+          </a:ln>
+        </p:spPr>
+        <p:txBody>
+          <a:bodyPr/>
+          <a:lstStyle/>
+          <a:p>
+            <a:endParaRPr lang="en-IN"/>
+          </a:p>
+        </p:txBody>
+      </p:sp>
+      <p:pic>
+        <p:nvPicPr>
+          <p:cNvPr id="15" name="Image 3" descr="preencoded.png"/>
+          <p:cNvPicPr>
+            <a:picLocks noChangeAspect="1"/>
+          </p:cNvPicPr>
+          <p:nvPr/>
+        </p:nvPicPr>
+        <p:blipFill>
+          <a:blip r:embed="rId3"/>
+          <a:srcRect l="-80" r="-80"/>
+          <a:stretch/>
+        </p:blipFill>
+        <p:spPr>
+          <a:xfrm>
+            <a:off x="1104595" y="2583180"/>
+            <a:ext cx="286207" cy="228600"/>
+          </a:xfrm>
+          <a:prstGeom prst="rect">
+            <a:avLst/>
+          </a:prstGeom>
+        </p:spPr>
+      </p:pic>
+      <p:sp>
+        <p:nvSpPr>
+          <p:cNvPr id="16" name="Text 10"/>
+          <p:cNvSpPr txBox="1"/>
+          <p:nvPr/>
+        </p:nvSpPr>
+        <p:spPr>
+          <a:xfrm>
+            <a:off x="961949" y="3193085"/>
+            <a:ext cx="10172700" cy="685800"/>
+          </a:xfrm>
+          <a:prstGeom prst="rect">
+            <a:avLst/>
+          </a:prstGeom>
+          <a:noFill/>
+          <a:ln/>
+        </p:spPr>
+        <p:txBody>
+          <a:bodyPr wrap="square" lIns="0" tIns="0" rIns="0" bIns="0" rtlCol="0" anchor="ctr"/>
+          <a:lstStyle/>
+          <a:p>
+            <a:pPr marL="0" indent="0" algn="l">
+              <a:buNone/>
+            </a:pPr>
+            <a:r>
+              <a:rPr lang="en-US" sz="1800" dirty="0">
+                <a:solidFill>
+                  <a:srgbClr val="AEFF82">
+                    <a:alpha val="80000"/>
+                  </a:srgbClr>
+                </a:solidFill>
+                <a:latin typeface="Poppins" pitchFamily="34" charset="0"/>
+                <a:ea typeface="Poppins" pitchFamily="34" charset="-122"/>
+                <a:cs typeface="Poppins" pitchFamily="34" charset="-120"/>
+              </a:rPr>
+              <a:t>156 pairs, 16 structural families, 5 splits — hard cases separated out on purpose, not sampled uniformly.</a:t>
+            </a:r>
+            <a:endParaRPr lang="en-US" sz="1800" dirty="0"/>
+          </a:p>
+        </p:txBody>
+      </p:sp>
+      <p:sp>
+        <p:nvSpPr>
+          <p:cNvPr id="17" name="Shape 11"/>
+          <p:cNvSpPr/>
+          <p:nvPr/>
+        </p:nvSpPr>
+        <p:spPr>
+          <a:xfrm>
+            <a:off x="961949" y="4134001"/>
+            <a:ext cx="10267798" cy="2306903"/>
+          </a:xfrm>
+          <a:prstGeom prst="roundRect">
+            <a:avLst>
+              <a:gd name="adj" fmla="val 4277"/>
+            </a:avLst>
+          </a:prstGeom>
+          <a:solidFill>
+            <a:srgbClr val="1E3A8A">
+              <a:alpha val="40000"/>
+            </a:srgbClr>
+          </a:solidFill>
+          <a:ln w="12700">
+            <a:solidFill>
+              <a:srgbClr val="1D4ED8"/>
+            </a:solidFill>
+            <a:prstDash val="solid"/>
+          </a:ln>
+        </p:spPr>
+        <p:txBody>
+          <a:bodyPr/>
+          <a:lstStyle/>
+          <a:p>
+            <a:endParaRPr lang="en-IN"/>
+          </a:p>
+        </p:txBody>
+      </p:sp>
+      <p:sp>
+        <p:nvSpPr>
+          <p:cNvPr id="18" name="Text 12"/>
+          <p:cNvSpPr txBox="1"/>
+          <p:nvPr/>
+        </p:nvSpPr>
+        <p:spPr>
+          <a:xfrm>
+            <a:off x="1200607" y="4372661"/>
+            <a:ext cx="8961120" cy="191110"/>
+          </a:xfrm>
+          <a:prstGeom prst="rect">
+            <a:avLst/>
+          </a:prstGeom>
+          <a:noFill/>
+          <a:ln/>
+        </p:spPr>
+        <p:txBody>
+          <a:bodyPr wrap="square" lIns="0" tIns="0" rIns="0" bIns="0" rtlCol="0" anchor="ctr"/>
+          <a:lstStyle/>
+          <a:p>
+            <a:pPr marL="0" indent="0" algn="l">
+              <a:buNone/>
+            </a:pPr>
+            <a:r>
+              <a:rPr lang="en-US" sz="1000" b="1" dirty="0">
+                <a:solidFill>
+                  <a:srgbClr val="9CA3AF"/>
+                </a:solidFill>
+                <a:latin typeface="Poppins" pitchFamily="34" charset="0"/>
+                <a:ea typeface="Poppins" pitchFamily="34" charset="-122"/>
+                <a:cs typeface="Poppins" pitchFamily="34" charset="-120"/>
+              </a:rPr>
+              <a:t>SPLITS, FAMILIES AND WHAT EACH ONE IS FOR</a:t>
+            </a:r>
+            <a:endParaRPr lang="en-US" sz="1000" dirty="0"/>
+          </a:p>
+        </p:txBody>
+      </p:sp>
+      <p:sp>
+        <p:nvSpPr>
+          <p:cNvPr id="19" name="Text 13"/>
+          <p:cNvSpPr txBox="1"/>
+          <p:nvPr/>
+        </p:nvSpPr>
+        <p:spPr>
+          <a:xfrm>
+            <a:off x="1200607" y="4648810"/>
+            <a:ext cx="8996782" cy="1572768"/>
+          </a:xfrm>
+          <a:prstGeom prst="rect">
+            <a:avLst/>
+          </a:prstGeom>
+          <a:noFill/>
+          <a:ln/>
+        </p:spPr>
+        <p:txBody>
+          <a:bodyPr wrap="square" lIns="0" tIns="0" rIns="0" bIns="0" rtlCol="0" anchor="t"/>
+          <a:lstStyle/>
+          <a:p>
+            <a:pPr marL="0" indent="0" algn="l">
+              <a:lnSpc>
+                <a:spcPct val="115000"/>
+              </a:lnSpc>
+              <a:spcAft>
+                <a:spcPts val="400"/>
+              </a:spcAft>
+              <a:buNone/>
+            </a:pPr>
+            <a:r>
+              <a:rPr sz="1050" dirty="0">
+                <a:solidFill>
+                  <a:srgbClr val="FFFFFF"/>
+                </a:solidFill>
+                <a:latin typeface="Poppins"/>
+              </a:rPr>
+              <a:t>Splits: development 24 (tuning only) - validation 40 (gate criterion 1) - </a:t>
+            </a:r>
+            <a:r>
+              <a:rPr sz="1050" dirty="0" err="1">
+                <a:solidFill>
+                  <a:srgbClr val="FFFFFF"/>
+                </a:solidFill>
+                <a:latin typeface="Poppins"/>
+              </a:rPr>
+              <a:t>held_out</a:t>
+            </a:r>
+            <a:r>
+              <a:rPr sz="1050" dirty="0">
+                <a:solidFill>
+                  <a:srgbClr val="FFFFFF"/>
+                </a:solidFill>
+                <a:latin typeface="Poppins"/>
+              </a:rPr>
+              <a:t> 40 (gate criterion 2) - challenge 32 (hardest combined conditions) - </a:t>
+            </a:r>
+            <a:r>
+              <a:rPr sz="1050" dirty="0" err="1">
+                <a:solidFill>
+                  <a:srgbClr val="FFFFFF"/>
+                </a:solidFill>
+                <a:latin typeface="Poppins"/>
+              </a:rPr>
+              <a:t>cross_generator</a:t>
+            </a:r>
+            <a:r>
+              <a:rPr sz="1050" dirty="0">
+                <a:solidFill>
+                  <a:srgbClr val="FFFFFF"/>
+                </a:solidFill>
+                <a:latin typeface="Poppins"/>
+              </a:rPr>
+              <a:t> 20, an EXTERNAL surface generated by the </a:t>
+            </a:r>
+            <a:r>
+              <a:rPr sz="1050" dirty="0" err="1">
+                <a:solidFill>
+                  <a:srgbClr val="FFFFFF"/>
+                </a:solidFill>
+                <a:latin typeface="Poppins"/>
+              </a:rPr>
+              <a:t>organisers'</a:t>
+            </a:r>
+            <a:r>
+              <a:rPr sz="1050" dirty="0">
+                <a:solidFill>
+                  <a:srgbClr val="FFFFFF"/>
+                </a:solidFill>
+                <a:latin typeface="Poppins"/>
+              </a:rPr>
+              <a:t> own reference generator, never by our code. Total 156, well past the 30-pair minimum.</a:t>
+            </a:r>
+            <a:endParaRPr lang="en-US" sz="1300" dirty="0"/>
+          </a:p>
+          <a:p>
+            <a:pPr>
+              <a:lnSpc>
+                <a:spcPct val="115000"/>
+              </a:lnSpc>
+              <a:spcAft>
+                <a:spcPts val="400"/>
+              </a:spcAft>
+            </a:pPr>
+            <a:r>
+              <a:rPr sz="1050" dirty="0">
+                <a:solidFill>
+                  <a:srgbClr val="FFFFFF"/>
+                </a:solidFill>
+                <a:latin typeface="Poppins"/>
+              </a:rPr>
+              <a:t>Families span the axes independently so effects can be attributed: crop placement (deep single-mat, mat boundary, strip anchor, multi-mat), acquisition degradation (heavy noise, vignette/gamma, </a:t>
+            </a:r>
+            <a:r>
+              <a:rPr sz="1050" dirty="0" err="1">
+                <a:solidFill>
+                  <a:srgbClr val="FFFFFF"/>
+                </a:solidFill>
+                <a:latin typeface="Poppins"/>
+              </a:rPr>
+              <a:t>barrel+charging</a:t>
+            </a:r>
+            <a:r>
+              <a:rPr sz="1050" dirty="0">
+                <a:solidFill>
+                  <a:srgbClr val="FFFFFF"/>
+                </a:solidFill>
+                <a:latin typeface="Poppins"/>
+              </a:rPr>
+              <a:t>, </a:t>
+            </a:r>
+            <a:r>
+              <a:rPr sz="1050" dirty="0" err="1">
+                <a:solidFill>
+                  <a:srgbClr val="FFFFFF"/>
+                </a:solidFill>
+                <a:latin typeface="Poppins"/>
+              </a:rPr>
+              <a:t>speckle+salt-pepper</a:t>
+            </a:r>
+            <a:r>
+              <a:rPr sz="1050" dirty="0">
+                <a:solidFill>
+                  <a:srgbClr val="FFFFFF"/>
+                </a:solidFill>
+                <a:latin typeface="Poppins"/>
+              </a:rPr>
+              <a:t>), and geometric drift (rotation, scale, combined worst case).</a:t>
+            </a:r>
+          </a:p>
+          <a:p>
+            <a:pPr>
+              <a:lnSpc>
+                <a:spcPct val="115000"/>
+              </a:lnSpc>
+              <a:spcAft>
+                <a:spcPts val="0"/>
+              </a:spcAft>
+            </a:pPr>
+            <a:r>
+              <a:rPr sz="1050" dirty="0">
+                <a:solidFill>
+                  <a:srgbClr val="FFFFFF"/>
+                </a:solidFill>
+                <a:latin typeface="Poppins"/>
+              </a:rPr>
+              <a:t>Everything is seeded and regenerable: dataset seed 777001, generator version driftsensev2.1.0, OpenCV pinned exactly — its 4.x-&gt;5.x </a:t>
+            </a:r>
+            <a:r>
+              <a:rPr sz="1050" dirty="0" err="1">
+                <a:solidFill>
+                  <a:srgbClr val="FFFFFF"/>
+                </a:solidFill>
+                <a:latin typeface="Poppins"/>
+              </a:rPr>
+              <a:t>numerics</a:t>
+            </a:r>
+            <a:r>
+              <a:rPr sz="1050" dirty="0">
+                <a:solidFill>
+                  <a:srgbClr val="FFFFFF"/>
+                </a:solidFill>
+                <a:latin typeface="Poppins"/>
+              </a:rPr>
+              <a:t> change </a:t>
+            </a:r>
+            <a:r>
+              <a:rPr sz="1050" dirty="0" err="1">
+                <a:solidFill>
+                  <a:srgbClr val="FFFFFF"/>
+                </a:solidFill>
+                <a:latin typeface="Poppins"/>
+              </a:rPr>
+              <a:t>warpAffine</a:t>
+            </a:r>
+            <a:r>
+              <a:rPr sz="1050" dirty="0">
+                <a:solidFill>
+                  <a:srgbClr val="FFFFFF"/>
+                </a:solidFill>
+                <a:latin typeface="Poppins"/>
+              </a:rPr>
+              <a:t>/remap output enough to move pooled accuracy by points.</a:t>
+            </a:r>
+          </a:p>
+        </p:txBody>
+      </p:sp>
+      <p:pic>
+        <p:nvPicPr>
+          <p:cNvPr id="20" name="Picture 19">
+            <a:extLst>
+              <a:ext uri="{FF2B5EF4-FFF2-40B4-BE49-F238E27FC236}">
+                <a16:creationId xmlns:a16="http://schemas.microsoft.com/office/drawing/2014/main" id="{667D8EB9-0510-8E20-AE50-3B9EC8704685}"/>
+              </a:ext>
+            </a:extLst>
+          </p:cNvPr>
+          <p:cNvPicPr>
+            <a:picLocks noChangeAspect="1"/>
+          </p:cNvPicPr>
+          <p:nvPr/>
+        </p:nvPicPr>
+        <p:blipFill>
+          <a:blip r:embed="rId4"/>
+          <a:stretch>
+            <a:fillRect/>
+          </a:stretch>
+        </p:blipFill>
+        <p:spPr>
+          <a:xfrm>
+            <a:off x="5292164" y="227710"/>
+            <a:ext cx="1607366" cy="783591"/>
+          </a:xfrm>
+          <a:prstGeom prst="rect">
+            <a:avLst/>
+          </a:prstGeom>
+        </p:spPr>
+      </p:pic>
+      <p:sp>
+        <p:nvSpPr>
+          <p:cNvPr id="22" name="Shape 1">
+            <a:extLst>
+              <a:ext uri="{FF2B5EF4-FFF2-40B4-BE49-F238E27FC236}">
+                <a16:creationId xmlns:a16="http://schemas.microsoft.com/office/drawing/2014/main" id="{50164B49-38DE-6195-0A8B-DC6EC6DA2457}"/>
+              </a:ext>
+            </a:extLst>
+          </p:cNvPr>
+          <p:cNvSpPr/>
+          <p:nvPr/>
+        </p:nvSpPr>
+        <p:spPr>
+          <a:xfrm>
+            <a:off x="571500" y="142799"/>
+            <a:ext cx="11048695" cy="857707"/>
+          </a:xfrm>
+          <a:prstGeom prst="roundRect">
+            <a:avLst>
+              <a:gd name="adj" fmla="val 9476"/>
+            </a:avLst>
+          </a:prstGeom>
+          <a:solidFill>
+            <a:srgbClr val="FFFFFF">
+              <a:alpha val="95000"/>
+            </a:srgbClr>
+          </a:solidFill>
+          <a:ln/>
+          <a:effectLst>
+            <a:outerShdw blurRad="63500" dist="38100" dir="5400000" algn="bl" rotWithShape="0">
+              <a:srgbClr val="000000">
+                <a:alpha val="10000"/>
+              </a:srgbClr>
+            </a:outerShdw>
+          </a:effectLst>
+        </p:spPr>
+        <p:txBody>
+          <a:bodyPr/>
+          <a:lstStyle/>
+          <a:p>
+            <a:endParaRPr lang="en-IN"/>
+          </a:p>
+        </p:txBody>
+      </p:sp>
+      <p:pic>
+        <p:nvPicPr>
+          <p:cNvPr id="23" name="Picture 22">
+            <a:extLst>
+              <a:ext uri="{FF2B5EF4-FFF2-40B4-BE49-F238E27FC236}">
+                <a16:creationId xmlns:a16="http://schemas.microsoft.com/office/drawing/2014/main" id="{18A68BD0-3127-AC0B-80B4-CA2643B37A26}"/>
+              </a:ext>
+            </a:extLst>
+          </p:cNvPr>
+          <p:cNvPicPr>
+            <a:picLocks noChangeAspect="1"/>
+          </p:cNvPicPr>
+          <p:nvPr/>
+        </p:nvPicPr>
+        <p:blipFill>
+          <a:blip r:embed="rId5">
+            <a:extLst>
+              <a:ext uri="{28A0092B-C50C-407E-A947-70E740481C1C}">
+                <a14:useLocalDpi xmlns:a14="http://schemas.microsoft.com/office/drawing/2010/main" val="0"/>
+              </a:ext>
+            </a:extLst>
+          </a:blip>
+          <a:stretch>
+            <a:fillRect/>
+          </a:stretch>
+        </p:blipFill>
+        <p:spPr>
+          <a:xfrm>
+            <a:off x="1466553" y="276669"/>
+            <a:ext cx="9163491" cy="586435"/>
+          </a:xfrm>
+          <a:prstGeom prst="rect">
+            <a:avLst/>
+          </a:prstGeom>
+        </p:spPr>
+      </p:pic>
+    </p:spTree>
+  </p:cSld>
+  <p:clrMapOvr>
+    <a:masterClrMapping/>
+  </p:clrMapOvr>
+</p:sld>
+</file>
+
+<file path=ppt/slides/slide8.xml><?xml version="1.0" encoding="utf-8"?>
+<p:sld xmlns:a="http://schemas.openxmlformats.org/drawingml/2006/main" xmlns:r="http://schemas.openxmlformats.org/officeDocument/2006/relationships" xmlns:p="http://schemas.openxmlformats.org/presentationml/2006/main">
+  <p:cSld name="Slide 7">
+    <p:spTree>
+      <p:nvGrpSpPr>
+        <p:cNvPr id="1" name=""/>
+        <p:cNvGrpSpPr/>
+        <p:nvPr/>
+      </p:nvGrpSpPr>
+      <p:grpSpPr>
+        <a:xfrm>
+          <a:off x="0" y="0"/>
+          <a:ext cx="0" cy="0"/>
+          <a:chOff x="0" y="0"/>
+          <a:chExt cx="0" cy="0"/>
+        </a:xfrm>
+      </p:grpSpPr>
+      <p:sp>
+        <p:nvSpPr>
+          <p:cNvPr id="2" name="Shape 0"/>
+          <p:cNvSpPr/>
+          <p:nvPr/>
+        </p:nvSpPr>
+        <p:spPr>
+          <a:xfrm>
+            <a:off x="0" y="0"/>
+            <a:ext cx="12191695" cy="6858000"/>
+          </a:xfrm>
+          <a:prstGeom prst="rect">
+            <a:avLst/>
+          </a:prstGeom>
+          <a:solidFill>
+            <a:srgbClr val="000036"/>
+          </a:solidFill>
+          <a:ln/>
+        </p:spPr>
+        <p:txBody>
+          <a:bodyPr/>
+          <a:lstStyle/>
+          <a:p>
+            <a:endParaRPr lang="en-IN"/>
+          </a:p>
+        </p:txBody>
+      </p:sp>
+      <p:pic>
+        <p:nvPicPr>
+          <p:cNvPr id="3" name="Image 0" descr="preencoded.png"/>
+          <p:cNvPicPr>
+            <a:picLocks noChangeAspect="1"/>
+          </p:cNvPicPr>
+          <p:nvPr/>
+        </p:nvPicPr>
+        <p:blipFill>
+          <a:blip r:embed="rId2">
+            <a:alphaModFix amt="10000"/>
+          </a:blip>
+          <a:srcRect l="12327" r="12327"/>
+          <a:stretch/>
+        </p:blipFill>
+        <p:spPr>
+          <a:xfrm>
+            <a:off x="0" y="0"/>
+            <a:ext cx="12191695" cy="6858000"/>
+          </a:xfrm>
+          <a:prstGeom prst="rect">
+            <a:avLst/>
+          </a:prstGeom>
+        </p:spPr>
+      </p:pic>
+      <p:sp>
+        <p:nvSpPr>
+          <p:cNvPr id="4" name="Shape 1"/>
+          <p:cNvSpPr/>
+          <p:nvPr/>
+        </p:nvSpPr>
+        <p:spPr>
+          <a:xfrm>
+            <a:off x="571500" y="286207"/>
+            <a:ext cx="11048695" cy="666598"/>
+          </a:xfrm>
+          <a:prstGeom prst="roundRect">
+            <a:avLst>
+              <a:gd name="adj" fmla="val 15677"/>
+            </a:avLst>
+          </a:prstGeom>
+          <a:solidFill>
+            <a:srgbClr val="FFFFFF">
+              <a:alpha val="95000"/>
+            </a:srgbClr>
+          </a:solidFill>
+          <a:ln/>
+          <a:effectLst>
+            <a:outerShdw blurRad="63500" dist="38100" dir="5400000" algn="bl" rotWithShape="0">
+              <a:srgbClr val="000000">
+                <a:alpha val="10000"/>
+              </a:srgbClr>
+            </a:outerShdw>
+          </a:effectLst>
+        </p:spPr>
+        <p:txBody>
+          <a:bodyPr/>
+          <a:lstStyle/>
+          <a:p>
+            <a:endParaRPr lang="en-IN"/>
+          </a:p>
+        </p:txBody>
+      </p:sp>
+      <p:sp>
+        <p:nvSpPr>
+          <p:cNvPr id="7" name="Shape 2"/>
+          <p:cNvSpPr/>
+          <p:nvPr/>
+        </p:nvSpPr>
+        <p:spPr>
+          <a:xfrm>
+            <a:off x="571500" y="1333195"/>
+            <a:ext cx="75895" cy="409651"/>
+          </a:xfrm>
+          <a:prstGeom prst="rect">
+            <a:avLst/>
+          </a:prstGeom>
+          <a:solidFill>
+            <a:srgbClr val="88E555"/>
+          </a:solidFill>
+          <a:ln/>
+        </p:spPr>
+        <p:txBody>
+          <a:bodyPr/>
+          <a:lstStyle/>
+          <a:p>
+            <a:endParaRPr lang="en-IN"/>
+          </a:p>
+        </p:txBody>
+      </p:sp>
+      <p:sp>
+        <p:nvSpPr>
+          <p:cNvPr id="8" name="Text 3"/>
+          <p:cNvSpPr txBox="1"/>
+          <p:nvPr/>
+        </p:nvSpPr>
+        <p:spPr>
+          <a:xfrm>
+            <a:off x="838505" y="1295705"/>
+            <a:ext cx="9692640" cy="467258"/>
+          </a:xfrm>
+          <a:prstGeom prst="rect">
+            <a:avLst/>
+          </a:prstGeom>
+          <a:noFill/>
+          <a:ln/>
+        </p:spPr>
+        <p:txBody>
+          <a:bodyPr wrap="square" lIns="0" tIns="0" rIns="0" bIns="0" rtlCol="0" anchor="ctr"/>
+          <a:lstStyle/>
+          <a:p>
+            <a:pPr marL="0" indent="0" algn="l">
+              <a:buNone/>
+            </a:pPr>
+            <a:r>
+              <a:rPr lang="en-US" sz="2600" b="1" dirty="0">
+                <a:solidFill>
+                  <a:srgbClr val="FFFFFF"/>
+                </a:solidFill>
+                <a:latin typeface="Poppins" pitchFamily="34" charset="0"/>
+                <a:ea typeface="Poppins" pitchFamily="34" charset="-122"/>
+                <a:cs typeface="Poppins" pitchFamily="34" charset="-120"/>
+              </a:rPr>
+              <a:t>Accuracy, Error Statistics and Runtime</a:t>
+            </a:r>
+            <a:endParaRPr lang="en-US" sz="2600" dirty="0"/>
+          </a:p>
+        </p:txBody>
+      </p:sp>
+      <p:sp>
+        <p:nvSpPr>
+          <p:cNvPr id="9" name="Shape 4"/>
+          <p:cNvSpPr/>
+          <p:nvPr/>
+        </p:nvSpPr>
+        <p:spPr>
+          <a:xfrm>
+            <a:off x="571500" y="2021738"/>
+            <a:ext cx="11048695" cy="4552798"/>
+          </a:xfrm>
+          <a:prstGeom prst="roundRect">
+            <a:avLst>
+              <a:gd name="adj" fmla="val 672"/>
+            </a:avLst>
+          </a:prstGeom>
+          <a:solidFill>
+            <a:srgbClr val="FFFFFF">
+              <a:alpha val="5000"/>
+            </a:srgbClr>
+          </a:solidFill>
+          <a:ln w="12700">
+            <a:solidFill>
+              <a:srgbClr val="88E555">
+                <a:alpha val="30000"/>
+              </a:srgbClr>
+            </a:solidFill>
+            <a:prstDash val="solid"/>
+          </a:ln>
+        </p:spPr>
+        <p:txBody>
+          <a:bodyPr/>
+          <a:lstStyle/>
+          <a:p>
+            <a:endParaRPr lang="en-IN"/>
+          </a:p>
+        </p:txBody>
+      </p:sp>
+      <p:sp>
+        <p:nvSpPr>
+          <p:cNvPr id="10" name="Shape 5"/>
+          <p:cNvSpPr/>
+          <p:nvPr/>
+        </p:nvSpPr>
+        <p:spPr>
+          <a:xfrm>
+            <a:off x="571500" y="2021738"/>
+            <a:ext cx="190195" cy="190195"/>
+          </a:xfrm>
+          <a:prstGeom prst="roundRect">
+            <a:avLst>
+              <a:gd name="adj" fmla="val 192308"/>
+            </a:avLst>
+          </a:prstGeom>
+          <a:noFill/>
+          <a:ln w="38100">
+            <a:solidFill>
+              <a:srgbClr val="88E555"/>
+            </a:solidFill>
+            <a:prstDash val="solid"/>
+          </a:ln>
+        </p:spPr>
+        <p:txBody>
+          <a:bodyPr/>
+          <a:lstStyle/>
+          <a:p>
+            <a:endParaRPr lang="en-IN"/>
+          </a:p>
+        </p:txBody>
+      </p:sp>
+      <p:sp>
+        <p:nvSpPr>
+          <p:cNvPr id="11" name="Shape 6"/>
+          <p:cNvSpPr/>
+          <p:nvPr/>
+        </p:nvSpPr>
+        <p:spPr>
+          <a:xfrm>
+            <a:off x="11430000" y="2021738"/>
+            <a:ext cx="190195" cy="190195"/>
+          </a:xfrm>
+          <a:prstGeom prst="rect">
+            <a:avLst/>
+          </a:prstGeom>
+          <a:noFill/>
+          <a:ln w="38100">
+            <a:solidFill>
+              <a:srgbClr val="88E555"/>
+            </a:solidFill>
+            <a:prstDash val="solid"/>
+          </a:ln>
+        </p:spPr>
+        <p:txBody>
+          <a:bodyPr/>
+          <a:lstStyle/>
+          <a:p>
+            <a:endParaRPr lang="en-IN"/>
+          </a:p>
+        </p:txBody>
+      </p:sp>
+      <p:sp>
+        <p:nvSpPr>
+          <p:cNvPr id="12" name="Shape 7"/>
+          <p:cNvSpPr/>
+          <p:nvPr/>
+        </p:nvSpPr>
+        <p:spPr>
+          <a:xfrm>
+            <a:off x="571500" y="6381598"/>
+            <a:ext cx="190195" cy="190195"/>
+          </a:xfrm>
+          <a:prstGeom prst="rect">
+            <a:avLst/>
+          </a:prstGeom>
+          <a:noFill/>
+          <a:ln w="38100">
+            <a:solidFill>
+              <a:srgbClr val="88E555"/>
+            </a:solidFill>
+            <a:prstDash val="solid"/>
+          </a:ln>
+        </p:spPr>
+        <p:txBody>
+          <a:bodyPr/>
+          <a:lstStyle/>
+          <a:p>
+            <a:endParaRPr lang="en-IN"/>
+          </a:p>
+        </p:txBody>
+      </p:sp>
+      <p:sp>
+        <p:nvSpPr>
+          <p:cNvPr id="13" name="Shape 8"/>
+          <p:cNvSpPr/>
+          <p:nvPr/>
+        </p:nvSpPr>
+        <p:spPr>
+          <a:xfrm>
+            <a:off x="11430000" y="6381598"/>
+            <a:ext cx="190195" cy="190195"/>
+          </a:xfrm>
+          <a:prstGeom prst="rect">
+            <a:avLst/>
+          </a:prstGeom>
+          <a:noFill/>
+          <a:ln w="38100">
+            <a:solidFill>
+              <a:srgbClr val="88E555"/>
+            </a:solidFill>
+            <a:prstDash val="solid"/>
+          </a:ln>
+        </p:spPr>
+        <p:txBody>
+          <a:bodyPr/>
+          <a:lstStyle/>
+          <a:p>
+            <a:endParaRPr lang="en-IN"/>
+          </a:p>
+        </p:txBody>
+      </p:sp>
+      <p:sp>
+        <p:nvSpPr>
+          <p:cNvPr id="14" name="Shape 9"/>
+          <p:cNvSpPr/>
+          <p:nvPr/>
+        </p:nvSpPr>
+        <p:spPr>
+          <a:xfrm>
+            <a:off x="961949" y="2412187"/>
+            <a:ext cx="571500" cy="571500"/>
+          </a:xfrm>
+          <a:prstGeom prst="ellipse">
+            <a:avLst/>
+          </a:prstGeom>
+          <a:solidFill>
+            <a:srgbClr val="273383">
+              <a:alpha val="50000"/>
+            </a:srgbClr>
+          </a:solidFill>
+          <a:ln w="25400">
+            <a:solidFill>
+              <a:srgbClr val="AEFF82"/>
+            </a:solidFill>
+            <a:prstDash val="solid"/>
+          </a:ln>
+        </p:spPr>
+        <p:txBody>
+          <a:bodyPr/>
+          <a:lstStyle/>
+          <a:p>
+            <a:endParaRPr lang="en-IN"/>
+          </a:p>
+        </p:txBody>
+      </p:sp>
+      <p:pic>
+        <p:nvPicPr>
+          <p:cNvPr id="15" name="Image 3" descr="preencoded.png"/>
+          <p:cNvPicPr>
+            <a:picLocks noChangeAspect="1"/>
+          </p:cNvPicPr>
+          <p:nvPr/>
+        </p:nvPicPr>
+        <p:blipFill>
+          <a:blip r:embed="rId3"/>
+          <a:srcRect/>
+          <a:stretch/>
+        </p:blipFill>
+        <p:spPr>
+          <a:xfrm>
+            <a:off x="1133856" y="2583180"/>
+            <a:ext cx="228600" cy="228600"/>
+          </a:xfrm>
+          <a:prstGeom prst="rect">
+            <a:avLst/>
+          </a:prstGeom>
+        </p:spPr>
+      </p:pic>
+      <p:sp>
+        <p:nvSpPr>
+          <p:cNvPr id="16" name="Text 10"/>
+          <p:cNvSpPr txBox="1"/>
+          <p:nvPr/>
+        </p:nvSpPr>
+        <p:spPr>
+          <a:xfrm>
+            <a:off x="961949" y="3193085"/>
+            <a:ext cx="10239451" cy="685800"/>
+          </a:xfrm>
+          <a:prstGeom prst="rect">
+            <a:avLst/>
+          </a:prstGeom>
+          <a:noFill/>
+          <a:ln/>
+        </p:spPr>
+        <p:txBody>
+          <a:bodyPr wrap="square" lIns="0" tIns="0" rIns="0" bIns="0" rtlCol="0" anchor="ctr"/>
+          <a:lstStyle/>
+          <a:p>
+            <a:pPr marL="0" indent="0" algn="l">
+              <a:buNone/>
+            </a:pPr>
+            <a:r>
+              <a:rPr lang="en-US" sz="1800" dirty="0">
+                <a:solidFill>
+                  <a:srgbClr val="AEFF82">
+                    <a:alpha val="80000"/>
+                  </a:srgbClr>
+                </a:solidFill>
+                <a:latin typeface="Poppins" pitchFamily="34" charset="0"/>
+                <a:ea typeface="Poppins" pitchFamily="34" charset="-122"/>
+                <a:cs typeface="Poppins" pitchFamily="34" charset="-120"/>
+              </a:rPr>
+              <a:t>Identical at 2, 3, 4 and 5 px. That is not a rounding artifact — it is the result.</a:t>
+            </a:r>
+            <a:endParaRPr lang="en-US" sz="1800" dirty="0"/>
+          </a:p>
+        </p:txBody>
+      </p:sp>
+      <p:sp>
+        <p:nvSpPr>
+          <p:cNvPr id="17" name="Shape 11"/>
+          <p:cNvSpPr/>
+          <p:nvPr/>
+        </p:nvSpPr>
+        <p:spPr>
+          <a:xfrm>
+            <a:off x="961949" y="4210812"/>
+            <a:ext cx="5020056" cy="1920240"/>
+          </a:xfrm>
+          <a:prstGeom prst="roundRect">
+            <a:avLst>
+              <a:gd name="adj" fmla="val 4836"/>
+            </a:avLst>
+          </a:prstGeom>
+          <a:solidFill>
+            <a:srgbClr val="1E3A8A">
+              <a:alpha val="40000"/>
+            </a:srgbClr>
+          </a:solidFill>
+          <a:ln w="12700">
+            <a:solidFill>
+              <a:srgbClr val="1D4ED8"/>
+            </a:solidFill>
+            <a:prstDash val="solid"/>
+          </a:ln>
+        </p:spPr>
+        <p:txBody>
+          <a:bodyPr/>
+          <a:lstStyle/>
+          <a:p>
+            <a:endParaRPr lang="en-IN"/>
+          </a:p>
+        </p:txBody>
+      </p:sp>
+      <p:pic>
+        <p:nvPicPr>
+          <p:cNvPr id="18" name="Image 4" descr="preencoded.png"/>
+          <p:cNvPicPr>
+            <a:picLocks noChangeAspect="1"/>
+          </p:cNvPicPr>
+          <p:nvPr/>
+        </p:nvPicPr>
+        <p:blipFill>
+          <a:blip r:embed="rId4"/>
+          <a:srcRect/>
+          <a:stretch/>
+        </p:blipFill>
+        <p:spPr>
+          <a:xfrm>
+            <a:off x="1200607" y="4486961"/>
+            <a:ext cx="152705" cy="152705"/>
+          </a:xfrm>
+          <a:prstGeom prst="rect">
+            <a:avLst/>
+          </a:prstGeom>
+        </p:spPr>
+      </p:pic>
+      <p:sp>
+        <p:nvSpPr>
+          <p:cNvPr id="19" name="Text 12"/>
+          <p:cNvSpPr txBox="1"/>
+          <p:nvPr/>
+        </p:nvSpPr>
+        <p:spPr>
+          <a:xfrm>
+            <a:off x="1466698" y="4448556"/>
+            <a:ext cx="4151376" cy="219456"/>
+          </a:xfrm>
+          <a:prstGeom prst="rect">
+            <a:avLst/>
+          </a:prstGeom>
+          <a:noFill/>
+          <a:ln/>
+        </p:spPr>
+        <p:txBody>
+          <a:bodyPr wrap="square" lIns="0" tIns="0" rIns="0" bIns="0" rtlCol="0" anchor="ctr"/>
+          <a:lstStyle/>
+          <a:p>
+            <a:pPr marL="0" indent="0" algn="l">
+              <a:buNone/>
+            </a:pPr>
+            <a:r>
+              <a:rPr lang="en-US" sz="1200" b="1" dirty="0">
+                <a:solidFill>
+                  <a:srgbClr val="FFFFFF"/>
+                </a:solidFill>
+                <a:latin typeface="Poppins" pitchFamily="34" charset="0"/>
+                <a:ea typeface="Poppins" pitchFamily="34" charset="-122"/>
+                <a:cs typeface="Poppins" pitchFamily="34" charset="-120"/>
+              </a:rPr>
+              <a:t>Pass rates and error distribution</a:t>
+            </a:r>
+            <a:endParaRPr lang="en-US" sz="1200" dirty="0"/>
+          </a:p>
+        </p:txBody>
+      </p:sp>
+      <p:sp>
+        <p:nvSpPr>
+          <p:cNvPr id="20" name="Text 13"/>
+          <p:cNvSpPr txBox="1"/>
+          <p:nvPr/>
+        </p:nvSpPr>
+        <p:spPr>
+          <a:xfrm>
+            <a:off x="1200607" y="4791456"/>
+            <a:ext cx="4148633" cy="1335024"/>
+          </a:xfrm>
+          <a:prstGeom prst="rect">
+            <a:avLst/>
+          </a:prstGeom>
+          <a:noFill/>
+          <a:ln/>
+        </p:spPr>
+        <p:txBody>
+          <a:bodyPr wrap="square" lIns="0" tIns="0" rIns="0" bIns="0" rtlCol="0" anchor="t"/>
+          <a:lstStyle/>
+          <a:p>
+            <a:pPr marL="0" indent="0" algn="l">
+              <a:lnSpc>
+                <a:spcPct val="115000"/>
+              </a:lnSpc>
+              <a:spcAft>
+                <a:spcPts val="0"/>
+              </a:spcAft>
+              <a:buNone/>
+            </a:pPr>
+            <a:r>
+              <a:rPr sz="1050">
+                <a:solidFill>
+                  <a:srgbClr val="D1D5DB"/>
+                </a:solidFill>
+                <a:latin typeface="Poppins"/>
+              </a:rPr>
+              <a:t>@0.5px 66.7% - @1px 72.4% - @2px 77.6% - @3px 77.6% - @4px 77.6% - @5px 77.6% (121/156). Not one pair lands between 2px and 5px of truth: a prediction is either essentially exact or it has locked onto the wrong lattice cell. Median error 0.32px, mean 47.7px, P90 69.8px, P95 433.8px. Catastrophic (&gt;50px) 14.1%. Sub-pixel by parabolic peak fit.</a:t>
+            </a:r>
+            <a:endParaRPr lang="en-US" sz="1000" dirty="0"/>
+          </a:p>
+        </p:txBody>
+      </p:sp>
+      <p:sp>
+        <p:nvSpPr>
+          <p:cNvPr id="21" name="Shape 14"/>
+          <p:cNvSpPr/>
+          <p:nvPr/>
+        </p:nvSpPr>
+        <p:spPr>
+          <a:xfrm>
+            <a:off x="6210605" y="4210812"/>
+            <a:ext cx="5020056" cy="1920240"/>
+          </a:xfrm>
+          <a:prstGeom prst="roundRect">
+            <a:avLst>
+              <a:gd name="adj" fmla="val 4836"/>
+            </a:avLst>
+          </a:prstGeom>
+          <a:solidFill>
+            <a:srgbClr val="1E3A8A">
+              <a:alpha val="40000"/>
+            </a:srgbClr>
+          </a:solidFill>
+          <a:ln w="12700">
+            <a:solidFill>
+              <a:srgbClr val="1D4ED8"/>
+            </a:solidFill>
+            <a:prstDash val="solid"/>
+          </a:ln>
+        </p:spPr>
+        <p:txBody>
+          <a:bodyPr/>
+          <a:lstStyle/>
+          <a:p>
+            <a:endParaRPr lang="en-IN"/>
+          </a:p>
+        </p:txBody>
+      </p:sp>
+      <p:pic>
+        <p:nvPicPr>
+          <p:cNvPr id="22" name="Image 5" descr="preencoded.png"/>
+          <p:cNvPicPr>
+            <a:picLocks noChangeAspect="1"/>
+          </p:cNvPicPr>
+          <p:nvPr/>
+        </p:nvPicPr>
+        <p:blipFill>
+          <a:blip r:embed="rId5"/>
+          <a:srcRect l="-33" r="-33"/>
+          <a:stretch/>
+        </p:blipFill>
+        <p:spPr>
+          <a:xfrm>
+            <a:off x="6448349" y="4486961"/>
+            <a:ext cx="171907" cy="152705"/>
+          </a:xfrm>
+          <a:prstGeom prst="rect">
+            <a:avLst/>
+          </a:prstGeom>
+        </p:spPr>
+      </p:pic>
+      <p:sp>
+        <p:nvSpPr>
+          <p:cNvPr id="23" name="Text 15"/>
+          <p:cNvSpPr txBox="1"/>
+          <p:nvPr/>
+        </p:nvSpPr>
+        <p:spPr>
+          <a:xfrm>
+            <a:off x="6734556" y="4448556"/>
+            <a:ext cx="3986784" cy="219456"/>
+          </a:xfrm>
+          <a:prstGeom prst="rect">
+            <a:avLst/>
+          </a:prstGeom>
+          <a:noFill/>
+          <a:ln/>
+        </p:spPr>
+        <p:txBody>
+          <a:bodyPr wrap="square" lIns="0" tIns="0" rIns="0" bIns="0" rtlCol="0" anchor="ctr"/>
+          <a:lstStyle/>
+          <a:p>
+            <a:pPr marL="0" indent="0" algn="l">
+              <a:buNone/>
+            </a:pPr>
+            <a:r>
+              <a:rPr lang="en-US" sz="1200" b="1" dirty="0">
+                <a:solidFill>
+                  <a:srgbClr val="FFFFFF"/>
+                </a:solidFill>
+                <a:latin typeface="Poppins" pitchFamily="34" charset="0"/>
+                <a:ea typeface="Poppins" pitchFamily="34" charset="-122"/>
+                <a:cs typeface="Poppins" pitchFamily="34" charset="-120"/>
+              </a:rPr>
+              <a:t>Runtime and timing method</a:t>
+            </a:r>
+            <a:endParaRPr lang="en-US" sz="1200" dirty="0"/>
+          </a:p>
+        </p:txBody>
+      </p:sp>
+      <p:sp>
+        <p:nvSpPr>
+          <p:cNvPr id="24" name="Text 16"/>
+          <p:cNvSpPr txBox="1"/>
+          <p:nvPr/>
+        </p:nvSpPr>
+        <p:spPr>
+          <a:xfrm>
+            <a:off x="6448349" y="4791456"/>
+            <a:ext cx="3986784" cy="1335024"/>
+          </a:xfrm>
+          <a:prstGeom prst="rect">
+            <a:avLst/>
+          </a:prstGeom>
+          <a:noFill/>
+          <a:ln/>
+        </p:spPr>
+        <p:txBody>
+          <a:bodyPr wrap="square" lIns="0" tIns="0" rIns="0" bIns="0" rtlCol="0" anchor="t"/>
+          <a:lstStyle/>
+          <a:p>
+            <a:pPr marL="0" indent="0" algn="l">
+              <a:lnSpc>
+                <a:spcPct val="115000"/>
+              </a:lnSpc>
+              <a:spcAft>
+                <a:spcPts val="0"/>
+              </a:spcAft>
+              <a:buNone/>
+            </a:pPr>
+            <a:r>
+              <a:rPr sz="1050">
+                <a:solidFill>
+                  <a:srgbClr val="D1D5DB"/>
+                </a:solidFill>
+                <a:latin typeface="Poppins"/>
+              </a:rPr>
+              <a:t>3.72s/pair mean, 3.62s median. time.perf_counter() around localize() only — covers candidate generation, scoring, ranking, refinement; excludes image I/O. Single process, CPU only, no GPU. Windows 11 x64, Raptor Lake, Python 3.14.6, OpenCV 5.0.0; one core used. A 2-core container takes 6.08s/pair — the ratio is portable, the absolute is not.</a:t>
+            </a:r>
+            <a:endParaRPr lang="en-US" sz="1000" dirty="0"/>
+          </a:p>
+        </p:txBody>
+      </p:sp>
+      <p:pic>
+        <p:nvPicPr>
+          <p:cNvPr id="25" name="Picture 24">
+            <a:extLst>
+              <a:ext uri="{FF2B5EF4-FFF2-40B4-BE49-F238E27FC236}">
+                <a16:creationId xmlns:a16="http://schemas.microsoft.com/office/drawing/2014/main" id="{C2A87E08-9934-FBF2-2F29-11A8271B362B}"/>
+              </a:ext>
+            </a:extLst>
+          </p:cNvPr>
+          <p:cNvPicPr>
+            <a:picLocks noChangeAspect="1"/>
+          </p:cNvPicPr>
+          <p:nvPr/>
+        </p:nvPicPr>
+        <p:blipFill>
+          <a:blip r:embed="rId6"/>
+          <a:stretch>
+            <a:fillRect/>
+          </a:stretch>
+        </p:blipFill>
+        <p:spPr>
+          <a:xfrm>
+            <a:off x="5406922" y="227710"/>
+            <a:ext cx="1607366" cy="783591"/>
+          </a:xfrm>
+          <a:prstGeom prst="rect">
+            <a:avLst/>
+          </a:prstGeom>
+        </p:spPr>
+      </p:pic>
+      <p:sp>
+        <p:nvSpPr>
+          <p:cNvPr id="27" name="Shape 1">
+            <a:extLst>
+              <a:ext uri="{FF2B5EF4-FFF2-40B4-BE49-F238E27FC236}">
+                <a16:creationId xmlns:a16="http://schemas.microsoft.com/office/drawing/2014/main" id="{850BA2BE-D607-619F-6960-A71277019D3B}"/>
+              </a:ext>
+            </a:extLst>
+          </p:cNvPr>
+          <p:cNvSpPr/>
+          <p:nvPr/>
+        </p:nvSpPr>
+        <p:spPr>
+          <a:xfrm>
+            <a:off x="571500" y="209602"/>
+            <a:ext cx="11048695" cy="857707"/>
+          </a:xfrm>
+          <a:prstGeom prst="roundRect">
+            <a:avLst>
+              <a:gd name="adj" fmla="val 9476"/>
+            </a:avLst>
+          </a:prstGeom>
+          <a:solidFill>
+            <a:srgbClr val="FFFFFF">
+              <a:alpha val="95000"/>
+            </a:srgbClr>
+          </a:solidFill>
+          <a:ln/>
+          <a:effectLst>
+            <a:outerShdw blurRad="63500" dist="38100" dir="5400000" algn="bl" rotWithShape="0">
+              <a:srgbClr val="000000">
+                <a:alpha val="10000"/>
+              </a:srgbClr>
+            </a:outerShdw>
+          </a:effectLst>
+        </p:spPr>
+        <p:txBody>
+          <a:bodyPr/>
+          <a:lstStyle/>
+          <a:p>
+            <a:endParaRPr lang="en-IN"/>
+          </a:p>
+        </p:txBody>
+      </p:sp>
+      <p:pic>
+        <p:nvPicPr>
+          <p:cNvPr id="28" name="Picture 27">
+            <a:extLst>
+              <a:ext uri="{FF2B5EF4-FFF2-40B4-BE49-F238E27FC236}">
+                <a16:creationId xmlns:a16="http://schemas.microsoft.com/office/drawing/2014/main" id="{C5D3E59C-FE74-F0BE-9B10-98C8003398BC}"/>
+              </a:ext>
+            </a:extLst>
+          </p:cNvPr>
+          <p:cNvPicPr>
+            <a:picLocks noChangeAspect="1"/>
+          </p:cNvPicPr>
+          <p:nvPr/>
+        </p:nvPicPr>
+        <p:blipFill>
+          <a:blip r:embed="rId7">
+            <a:extLst>
+              <a:ext uri="{28A0092B-C50C-407E-A947-70E740481C1C}">
+                <a14:useLocalDpi xmlns:a14="http://schemas.microsoft.com/office/drawing/2010/main" val="0"/>
+              </a:ext>
+            </a:extLst>
+          </a:blip>
+          <a:stretch>
+            <a:fillRect/>
+          </a:stretch>
+        </p:blipFill>
+        <p:spPr>
+          <a:xfrm>
+            <a:off x="1628859" y="329389"/>
+            <a:ext cx="9163491" cy="586435"/>
+          </a:xfrm>
+          <a:prstGeom prst="rect">
+            <a:avLst/>
+          </a:prstGeom>
+        </p:spPr>
+      </p:pic>
+    </p:spTree>
+  </p:cSld>
+  <p:clrMapOvr>
+    <a:masterClrMapping/>
+  </p:clrMapOvr>
+</p:sld>
+</file>
+
+<file path=ppt/slides/slide9.xml><?xml version="1.0" encoding="utf-8"?>
+<p:sld xmlns:a="http://schemas.openxmlformats.org/drawingml/2006/main" xmlns:r="http://schemas.openxmlformats.org/officeDocument/2006/relationships" xmlns:p="http://schemas.openxmlformats.org/presentationml/2006/main">
+  <p:cSld name="Slide 7">
+    <p:spTree>
+      <p:nvGrpSpPr>
+        <p:cNvPr id="1" name=""/>
+        <p:cNvGrpSpPr/>
+        <p:nvPr/>
+      </p:nvGrpSpPr>
+      <p:grpSpPr>
+        <a:xfrm>
+          <a:off x="0" y="0"/>
+          <a:ext cx="0" cy="0"/>
+          <a:chOff x="0" y="0"/>
+          <a:chExt cx="0" cy="0"/>
+        </a:xfrm>
+      </p:grpSpPr>
+      <p:sp>
+        <p:nvSpPr>
+          <p:cNvPr id="2" name="Shape 0"/>
+          <p:cNvSpPr/>
+          <p:nvPr/>
+        </p:nvSpPr>
+        <p:spPr>
+          <a:xfrm>
+            <a:off x="0" y="0"/>
+            <a:ext cx="12191695" cy="6858000"/>
+          </a:xfrm>
+          <a:prstGeom prst="rect">
+            <a:avLst/>
+          </a:prstGeom>
+          <a:solidFill>
+            <a:srgbClr val="000036"/>
+          </a:solidFill>
+          <a:ln/>
+        </p:spPr>
+        <p:txBody>
+          <a:bodyPr/>
+          <a:lstStyle/>
+          <a:p>
+            <a:endParaRPr lang="en-IN"/>
+          </a:p>
+        </p:txBody>
+      </p:sp>
+      <p:pic>
+        <p:nvPicPr>
+          <p:cNvPr id="3" name="Image 0" descr="preencoded.png"/>
+          <p:cNvPicPr>
+            <a:picLocks noChangeAspect="1"/>
+          </p:cNvPicPr>
+          <p:nvPr/>
+        </p:nvPicPr>
+        <p:blipFill>
+          <a:blip r:embed="rId2">
+            <a:alphaModFix amt="10000"/>
+          </a:blip>
+          <a:srcRect l="12327" r="12327"/>
+          <a:stretch/>
+        </p:blipFill>
+        <p:spPr>
+          <a:xfrm>
+            <a:off x="0" y="0"/>
+            <a:ext cx="12191695" cy="6858000"/>
+          </a:xfrm>
+          <a:prstGeom prst="rect">
+            <a:avLst/>
+          </a:prstGeom>
+        </p:spPr>
+      </p:pic>
+      <p:sp>
+        <p:nvSpPr>
+          <p:cNvPr id="4" name="Shape 1"/>
+          <p:cNvSpPr/>
+          <p:nvPr/>
+        </p:nvSpPr>
+        <p:spPr>
+          <a:xfrm>
+            <a:off x="571500" y="286207"/>
+            <a:ext cx="11048695" cy="666598"/>
+          </a:xfrm>
+          <a:prstGeom prst="roundRect">
+            <a:avLst>
+              <a:gd name="adj" fmla="val 15677"/>
+            </a:avLst>
+          </a:prstGeom>
+          <a:solidFill>
+            <a:srgbClr val="FFFFFF">
+              <a:alpha val="95000"/>
+            </a:srgbClr>
+          </a:solidFill>
+          <a:ln/>
+          <a:effectLst>
+            <a:outerShdw blurRad="63500" dist="38100" dir="5400000" algn="bl" rotWithShape="0">
+              <a:srgbClr val="000000">
+                <a:alpha val="10000"/>
+              </a:srgbClr>
+            </a:outerShdw>
+          </a:effectLst>
+        </p:spPr>
+        <p:txBody>
+          <a:bodyPr/>
+          <a:lstStyle/>
+          <a:p>
+            <a:endParaRPr lang="en-IN"/>
+          </a:p>
+        </p:txBody>
+      </p:sp>
+      <p:sp>
+        <p:nvSpPr>
+          <p:cNvPr id="7" name="Shape 2"/>
+          <p:cNvSpPr/>
+          <p:nvPr/>
+        </p:nvSpPr>
+        <p:spPr>
+          <a:xfrm>
+            <a:off x="571500" y="1333195"/>
+            <a:ext cx="75895" cy="409651"/>
+          </a:xfrm>
+          <a:prstGeom prst="rect">
+            <a:avLst/>
+          </a:prstGeom>
+          <a:solidFill>
+            <a:srgbClr val="88E555"/>
+          </a:solidFill>
+          <a:ln/>
+        </p:spPr>
+        <p:txBody>
+          <a:bodyPr/>
+          <a:lstStyle/>
+          <a:p>
+            <a:endParaRPr lang="en-IN"/>
+          </a:p>
+        </p:txBody>
+      </p:sp>
+      <p:sp>
+        <p:nvSpPr>
+          <p:cNvPr id="8" name="Text 3"/>
+          <p:cNvSpPr txBox="1"/>
+          <p:nvPr/>
+        </p:nvSpPr>
+        <p:spPr>
+          <a:xfrm>
+            <a:off x="838505" y="1295705"/>
+            <a:ext cx="9692640" cy="467258"/>
+          </a:xfrm>
+          <a:prstGeom prst="rect">
+            <a:avLst/>
+          </a:prstGeom>
+          <a:noFill/>
+          <a:ln/>
+        </p:spPr>
+        <p:txBody>
+          <a:bodyPr wrap="square" lIns="0" tIns="0" rIns="0" bIns="0" rtlCol="0" anchor="ctr"/>
+          <a:lstStyle/>
+          <a:p>
+            <a:pPr marL="0" indent="0" algn="l">
+              <a:buNone/>
+            </a:pPr>
+            <a:r>
+              <a:rPr lang="en-US" sz="2600" b="1" dirty="0">
+                <a:solidFill>
+                  <a:srgbClr val="FFFFFF"/>
+                </a:solidFill>
+                <a:latin typeface="Poppins" pitchFamily="34" charset="0"/>
+                <a:ea typeface="Poppins" pitchFamily="34" charset="-122"/>
+                <a:cs typeface="Poppins" pitchFamily="34" charset="-120"/>
+              </a:rPr>
+              <a:t>Robustness and Ablation</a:t>
+            </a:r>
+            <a:endParaRPr lang="en-US" sz="2600" dirty="0"/>
+          </a:p>
+        </p:txBody>
+      </p:sp>
+      <p:sp>
+        <p:nvSpPr>
+          <p:cNvPr id="9" name="Shape 4"/>
+          <p:cNvSpPr/>
+          <p:nvPr/>
+        </p:nvSpPr>
+        <p:spPr>
+          <a:xfrm>
+            <a:off x="571500" y="2021738"/>
+            <a:ext cx="11048695" cy="4552798"/>
+          </a:xfrm>
+          <a:prstGeom prst="roundRect">
+            <a:avLst>
+              <a:gd name="adj" fmla="val 672"/>
+            </a:avLst>
+          </a:prstGeom>
+          <a:solidFill>
+            <a:srgbClr val="FFFFFF">
+              <a:alpha val="5000"/>
+            </a:srgbClr>
+          </a:solidFill>
+          <a:ln w="12700">
+            <a:solidFill>
+              <a:srgbClr val="88E555">
+                <a:alpha val="30000"/>
+              </a:srgbClr>
+            </a:solidFill>
+            <a:prstDash val="solid"/>
+          </a:ln>
+        </p:spPr>
+        <p:txBody>
+          <a:bodyPr/>
+          <a:lstStyle/>
+          <a:p>
+            <a:endParaRPr lang="en-IN"/>
+          </a:p>
+        </p:txBody>
+      </p:sp>
+      <p:sp>
+        <p:nvSpPr>
+          <p:cNvPr id="10" name="Shape 5"/>
+          <p:cNvSpPr/>
+          <p:nvPr/>
+        </p:nvSpPr>
+        <p:spPr>
+          <a:xfrm>
+            <a:off x="571500" y="2021738"/>
+            <a:ext cx="190195" cy="190195"/>
+          </a:xfrm>
+          <a:prstGeom prst="roundRect">
+            <a:avLst>
+              <a:gd name="adj" fmla="val 192308"/>
+            </a:avLst>
+          </a:prstGeom>
+          <a:noFill/>
+          <a:ln w="38100">
+            <a:solidFill>
+              <a:srgbClr val="88E555"/>
+            </a:solidFill>
+            <a:prstDash val="solid"/>
+          </a:ln>
+        </p:spPr>
+        <p:txBody>
+          <a:bodyPr/>
+          <a:lstStyle/>
+          <a:p>
+            <a:endParaRPr lang="en-IN"/>
+          </a:p>
+        </p:txBody>
+      </p:sp>
+      <p:sp>
+        <p:nvSpPr>
+          <p:cNvPr id="11" name="Shape 6"/>
+          <p:cNvSpPr/>
+          <p:nvPr/>
+        </p:nvSpPr>
+        <p:spPr>
+          <a:xfrm>
+            <a:off x="11430000" y="2021738"/>
+            <a:ext cx="190195" cy="190195"/>
+          </a:xfrm>
+          <a:prstGeom prst="rect">
+            <a:avLst/>
+          </a:prstGeom>
+          <a:noFill/>
+          <a:ln w="38100">
+            <a:solidFill>
+              <a:srgbClr val="88E555"/>
+            </a:solidFill>
+            <a:prstDash val="solid"/>
+          </a:ln>
+        </p:spPr>
+        <p:txBody>
+          <a:bodyPr/>
+          <a:lstStyle/>
+          <a:p>
+            <a:endParaRPr lang="en-IN"/>
+          </a:p>
+        </p:txBody>
+      </p:sp>
+      <p:sp>
+        <p:nvSpPr>
+          <p:cNvPr id="12" name="Shape 7"/>
+          <p:cNvSpPr/>
+          <p:nvPr/>
+        </p:nvSpPr>
+        <p:spPr>
+          <a:xfrm>
+            <a:off x="571500" y="6381598"/>
+            <a:ext cx="190195" cy="190195"/>
+          </a:xfrm>
+          <a:prstGeom prst="rect">
+            <a:avLst/>
+          </a:prstGeom>
+          <a:noFill/>
+          <a:ln w="38100">
+            <a:solidFill>
+              <a:srgbClr val="88E555"/>
+            </a:solidFill>
+            <a:prstDash val="solid"/>
+          </a:ln>
+        </p:spPr>
+        <p:txBody>
+          <a:bodyPr/>
+          <a:lstStyle/>
+          <a:p>
+            <a:endParaRPr lang="en-IN"/>
+          </a:p>
+        </p:txBody>
+      </p:sp>
+      <p:sp>
+        <p:nvSpPr>
+          <p:cNvPr id="13" name="Shape 8"/>
+          <p:cNvSpPr/>
+          <p:nvPr/>
+        </p:nvSpPr>
+        <p:spPr>
+          <a:xfrm>
+            <a:off x="11430000" y="6381598"/>
+            <a:ext cx="190195" cy="190195"/>
+          </a:xfrm>
+          <a:prstGeom prst="rect">
+            <a:avLst/>
+          </a:prstGeom>
+          <a:noFill/>
+          <a:ln w="38100">
+            <a:solidFill>
+              <a:srgbClr val="88E555"/>
+            </a:solidFill>
+            <a:prstDash val="solid"/>
+          </a:ln>
+        </p:spPr>
+        <p:txBody>
+          <a:bodyPr/>
+          <a:lstStyle/>
+          <a:p>
+            <a:endParaRPr lang="en-IN"/>
+          </a:p>
+        </p:txBody>
+      </p:sp>
+      <p:sp>
+        <p:nvSpPr>
+          <p:cNvPr id="14" name="Shape 9"/>
+          <p:cNvSpPr/>
+          <p:nvPr/>
+        </p:nvSpPr>
+        <p:spPr>
+          <a:xfrm>
+            <a:off x="961949" y="2412187"/>
+            <a:ext cx="571500" cy="571500"/>
+          </a:xfrm>
+          <a:prstGeom prst="ellipse">
+            <a:avLst/>
+          </a:prstGeom>
+          <a:solidFill>
+            <a:srgbClr val="273383">
+              <a:alpha val="50000"/>
+            </a:srgbClr>
+          </a:solidFill>
+          <a:ln w="25400">
+            <a:solidFill>
+              <a:srgbClr val="AEFF82"/>
+            </a:solidFill>
+            <a:prstDash val="solid"/>
+          </a:ln>
+        </p:spPr>
+        <p:txBody>
+          <a:bodyPr/>
+          <a:lstStyle/>
+          <a:p>
+            <a:endParaRPr lang="en-IN"/>
+          </a:p>
+        </p:txBody>
+      </p:sp>
+      <p:pic>
+        <p:nvPicPr>
+          <p:cNvPr id="15" name="Image 3" descr="preencoded.png"/>
+          <p:cNvPicPr>
+            <a:picLocks noChangeAspect="1"/>
+          </p:cNvPicPr>
+          <p:nvPr/>
+        </p:nvPicPr>
+        <p:blipFill>
+          <a:blip r:embed="rId3"/>
+          <a:srcRect/>
+          <a:stretch/>
+        </p:blipFill>
+        <p:spPr>
+          <a:xfrm>
+            <a:off x="1133856" y="2583180"/>
+            <a:ext cx="228600" cy="228600"/>
+          </a:xfrm>
+          <a:prstGeom prst="rect">
+            <a:avLst/>
+          </a:prstGeom>
+        </p:spPr>
+      </p:pic>
+      <p:sp>
+        <p:nvSpPr>
+          <p:cNvPr id="16" name="Text 10"/>
+          <p:cNvSpPr txBox="1"/>
+          <p:nvPr/>
+        </p:nvSpPr>
+        <p:spPr>
+          <a:xfrm>
+            <a:off x="961949" y="3193085"/>
+            <a:ext cx="10239451" cy="685800"/>
+          </a:xfrm>
+          <a:prstGeom prst="rect">
+            <a:avLst/>
+          </a:prstGeom>
+          <a:noFill/>
+          <a:ln/>
+        </p:spPr>
+        <p:txBody>
+          <a:bodyPr wrap="square" lIns="0" tIns="0" rIns="0" bIns="0" rtlCol="0" anchor="ctr"/>
+          <a:lstStyle/>
+          <a:p>
+            <a:pPr marL="0" indent="0" algn="l">
+              <a:buNone/>
+            </a:pPr>
+            <a:r>
+              <a:rPr lang="en-US" sz="1800" dirty="0">
+                <a:solidFill>
+                  <a:srgbClr val="AEFF82">
+                    <a:alpha val="80000"/>
+                  </a:srgbClr>
+                </a:solidFill>
+                <a:latin typeface="Poppins" pitchFamily="34" charset="0"/>
+                <a:ea typeface="Poppins" pitchFamily="34" charset="-122"/>
+                <a:cs typeface="Poppins" pitchFamily="34" charset="-120"/>
+              </a:rPr>
+              <a:t>Where it holds, where it breaks, and what each shipped change actually bought.</a:t>
+            </a:r>
+            <a:endParaRPr lang="en-US" sz="1800" dirty="0"/>
+          </a:p>
+        </p:txBody>
+      </p:sp>
+      <p:sp>
+        <p:nvSpPr>
+          <p:cNvPr id="17" name="Shape 11"/>
+          <p:cNvSpPr/>
+          <p:nvPr/>
+        </p:nvSpPr>
+        <p:spPr>
+          <a:xfrm>
+            <a:off x="961949" y="4210812"/>
+            <a:ext cx="5020056" cy="2053630"/>
+          </a:xfrm>
+          <a:prstGeom prst="roundRect">
+            <a:avLst>
+              <a:gd name="adj" fmla="val 4836"/>
+            </a:avLst>
+          </a:prstGeom>
+          <a:solidFill>
+            <a:srgbClr val="1E3A8A">
+              <a:alpha val="40000"/>
+            </a:srgbClr>
+          </a:solidFill>
+          <a:ln w="12700">
+            <a:solidFill>
+              <a:srgbClr val="1D4ED8"/>
+            </a:solidFill>
+            <a:prstDash val="solid"/>
+          </a:ln>
+        </p:spPr>
+        <p:txBody>
+          <a:bodyPr/>
+          <a:lstStyle/>
+          <a:p>
+            <a:endParaRPr lang="en-IN"/>
+          </a:p>
+        </p:txBody>
+      </p:sp>
+      <p:pic>
+        <p:nvPicPr>
+          <p:cNvPr id="18" name="Image 4" descr="preencoded.png"/>
+          <p:cNvPicPr>
+            <a:picLocks noChangeAspect="1"/>
+          </p:cNvPicPr>
+          <p:nvPr/>
+        </p:nvPicPr>
+        <p:blipFill>
+          <a:blip r:embed="rId4"/>
+          <a:srcRect/>
+          <a:stretch/>
+        </p:blipFill>
+        <p:spPr>
+          <a:xfrm>
+            <a:off x="1200607" y="4486961"/>
+            <a:ext cx="152705" cy="152705"/>
+          </a:xfrm>
+          <a:prstGeom prst="rect">
+            <a:avLst/>
+          </a:prstGeom>
+        </p:spPr>
+      </p:pic>
+      <p:sp>
+        <p:nvSpPr>
+          <p:cNvPr id="19" name="Text 12"/>
+          <p:cNvSpPr txBox="1"/>
+          <p:nvPr/>
+        </p:nvSpPr>
+        <p:spPr>
+          <a:xfrm>
+            <a:off x="1466698" y="4448556"/>
+            <a:ext cx="4151376" cy="219456"/>
+          </a:xfrm>
+          <a:prstGeom prst="rect">
+            <a:avLst/>
+          </a:prstGeom>
+          <a:noFill/>
+          <a:ln/>
+        </p:spPr>
+        <p:txBody>
+          <a:bodyPr wrap="square" lIns="0" tIns="0" rIns="0" bIns="0" rtlCol="0" anchor="ctr"/>
+          <a:lstStyle/>
+          <a:p>
+            <a:pPr marL="0" indent="0" algn="l">
+              <a:buNone/>
+            </a:pPr>
+            <a:r>
+              <a:rPr lang="en-US" sz="1200" b="1" dirty="0">
+                <a:solidFill>
+                  <a:srgbClr val="FFFFFF"/>
+                </a:solidFill>
+                <a:latin typeface="Poppins" pitchFamily="34" charset="0"/>
+                <a:ea typeface="Poppins" pitchFamily="34" charset="-122"/>
+                <a:cs typeface="Poppins" pitchFamily="34" charset="-120"/>
+              </a:rPr>
+              <a:t>Robustness across conditions</a:t>
+            </a:r>
+            <a:endParaRPr lang="en-US" sz="1200" dirty="0"/>
+          </a:p>
+        </p:txBody>
+      </p:sp>
+      <p:sp>
+        <p:nvSpPr>
+          <p:cNvPr id="20" name="Text 13"/>
+          <p:cNvSpPr txBox="1"/>
+          <p:nvPr/>
+        </p:nvSpPr>
+        <p:spPr>
+          <a:xfrm>
+            <a:off x="1200607" y="4791456"/>
+            <a:ext cx="4148633" cy="1335024"/>
+          </a:xfrm>
+          <a:prstGeom prst="rect">
+            <a:avLst/>
+          </a:prstGeom>
+          <a:noFill/>
+          <a:ln/>
+        </p:spPr>
+        <p:txBody>
+          <a:bodyPr wrap="square" lIns="0" tIns="0" rIns="0" bIns="0" rtlCol="0" anchor="t"/>
+          <a:lstStyle/>
+          <a:p>
+            <a:pPr marL="0" indent="0" algn="l">
+              <a:lnSpc>
+                <a:spcPct val="115000"/>
+              </a:lnSpc>
+              <a:spcAft>
+                <a:spcPts val="0"/>
+              </a:spcAft>
+              <a:buNone/>
+            </a:pPr>
+            <a:r>
+              <a:rPr sz="1050">
+                <a:solidFill>
+                  <a:srgbClr val="D1D5DB"/>
+                </a:solidFill>
+                <a:latin typeface="Poppins"/>
+              </a:rPr>
+              <a:t>By split: validation 92.5% - cross_generator 80.0% (EXTERNAL data) - challenge 71.9% - development 70.8% - held_out 70.0%. By condition: no rotation drift 83.1% vs rotation drift 50.0%; no scale drift 80.0% vs scale drift 65.4%; low noise 80.0% vs high noise 66.7%. Geometry dominates; noise barely moves it. Per family: 100% on strip-anchor and mat-boundary crops, 37.5% on dense periodic.</a:t>
+            </a:r>
+            <a:endParaRPr lang="en-US" sz="1000" dirty="0"/>
+          </a:p>
+        </p:txBody>
+      </p:sp>
+      <p:sp>
+        <p:nvSpPr>
+          <p:cNvPr id="21" name="Shape 14"/>
+          <p:cNvSpPr/>
+          <p:nvPr/>
+        </p:nvSpPr>
+        <p:spPr>
+          <a:xfrm>
+            <a:off x="6210605" y="4210811"/>
+            <a:ext cx="5020056" cy="2053629"/>
+          </a:xfrm>
+          <a:prstGeom prst="roundRect">
+            <a:avLst>
+              <a:gd name="adj" fmla="val 4836"/>
+            </a:avLst>
+          </a:prstGeom>
+          <a:solidFill>
+            <a:srgbClr val="1E3A8A">
+              <a:alpha val="40000"/>
+            </a:srgbClr>
+          </a:solidFill>
+          <a:ln w="12700">
+            <a:solidFill>
+              <a:srgbClr val="1D4ED8"/>
+            </a:solidFill>
+            <a:prstDash val="solid"/>
+          </a:ln>
+        </p:spPr>
+        <p:txBody>
+          <a:bodyPr/>
+          <a:lstStyle/>
+          <a:p>
+            <a:endParaRPr lang="en-IN"/>
+          </a:p>
+        </p:txBody>
+      </p:sp>
+      <p:pic>
+        <p:nvPicPr>
+          <p:cNvPr id="22" name="Image 5" descr="preencoded.png"/>
+          <p:cNvPicPr>
+            <a:picLocks noChangeAspect="1"/>
+          </p:cNvPicPr>
+          <p:nvPr/>
+        </p:nvPicPr>
+        <p:blipFill>
+          <a:blip r:embed="rId5"/>
+          <a:srcRect l="-33" r="-33"/>
+          <a:stretch/>
+        </p:blipFill>
+        <p:spPr>
+          <a:xfrm>
+            <a:off x="6448349" y="4486961"/>
+            <a:ext cx="171907" cy="152705"/>
+          </a:xfrm>
+          <a:prstGeom prst="rect">
+            <a:avLst/>
+          </a:prstGeom>
+        </p:spPr>
+      </p:pic>
+      <p:sp>
+        <p:nvSpPr>
+          <p:cNvPr id="23" name="Text 15"/>
+          <p:cNvSpPr txBox="1"/>
+          <p:nvPr/>
+        </p:nvSpPr>
+        <p:spPr>
+          <a:xfrm>
+            <a:off x="6734556" y="4448556"/>
+            <a:ext cx="3986784" cy="219456"/>
+          </a:xfrm>
+          <a:prstGeom prst="rect">
+            <a:avLst/>
+          </a:prstGeom>
+          <a:noFill/>
+          <a:ln/>
+        </p:spPr>
+        <p:txBody>
+          <a:bodyPr wrap="square" lIns="0" tIns="0" rIns="0" bIns="0" rtlCol="0" anchor="ctr"/>
+          <a:lstStyle/>
+          <a:p>
+            <a:pPr marL="0" indent="0" algn="l">
+              <a:buNone/>
+            </a:pPr>
+            <a:r>
+              <a:rPr lang="en-US" sz="1200" b="1" dirty="0">
+                <a:solidFill>
+                  <a:srgbClr val="FFFFFF"/>
+                </a:solidFill>
+                <a:latin typeface="Poppins" pitchFamily="34" charset="0"/>
+                <a:ea typeface="Poppins" pitchFamily="34" charset="-122"/>
+                <a:cs typeface="Poppins" pitchFamily="34" charset="-120"/>
+              </a:rPr>
+              <a:t>Ablation — what each change bought</a:t>
+            </a:r>
+            <a:endParaRPr lang="en-US" sz="1200" dirty="0"/>
+          </a:p>
+        </p:txBody>
+      </p:sp>
+      <p:sp>
+        <p:nvSpPr>
+          <p:cNvPr id="24" name="Text 16"/>
+          <p:cNvSpPr txBox="1"/>
+          <p:nvPr/>
+        </p:nvSpPr>
+        <p:spPr>
+          <a:xfrm>
+            <a:off x="6448349" y="4791456"/>
+            <a:ext cx="3986784" cy="1335024"/>
+          </a:xfrm>
+          <a:prstGeom prst="rect">
+            <a:avLst/>
+          </a:prstGeom>
+          <a:noFill/>
+          <a:ln/>
+        </p:spPr>
+        <p:txBody>
+          <a:bodyPr wrap="square" lIns="0" tIns="0" rIns="0" bIns="0" rtlCol="0" anchor="t"/>
+          <a:lstStyle/>
+          <a:p>
+            <a:pPr marL="0" indent="0" algn="l">
+              <a:lnSpc>
+                <a:spcPct val="115000"/>
+              </a:lnSpc>
+              <a:spcAft>
+                <a:spcPts val="0"/>
+              </a:spcAft>
+              <a:buNone/>
+            </a:pPr>
+            <a:r>
+              <a:rPr sz="1050" dirty="0">
+                <a:solidFill>
+                  <a:srgbClr val="D1D5DB"/>
+                </a:solidFill>
+                <a:latin typeface="Poppins"/>
+              </a:rPr>
+              <a:t>71.2% -&gt; 77.6% (+6.4pp) across four documented gate exceptions: scale grid widened to the literal 9:1-11:1 (A2); multiway </a:t>
+            </a:r>
+            <a:r>
+              <a:rPr sz="1050" dirty="0" err="1">
+                <a:solidFill>
+                  <a:srgbClr val="D1D5DB"/>
+                </a:solidFill>
+                <a:latin typeface="Poppins"/>
+              </a:rPr>
+              <a:t>centre</a:t>
+            </a:r>
+            <a:r>
+              <a:rPr sz="1050" dirty="0">
+                <a:solidFill>
+                  <a:srgbClr val="D1D5DB"/>
+                </a:solidFill>
+                <a:latin typeface="Poppins"/>
+              </a:rPr>
+              <a:t> tie-break (A6); PSF-matched dual-arm candidate generation (+3.21pp production, +3.68pp on an independent seed, sign test p = 0.031); and an ambiguity-threshold recalibration verified bit-identical on every prediction.</a:t>
+            </a:r>
+            <a:endParaRPr lang="en-US" sz="1000" dirty="0"/>
+          </a:p>
+        </p:txBody>
+      </p:sp>
+      <p:pic>
+        <p:nvPicPr>
+          <p:cNvPr id="25" name="Picture 24">
+            <a:extLst>
+              <a:ext uri="{FF2B5EF4-FFF2-40B4-BE49-F238E27FC236}">
+                <a16:creationId xmlns:a16="http://schemas.microsoft.com/office/drawing/2014/main" id="{C2A87E08-9934-FBF2-2F29-11A8271B362B}"/>
+              </a:ext>
+            </a:extLst>
+          </p:cNvPr>
+          <p:cNvPicPr>
+            <a:picLocks noChangeAspect="1"/>
+          </p:cNvPicPr>
+          <p:nvPr/>
+        </p:nvPicPr>
+        <p:blipFill>
+          <a:blip r:embed="rId6"/>
+          <a:stretch>
+            <a:fillRect/>
+          </a:stretch>
+        </p:blipFill>
+        <p:spPr>
+          <a:xfrm>
+            <a:off x="5406922" y="227710"/>
+            <a:ext cx="1607366" cy="783591"/>
+          </a:xfrm>
+          <a:prstGeom prst="rect">
+            <a:avLst/>
+          </a:prstGeom>
+        </p:spPr>
+      </p:pic>
+      <p:sp>
+        <p:nvSpPr>
+          <p:cNvPr id="27" name="Shape 1">
+            <a:extLst>
+              <a:ext uri="{FF2B5EF4-FFF2-40B4-BE49-F238E27FC236}">
+                <a16:creationId xmlns:a16="http://schemas.microsoft.com/office/drawing/2014/main" id="{850BA2BE-D607-619F-6960-A71277019D3B}"/>
+              </a:ext>
+            </a:extLst>
+          </p:cNvPr>
+          <p:cNvSpPr/>
+          <p:nvPr/>
+        </p:nvSpPr>
+        <p:spPr>
+          <a:xfrm>
+            <a:off x="571500" y="209602"/>
+            <a:ext cx="11048695" cy="857707"/>
+          </a:xfrm>
+          <a:prstGeom prst="roundRect">
+            <a:avLst>
+              <a:gd name="adj" fmla="val 9476"/>
+            </a:avLst>
+          </a:prstGeom>
+          <a:solidFill>
+            <a:srgbClr val="FFFFFF">
+              <a:alpha val="95000"/>
+            </a:srgbClr>
+          </a:solidFill>
+          <a:ln/>
+          <a:effectLst>
+            <a:outerShdw blurRad="63500" dist="38100" dir="5400000" algn="bl" rotWithShape="0">
+              <a:srgbClr val="000000">
+                <a:alpha val="10000"/>
+              </a:srgbClr>
+            </a:outerShdw>
+          </a:effectLst>
+        </p:spPr>
+        <p:txBody>
+          <a:bodyPr/>
+          <a:lstStyle/>
+          <a:p>
+            <a:endParaRPr lang="en-IN"/>
+          </a:p>
+        </p:txBody>
+      </p:sp>
+      <p:pic>
+        <p:nvPicPr>
+          <p:cNvPr id="28" name="Picture 27">
+            <a:extLst>
+              <a:ext uri="{FF2B5EF4-FFF2-40B4-BE49-F238E27FC236}">
+                <a16:creationId xmlns:a16="http://schemas.microsoft.com/office/drawing/2014/main" id="{C5D3E59C-FE74-F0BE-9B10-98C8003398BC}"/>
+              </a:ext>
+            </a:extLst>
+          </p:cNvPr>
+          <p:cNvPicPr>
+            <a:picLocks noChangeAspect="1"/>
+          </p:cNvPicPr>
+          <p:nvPr/>
+        </p:nvPicPr>
+        <p:blipFill>
+          <a:blip r:embed="rId7">
+            <a:extLst>
+              <a:ext uri="{28A0092B-C50C-407E-A947-70E740481C1C}">
+                <a14:useLocalDpi xmlns:a14="http://schemas.microsoft.com/office/drawing/2010/main" val="0"/>
+              </a:ext>
+            </a:extLst>
+          </a:blip>
+          <a:stretch>
+            <a:fillRect/>
+          </a:stretch>
+        </p:blipFill>
+        <p:spPr>
+          <a:xfrm>
+            <a:off x="1628859" y="329389"/>
             <a:ext cx="9163491" cy="586435"/>
           </a:xfrm>
           <a:prstGeom prst="rect">
@@ -11977,7 +16694,7 @@
         <a:srgbClr val="70AD47"/>
       </a:accent6>
       <a:hlink>
-        <a:srgbClr val="0563C1"/>
+        <a:srgbClr val="7FC4FF"/>
       </a:hlink>
       <a:folHlink>
         <a:srgbClr val="954F72"/>
